--- a/MyKilnBuddy_Architecture.pptx
+++ b/MyKilnBuddy_Architecture.pptx
@@ -9,7 +9,6 @@
     <p:sldId id="257" r:id="rId3"/>
     <p:sldId id="259" r:id="rId4"/>
     <p:sldId id="260" r:id="rId5"/>
-    <p:sldId id="258" r:id="rId6"/>
   </p:sldIdLst>
   <p:sldSz cx="9906000" cy="6858000" type="A4"/>
   <p:notesSz cx="6858000" cy="9144000"/>
@@ -116,6 +115,592 @@
 </p:presentation>
 </file>
 
+<file path=ppt/revisionInfo.xml><?xml version="1.0" encoding="utf-8"?>
+<p1510:revInfo xmlns:a="http://schemas.openxmlformats.org/drawingml/2006/main" xmlns:r="http://schemas.openxmlformats.org/officeDocument/2006/relationships" xmlns:p1510="http://schemas.microsoft.com/office/powerpoint/2015/10/main">
+  <p1510:revLst>
+    <p1510:client id="{C0B75EDB-58EB-4253-B9F3-C87677434C79}" v="15" dt="2026-03-31T13:37:24.308"/>
+  </p1510:revLst>
+</p1510:revInfo>
+</file>
+
+<file path=ppt/changesInfos/changesInfo1.xml><?xml version="1.0" encoding="utf-8"?>
+<pc:chgInfo xmlns:a="http://schemas.openxmlformats.org/drawingml/2006/main" xmlns:r="http://schemas.openxmlformats.org/officeDocument/2006/relationships" xmlns:ac="http://schemas.microsoft.com/office/drawing/2013/main/command" xmlns:pc="http://schemas.microsoft.com/office/powerpoint/2013/main/command">
+  <pc:docChgLst>
+    <pc:chgData name="Martin Ruchti" userId="905d7abe9b363a44" providerId="LiveId" clId="{45D224F6-8253-4FC3-8DB7-F8304B39BDBA}"/>
+    <pc:docChg chg="undo custSel delSld modSld">
+      <pc:chgData name="Martin Ruchti" userId="905d7abe9b363a44" providerId="LiveId" clId="{45D224F6-8253-4FC3-8DB7-F8304B39BDBA}" dt="2026-03-31T13:38:00.019" v="377" actId="1076"/>
+      <pc:docMkLst>
+        <pc:docMk/>
+      </pc:docMkLst>
+      <pc:sldChg chg="addSp delSp modSp mod">
+        <pc:chgData name="Martin Ruchti" userId="905d7abe9b363a44" providerId="LiveId" clId="{45D224F6-8253-4FC3-8DB7-F8304B39BDBA}" dt="2026-03-31T13:33:25.337" v="97" actId="478"/>
+        <pc:sldMkLst>
+          <pc:docMk/>
+          <pc:sldMk cId="2449089741" sldId="257"/>
+        </pc:sldMkLst>
+        <pc:spChg chg="mod">
+          <ac:chgData name="Martin Ruchti" userId="905d7abe9b363a44" providerId="LiveId" clId="{45D224F6-8253-4FC3-8DB7-F8304B39BDBA}" dt="2026-03-31T13:32:32.353" v="82" actId="20577"/>
+          <ac:spMkLst>
+            <pc:docMk/>
+            <pc:sldMk cId="2449089741" sldId="257"/>
+            <ac:spMk id="7" creationId="{DDBF933A-ACF5-D976-3130-57B85C5E473C}"/>
+          </ac:spMkLst>
+        </pc:spChg>
+        <pc:spChg chg="add mod ord">
+          <ac:chgData name="Martin Ruchti" userId="905d7abe9b363a44" providerId="LiveId" clId="{45D224F6-8253-4FC3-8DB7-F8304B39BDBA}" dt="2026-03-31T13:33:08.605" v="93" actId="166"/>
+          <ac:spMkLst>
+            <pc:docMk/>
+            <pc:sldMk cId="2449089741" sldId="257"/>
+            <ac:spMk id="18" creationId="{C1D6C9C1-C2F8-F423-A671-FF7102DD8F16}"/>
+          </ac:spMkLst>
+        </pc:spChg>
+        <pc:spChg chg="mod ord">
+          <ac:chgData name="Martin Ruchti" userId="905d7abe9b363a44" providerId="LiveId" clId="{45D224F6-8253-4FC3-8DB7-F8304B39BDBA}" dt="2026-03-31T13:33:15.568" v="96" actId="166"/>
+          <ac:spMkLst>
+            <pc:docMk/>
+            <pc:sldMk cId="2449089741" sldId="257"/>
+            <ac:spMk id="32" creationId="{A58B2F4F-E403-1463-2770-5117C2CCB9AD}"/>
+          </ac:spMkLst>
+        </pc:spChg>
+        <pc:spChg chg="del">
+          <ac:chgData name="Martin Ruchti" userId="905d7abe9b363a44" providerId="LiveId" clId="{45D224F6-8253-4FC3-8DB7-F8304B39BDBA}" dt="2026-03-31T13:32:07.185" v="54" actId="478"/>
+          <ac:spMkLst>
+            <pc:docMk/>
+            <pc:sldMk cId="2449089741" sldId="257"/>
+            <ac:spMk id="33" creationId="{EFC09842-EC5E-BFAD-A0F0-196EAA83A176}"/>
+          </ac:spMkLst>
+        </pc:spChg>
+        <pc:spChg chg="del">
+          <ac:chgData name="Martin Ruchti" userId="905d7abe9b363a44" providerId="LiveId" clId="{45D224F6-8253-4FC3-8DB7-F8304B39BDBA}" dt="2026-03-31T13:32:21.945" v="70" actId="478"/>
+          <ac:spMkLst>
+            <pc:docMk/>
+            <pc:sldMk cId="2449089741" sldId="257"/>
+            <ac:spMk id="35" creationId="{1D67D9DE-7934-A293-421D-A22EDDAFA57C}"/>
+          </ac:spMkLst>
+        </pc:spChg>
+        <pc:spChg chg="del">
+          <ac:chgData name="Martin Ruchti" userId="905d7abe9b363a44" providerId="LiveId" clId="{45D224F6-8253-4FC3-8DB7-F8304B39BDBA}" dt="2026-03-31T13:32:25.418" v="72" actId="478"/>
+          <ac:spMkLst>
+            <pc:docMk/>
+            <pc:sldMk cId="2449089741" sldId="257"/>
+            <ac:spMk id="40" creationId="{E78742E9-20BF-BA48-F05A-BF0BB6770B31}"/>
+          </ac:spMkLst>
+        </pc:spChg>
+        <pc:spChg chg="del">
+          <ac:chgData name="Martin Ruchti" userId="905d7abe9b363a44" providerId="LiveId" clId="{45D224F6-8253-4FC3-8DB7-F8304B39BDBA}" dt="2026-03-31T13:33:25.337" v="97" actId="478"/>
+          <ac:spMkLst>
+            <pc:docMk/>
+            <pc:sldMk cId="2449089741" sldId="257"/>
+            <ac:spMk id="42" creationId="{EFEEA0F9-CDD0-5E07-1C7F-AE34EDCB0323}"/>
+          </ac:spMkLst>
+        </pc:spChg>
+        <pc:picChg chg="del">
+          <ac:chgData name="Martin Ruchti" userId="905d7abe9b363a44" providerId="LiveId" clId="{45D224F6-8253-4FC3-8DB7-F8304B39BDBA}" dt="2026-03-31T13:32:22.717" v="71" actId="478"/>
+          <ac:picMkLst>
+            <pc:docMk/>
+            <pc:sldMk cId="2449089741" sldId="257"/>
+            <ac:picMk id="44" creationId="{E2B7B65D-D442-B535-80A7-C731F15B9C8D}"/>
+          </ac:picMkLst>
+        </pc:picChg>
+        <pc:cxnChg chg="add mod">
+          <ac:chgData name="Martin Ruchti" userId="905d7abe9b363a44" providerId="LiveId" clId="{45D224F6-8253-4FC3-8DB7-F8304B39BDBA}" dt="2026-03-31T13:31:11.517" v="5" actId="14100"/>
+          <ac:cxnSpMkLst>
+            <pc:docMk/>
+            <pc:sldMk cId="2449089741" sldId="257"/>
+            <ac:cxnSpMk id="11" creationId="{76310114-1796-1878-5AC5-37A1BC37F975}"/>
+          </ac:cxnSpMkLst>
+        </pc:cxnChg>
+        <pc:cxnChg chg="del mod">
+          <ac:chgData name="Martin Ruchti" userId="905d7abe9b363a44" providerId="LiveId" clId="{45D224F6-8253-4FC3-8DB7-F8304B39BDBA}" dt="2026-03-31T13:30:59.617" v="0" actId="478"/>
+          <ac:cxnSpMkLst>
+            <pc:docMk/>
+            <pc:sldMk cId="2449089741" sldId="257"/>
+            <ac:cxnSpMk id="12" creationId="{712D4005-7D82-5527-7484-D5DBBD87737E}"/>
+          </ac:cxnSpMkLst>
+        </pc:cxnChg>
+        <pc:cxnChg chg="del mod">
+          <ac:chgData name="Martin Ruchti" userId="905d7abe9b363a44" providerId="LiveId" clId="{45D224F6-8253-4FC3-8DB7-F8304B39BDBA}" dt="2026-03-31T13:32:39.961" v="84" actId="478"/>
+          <ac:cxnSpMkLst>
+            <pc:docMk/>
+            <pc:sldMk cId="2449089741" sldId="257"/>
+            <ac:cxnSpMk id="14" creationId="{5A8F9696-CF93-060C-E9DE-B9637F9C26B8}"/>
+          </ac:cxnSpMkLst>
+        </pc:cxnChg>
+        <pc:cxnChg chg="del mod">
+          <ac:chgData name="Martin Ruchti" userId="905d7abe9b363a44" providerId="LiveId" clId="{45D224F6-8253-4FC3-8DB7-F8304B39BDBA}" dt="2026-03-31T13:32:39.194" v="83" actId="478"/>
+          <ac:cxnSpMkLst>
+            <pc:docMk/>
+            <pc:sldMk cId="2449089741" sldId="257"/>
+            <ac:cxnSpMk id="17" creationId="{DEDDD2C8-5FAA-B807-9B60-A1BD0C46B237}"/>
+          </ac:cxnSpMkLst>
+        </pc:cxnChg>
+        <pc:cxnChg chg="add mod">
+          <ac:chgData name="Martin Ruchti" userId="905d7abe9b363a44" providerId="LiveId" clId="{45D224F6-8253-4FC3-8DB7-F8304B39BDBA}" dt="2026-03-31T13:32:52.779" v="90" actId="14100"/>
+          <ac:cxnSpMkLst>
+            <pc:docMk/>
+            <pc:sldMk cId="2449089741" sldId="257"/>
+            <ac:cxnSpMk id="19" creationId="{D5C3545C-CC97-9FE6-2B48-CCE34D4372ED}"/>
+          </ac:cxnSpMkLst>
+        </pc:cxnChg>
+        <pc:cxnChg chg="add mod">
+          <ac:chgData name="Martin Ruchti" userId="905d7abe9b363a44" providerId="LiveId" clId="{45D224F6-8253-4FC3-8DB7-F8304B39BDBA}" dt="2026-03-31T13:32:47.481" v="88" actId="14100"/>
+          <ac:cxnSpMkLst>
+            <pc:docMk/>
+            <pc:sldMk cId="2449089741" sldId="257"/>
+            <ac:cxnSpMk id="20" creationId="{AC24FD6A-04D8-480D-D9E4-03169AC08F4F}"/>
+          </ac:cxnSpMkLst>
+        </pc:cxnChg>
+        <pc:cxnChg chg="mod">
+          <ac:chgData name="Martin Ruchti" userId="905d7abe9b363a44" providerId="LiveId" clId="{45D224F6-8253-4FC3-8DB7-F8304B39BDBA}" dt="2026-03-31T13:31:05.390" v="2" actId="14100"/>
+          <ac:cxnSpMkLst>
+            <pc:docMk/>
+            <pc:sldMk cId="2449089741" sldId="257"/>
+            <ac:cxnSpMk id="24" creationId="{73FE515F-B3BB-3383-9CED-13F2EB4CB7B1}"/>
+          </ac:cxnSpMkLst>
+        </pc:cxnChg>
+        <pc:cxnChg chg="del mod">
+          <ac:chgData name="Martin Ruchti" userId="905d7abe9b363a44" providerId="LiveId" clId="{45D224F6-8253-4FC3-8DB7-F8304B39BDBA}" dt="2026-03-31T13:32:26.328" v="73" actId="478"/>
+          <ac:cxnSpMkLst>
+            <pc:docMk/>
+            <pc:sldMk cId="2449089741" sldId="257"/>
+            <ac:cxnSpMk id="37" creationId="{FB1213EE-F4C6-B406-497B-FDE0EDD6E58F}"/>
+          </ac:cxnSpMkLst>
+        </pc:cxnChg>
+      </pc:sldChg>
+      <pc:sldChg chg="del">
+        <pc:chgData name="Martin Ruchti" userId="905d7abe9b363a44" providerId="LiveId" clId="{45D224F6-8253-4FC3-8DB7-F8304B39BDBA}" dt="2026-03-31T13:37:36.483" v="352" actId="47"/>
+        <pc:sldMkLst>
+          <pc:docMk/>
+          <pc:sldMk cId="651556126" sldId="258"/>
+        </pc:sldMkLst>
+      </pc:sldChg>
+      <pc:sldChg chg="addSp delSp modSp mod">
+        <pc:chgData name="Martin Ruchti" userId="905d7abe9b363a44" providerId="LiveId" clId="{45D224F6-8253-4FC3-8DB7-F8304B39BDBA}" dt="2026-03-31T13:37:29.376" v="351" actId="478"/>
+        <pc:sldMkLst>
+          <pc:docMk/>
+          <pc:sldMk cId="4213089915" sldId="259"/>
+        </pc:sldMkLst>
+        <pc:spChg chg="del">
+          <ac:chgData name="Martin Ruchti" userId="905d7abe9b363a44" providerId="LiveId" clId="{45D224F6-8253-4FC3-8DB7-F8304B39BDBA}" dt="2026-03-31T13:33:37.145" v="100" actId="478"/>
+          <ac:spMkLst>
+            <pc:docMk/>
+            <pc:sldMk cId="4213089915" sldId="259"/>
+            <ac:spMk id="3" creationId="{4EE99CF0-6E10-06D7-5B16-1C8318F0E202}"/>
+          </ac:spMkLst>
+        </pc:spChg>
+        <pc:spChg chg="add mod">
+          <ac:chgData name="Martin Ruchti" userId="905d7abe9b363a44" providerId="LiveId" clId="{45D224F6-8253-4FC3-8DB7-F8304B39BDBA}" dt="2026-03-31T13:34:00.192" v="118" actId="20577"/>
+          <ac:spMkLst>
+            <pc:docMk/>
+            <pc:sldMk cId="4213089915" sldId="259"/>
+            <ac:spMk id="11" creationId="{544CE029-680D-0CE7-6B37-94249F79F571}"/>
+          </ac:spMkLst>
+        </pc:spChg>
+        <pc:spChg chg="del">
+          <ac:chgData name="Martin Ruchti" userId="905d7abe9b363a44" providerId="LiveId" clId="{45D224F6-8253-4FC3-8DB7-F8304B39BDBA}" dt="2026-03-31T13:33:35.945" v="99" actId="478"/>
+          <ac:spMkLst>
+            <pc:docMk/>
+            <pc:sldMk cId="4213089915" sldId="259"/>
+            <ac:spMk id="13" creationId="{5F2EAFA6-8363-1BC2-2607-8791588EB1B8}"/>
+          </ac:spMkLst>
+        </pc:spChg>
+        <pc:spChg chg="del">
+          <ac:chgData name="Martin Ruchti" userId="905d7abe9b363a44" providerId="LiveId" clId="{45D224F6-8253-4FC3-8DB7-F8304B39BDBA}" dt="2026-03-31T13:34:33.713" v="127" actId="478"/>
+          <ac:spMkLst>
+            <pc:docMk/>
+            <pc:sldMk cId="4213089915" sldId="259"/>
+            <ac:spMk id="16" creationId="{7018E9F0-A788-C0E0-9CB3-ECC4DF57381C}"/>
+          </ac:spMkLst>
+        </pc:spChg>
+        <pc:spChg chg="del">
+          <ac:chgData name="Martin Ruchti" userId="905d7abe9b363a44" providerId="LiveId" clId="{45D224F6-8253-4FC3-8DB7-F8304B39BDBA}" dt="2026-03-31T13:34:37.649" v="130" actId="478"/>
+          <ac:spMkLst>
+            <pc:docMk/>
+            <pc:sldMk cId="4213089915" sldId="259"/>
+            <ac:spMk id="18" creationId="{8C9BB353-0299-857B-A670-E3A873296693}"/>
+          </ac:spMkLst>
+        </pc:spChg>
+        <pc:spChg chg="del">
+          <ac:chgData name="Martin Ruchti" userId="905d7abe9b363a44" providerId="LiveId" clId="{45D224F6-8253-4FC3-8DB7-F8304B39BDBA}" dt="2026-03-31T13:34:04.402" v="119" actId="478"/>
+          <ac:spMkLst>
+            <pc:docMk/>
+            <pc:sldMk cId="4213089915" sldId="259"/>
+            <ac:spMk id="19" creationId="{297E2B5D-6DEE-2632-E0FC-849FDBC9FD8D}"/>
+          </ac:spMkLst>
+        </pc:spChg>
+        <pc:spChg chg="del">
+          <ac:chgData name="Martin Ruchti" userId="905d7abe9b363a44" providerId="LiveId" clId="{45D224F6-8253-4FC3-8DB7-F8304B39BDBA}" dt="2026-03-31T13:34:04.402" v="119" actId="478"/>
+          <ac:spMkLst>
+            <pc:docMk/>
+            <pc:sldMk cId="4213089915" sldId="259"/>
+            <ac:spMk id="20" creationId="{1E3E335F-AD13-E991-8C29-024DDE86F95B}"/>
+          </ac:spMkLst>
+        </pc:spChg>
+        <pc:spChg chg="mod">
+          <ac:chgData name="Martin Ruchti" userId="905d7abe9b363a44" providerId="LiveId" clId="{45D224F6-8253-4FC3-8DB7-F8304B39BDBA}" dt="2026-03-31T13:33:53.319" v="111" actId="20577"/>
+          <ac:spMkLst>
+            <pc:docMk/>
+            <pc:sldMk cId="4213089915" sldId="259"/>
+            <ac:spMk id="21" creationId="{79C9461F-D00D-999F-98D0-69CDB729BE61}"/>
+          </ac:spMkLst>
+        </pc:spChg>
+        <pc:spChg chg="del">
+          <ac:chgData name="Martin Ruchti" userId="905d7abe9b363a44" providerId="LiveId" clId="{45D224F6-8253-4FC3-8DB7-F8304B39BDBA}" dt="2026-03-31T13:34:04.402" v="119" actId="478"/>
+          <ac:spMkLst>
+            <pc:docMk/>
+            <pc:sldMk cId="4213089915" sldId="259"/>
+            <ac:spMk id="23" creationId="{7795FC20-4100-2EC0-8AF2-AEED84EE1048}"/>
+          </ac:spMkLst>
+        </pc:spChg>
+        <pc:spChg chg="del">
+          <ac:chgData name="Martin Ruchti" userId="905d7abe9b363a44" providerId="LiveId" clId="{45D224F6-8253-4FC3-8DB7-F8304B39BDBA}" dt="2026-03-31T13:34:04.402" v="119" actId="478"/>
+          <ac:spMkLst>
+            <pc:docMk/>
+            <pc:sldMk cId="4213089915" sldId="259"/>
+            <ac:spMk id="25" creationId="{C230194C-D3C4-A2F4-5D1A-6811EAA8E833}"/>
+          </ac:spMkLst>
+        </pc:spChg>
+        <pc:spChg chg="del">
+          <ac:chgData name="Martin Ruchti" userId="905d7abe9b363a44" providerId="LiveId" clId="{45D224F6-8253-4FC3-8DB7-F8304B39BDBA}" dt="2026-03-31T13:34:04.402" v="119" actId="478"/>
+          <ac:spMkLst>
+            <pc:docMk/>
+            <pc:sldMk cId="4213089915" sldId="259"/>
+            <ac:spMk id="26" creationId="{6FF081F6-6499-69DC-2A0B-A62E865EFF97}"/>
+          </ac:spMkLst>
+        </pc:spChg>
+        <pc:spChg chg="del">
+          <ac:chgData name="Martin Ruchti" userId="905d7abe9b363a44" providerId="LiveId" clId="{45D224F6-8253-4FC3-8DB7-F8304B39BDBA}" dt="2026-03-31T13:33:34.178" v="98" actId="478"/>
+          <ac:spMkLst>
+            <pc:docMk/>
+            <pc:sldMk cId="4213089915" sldId="259"/>
+            <ac:spMk id="32" creationId="{FB9ADFBF-FF84-8757-DDF1-C90C73FAD480}"/>
+          </ac:spMkLst>
+        </pc:spChg>
+        <pc:spChg chg="del">
+          <ac:chgData name="Martin Ruchti" userId="905d7abe9b363a44" providerId="LiveId" clId="{45D224F6-8253-4FC3-8DB7-F8304B39BDBA}" dt="2026-03-31T13:33:38.193" v="101" actId="478"/>
+          <ac:spMkLst>
+            <pc:docMk/>
+            <pc:sldMk cId="4213089915" sldId="259"/>
+            <ac:spMk id="33" creationId="{BCF7CB91-96EC-768C-C609-EC1B06AD002B}"/>
+          </ac:spMkLst>
+        </pc:spChg>
+        <pc:spChg chg="del">
+          <ac:chgData name="Martin Ruchti" userId="905d7abe9b363a44" providerId="LiveId" clId="{45D224F6-8253-4FC3-8DB7-F8304B39BDBA}" dt="2026-03-31T13:34:04.402" v="119" actId="478"/>
+          <ac:spMkLst>
+            <pc:docMk/>
+            <pc:sldMk cId="4213089915" sldId="259"/>
+            <ac:spMk id="34" creationId="{81CF9102-5848-6671-F7BF-5905E4C268DC}"/>
+          </ac:spMkLst>
+        </pc:spChg>
+        <pc:spChg chg="del">
+          <ac:chgData name="Martin Ruchti" userId="905d7abe9b363a44" providerId="LiveId" clId="{45D224F6-8253-4FC3-8DB7-F8304B39BDBA}" dt="2026-03-31T13:34:04.402" v="119" actId="478"/>
+          <ac:spMkLst>
+            <pc:docMk/>
+            <pc:sldMk cId="4213089915" sldId="259"/>
+            <ac:spMk id="35" creationId="{57558249-092D-38F5-F3A5-BB6F26B62E27}"/>
+          </ac:spMkLst>
+        </pc:spChg>
+        <pc:spChg chg="del">
+          <ac:chgData name="Martin Ruchti" userId="905d7abe9b363a44" providerId="LiveId" clId="{45D224F6-8253-4FC3-8DB7-F8304B39BDBA}" dt="2026-03-31T13:34:04.402" v="119" actId="478"/>
+          <ac:spMkLst>
+            <pc:docMk/>
+            <pc:sldMk cId="4213089915" sldId="259"/>
+            <ac:spMk id="36" creationId="{7BC134E9-F005-A896-8F2C-C753D7531B45}"/>
+          </ac:spMkLst>
+        </pc:spChg>
+        <pc:spChg chg="del">
+          <ac:chgData name="Martin Ruchti" userId="905d7abe9b363a44" providerId="LiveId" clId="{45D224F6-8253-4FC3-8DB7-F8304B39BDBA}" dt="2026-03-31T13:34:04.402" v="119" actId="478"/>
+          <ac:spMkLst>
+            <pc:docMk/>
+            <pc:sldMk cId="4213089915" sldId="259"/>
+            <ac:spMk id="38" creationId="{3E2ECD59-6663-909A-3260-27376871ECAA}"/>
+          </ac:spMkLst>
+        </pc:spChg>
+        <pc:spChg chg="add mod">
+          <ac:chgData name="Martin Ruchti" userId="905d7abe9b363a44" providerId="LiveId" clId="{45D224F6-8253-4FC3-8DB7-F8304B39BDBA}" dt="2026-03-31T13:34:23.678" v="122" actId="1076"/>
+          <ac:spMkLst>
+            <pc:docMk/>
+            <pc:sldMk cId="4213089915" sldId="259"/>
+            <ac:spMk id="39" creationId="{5EAEA946-E271-58AD-1825-8912BD80901F}"/>
+          </ac:spMkLst>
+        </pc:spChg>
+        <pc:spChg chg="del">
+          <ac:chgData name="Martin Ruchti" userId="905d7abe9b363a44" providerId="LiveId" clId="{45D224F6-8253-4FC3-8DB7-F8304B39BDBA}" dt="2026-03-31T13:34:04.402" v="119" actId="478"/>
+          <ac:spMkLst>
+            <pc:docMk/>
+            <pc:sldMk cId="4213089915" sldId="259"/>
+            <ac:spMk id="40" creationId="{47844B84-8851-0C83-BB1A-D3B1CB919D4D}"/>
+          </ac:spMkLst>
+        </pc:spChg>
+        <pc:spChg chg="add mod">
+          <ac:chgData name="Martin Ruchti" userId="905d7abe9b363a44" providerId="LiveId" clId="{45D224F6-8253-4FC3-8DB7-F8304B39BDBA}" dt="2026-03-31T13:34:23.678" v="122" actId="1076"/>
+          <ac:spMkLst>
+            <pc:docMk/>
+            <pc:sldMk cId="4213089915" sldId="259"/>
+            <ac:spMk id="41" creationId="{326BC23D-E107-A1AA-9F78-83097D6B81F5}"/>
+          </ac:spMkLst>
+        </pc:spChg>
+        <pc:spChg chg="del">
+          <ac:chgData name="Martin Ruchti" userId="905d7abe9b363a44" providerId="LiveId" clId="{45D224F6-8253-4FC3-8DB7-F8304B39BDBA}" dt="2026-03-31T13:34:32.929" v="126" actId="478"/>
+          <ac:spMkLst>
+            <pc:docMk/>
+            <pc:sldMk cId="4213089915" sldId="259"/>
+            <ac:spMk id="42" creationId="{3F75E0FF-8931-B5F6-2351-3B8AE548FABB}"/>
+          </ac:spMkLst>
+        </pc:spChg>
+        <pc:spChg chg="add mod">
+          <ac:chgData name="Martin Ruchti" userId="905d7abe9b363a44" providerId="LiveId" clId="{45D224F6-8253-4FC3-8DB7-F8304B39BDBA}" dt="2026-03-31T13:34:44.961" v="132" actId="1076"/>
+          <ac:spMkLst>
+            <pc:docMk/>
+            <pc:sldMk cId="4213089915" sldId="259"/>
+            <ac:spMk id="43" creationId="{77997CF8-1FDF-B781-FCB8-42A7E2A9503D}"/>
+          </ac:spMkLst>
+        </pc:spChg>
+        <pc:spChg chg="add mod">
+          <ac:chgData name="Martin Ruchti" userId="905d7abe9b363a44" providerId="LiveId" clId="{45D224F6-8253-4FC3-8DB7-F8304B39BDBA}" dt="2026-03-31T13:34:44.961" v="132" actId="1076"/>
+          <ac:spMkLst>
+            <pc:docMk/>
+            <pc:sldMk cId="4213089915" sldId="259"/>
+            <ac:spMk id="47" creationId="{F7281860-A7A2-1BAB-4850-4D333DAB24B3}"/>
+          </ac:spMkLst>
+        </pc:spChg>
+        <pc:spChg chg="add mod">
+          <ac:chgData name="Martin Ruchti" userId="905d7abe9b363a44" providerId="LiveId" clId="{45D224F6-8253-4FC3-8DB7-F8304B39BDBA}" dt="2026-03-31T13:34:47.472" v="133" actId="571"/>
+          <ac:spMkLst>
+            <pc:docMk/>
+            <pc:sldMk cId="4213089915" sldId="259"/>
+            <ac:spMk id="48" creationId="{1F29EB1E-AC53-7334-DF37-DD5AD623CF24}"/>
+          </ac:spMkLst>
+        </pc:spChg>
+        <pc:spChg chg="add mod">
+          <ac:chgData name="Martin Ruchti" userId="905d7abe9b363a44" providerId="LiveId" clId="{45D224F6-8253-4FC3-8DB7-F8304B39BDBA}" dt="2026-03-31T13:34:47.472" v="133" actId="571"/>
+          <ac:spMkLst>
+            <pc:docMk/>
+            <pc:sldMk cId="4213089915" sldId="259"/>
+            <ac:spMk id="49" creationId="{EE4755BA-50E5-8334-D1A3-EF52473F0C28}"/>
+          </ac:spMkLst>
+        </pc:spChg>
+        <pc:spChg chg="add mod">
+          <ac:chgData name="Martin Ruchti" userId="905d7abe9b363a44" providerId="LiveId" clId="{45D224F6-8253-4FC3-8DB7-F8304B39BDBA}" dt="2026-03-31T13:35:26.730" v="183" actId="207"/>
+          <ac:spMkLst>
+            <pc:docMk/>
+            <pc:sldMk cId="4213089915" sldId="259"/>
+            <ac:spMk id="50" creationId="{6AFA5385-794A-6719-2181-0F8688DB294E}"/>
+          </ac:spMkLst>
+        </pc:spChg>
+        <pc:spChg chg="add mod">
+          <ac:chgData name="Martin Ruchti" userId="905d7abe9b363a44" providerId="LiveId" clId="{45D224F6-8253-4FC3-8DB7-F8304B39BDBA}" dt="2026-03-31T13:35:38.961" v="216" actId="20577"/>
+          <ac:spMkLst>
+            <pc:docMk/>
+            <pc:sldMk cId="4213089915" sldId="259"/>
+            <ac:spMk id="51" creationId="{56E19A8F-26CA-0EAA-3E8B-C15C5FB124AE}"/>
+          </ac:spMkLst>
+        </pc:spChg>
+        <pc:spChg chg="add mod">
+          <ac:chgData name="Martin Ruchti" userId="905d7abe9b363a44" providerId="LiveId" clId="{45D224F6-8253-4FC3-8DB7-F8304B39BDBA}" dt="2026-03-31T13:36:17.530" v="291" actId="20577"/>
+          <ac:spMkLst>
+            <pc:docMk/>
+            <pc:sldMk cId="4213089915" sldId="259"/>
+            <ac:spMk id="52" creationId="{AA8BB5B1-D69E-0B28-97E5-406D6B932FA6}"/>
+          </ac:spMkLst>
+        </pc:spChg>
+        <pc:picChg chg="del">
+          <ac:chgData name="Martin Ruchti" userId="905d7abe9b363a44" providerId="LiveId" clId="{45D224F6-8253-4FC3-8DB7-F8304B39BDBA}" dt="2026-03-31T13:34:32.020" v="125" actId="478"/>
+          <ac:picMkLst>
+            <pc:docMk/>
+            <pc:sldMk cId="4213089915" sldId="259"/>
+            <ac:picMk id="45" creationId="{1C51EB5F-031D-532B-6FF0-63D8DFF74A25}"/>
+          </ac:picMkLst>
+        </pc:picChg>
+        <pc:picChg chg="add del">
+          <ac:chgData name="Martin Ruchti" userId="905d7abe9b363a44" providerId="LiveId" clId="{45D224F6-8253-4FC3-8DB7-F8304B39BDBA}" dt="2026-03-31T13:34:40.587" v="131" actId="478"/>
+          <ac:picMkLst>
+            <pc:docMk/>
+            <pc:sldMk cId="4213089915" sldId="259"/>
+            <ac:picMk id="46" creationId="{24D22725-B990-2A7B-5F48-6E15858F064A}"/>
+          </ac:picMkLst>
+        </pc:picChg>
+        <pc:cxnChg chg="del mod">
+          <ac:chgData name="Martin Ruchti" userId="905d7abe9b363a44" providerId="LiveId" clId="{45D224F6-8253-4FC3-8DB7-F8304B39BDBA}" dt="2026-03-31T13:37:29.376" v="351" actId="478"/>
+          <ac:cxnSpMkLst>
+            <pc:docMk/>
+            <pc:sldMk cId="4213089915" sldId="259"/>
+            <ac:cxnSpMk id="14" creationId="{D72AF6D9-6044-56C2-F9B2-EC7E3A664BA6}"/>
+          </ac:cxnSpMkLst>
+        </pc:cxnChg>
+        <pc:cxnChg chg="del mod">
+          <ac:chgData name="Martin Ruchti" userId="905d7abe9b363a44" providerId="LiveId" clId="{45D224F6-8253-4FC3-8DB7-F8304B39BDBA}" dt="2026-03-31T13:37:28.482" v="350" actId="478"/>
+          <ac:cxnSpMkLst>
+            <pc:docMk/>
+            <pc:sldMk cId="4213089915" sldId="259"/>
+            <ac:cxnSpMk id="17" creationId="{8D8AEC4B-FCCC-E6E2-7159-A48861235235}"/>
+          </ac:cxnSpMkLst>
+        </pc:cxnChg>
+        <pc:cxnChg chg="del mod">
+          <ac:chgData name="Martin Ruchti" userId="905d7abe9b363a44" providerId="LiveId" clId="{45D224F6-8253-4FC3-8DB7-F8304B39BDBA}" dt="2026-03-31T13:34:05.506" v="120" actId="478"/>
+          <ac:cxnSpMkLst>
+            <pc:docMk/>
+            <pc:sldMk cId="4213089915" sldId="259"/>
+            <ac:cxnSpMk id="37" creationId="{101CFBEE-75FB-5E34-9CEB-22BC6763F311}"/>
+          </ac:cxnSpMkLst>
+        </pc:cxnChg>
+        <pc:cxnChg chg="add mod">
+          <ac:chgData name="Martin Ruchti" userId="905d7abe9b363a44" providerId="LiveId" clId="{45D224F6-8253-4FC3-8DB7-F8304B39BDBA}" dt="2026-03-31T13:37:24.308" v="349"/>
+          <ac:cxnSpMkLst>
+            <pc:docMk/>
+            <pc:sldMk cId="4213089915" sldId="259"/>
+            <ac:cxnSpMk id="53" creationId="{66FD883A-4D2C-960B-7E19-2F54F3E8656A}"/>
+          </ac:cxnSpMkLst>
+        </pc:cxnChg>
+        <pc:cxnChg chg="add mod">
+          <ac:chgData name="Martin Ruchti" userId="905d7abe9b363a44" providerId="LiveId" clId="{45D224F6-8253-4FC3-8DB7-F8304B39BDBA}" dt="2026-03-31T13:37:24.308" v="349"/>
+          <ac:cxnSpMkLst>
+            <pc:docMk/>
+            <pc:sldMk cId="4213089915" sldId="259"/>
+            <ac:cxnSpMk id="54" creationId="{9A0CF01A-226F-AD0C-502C-43CB4156A1C3}"/>
+          </ac:cxnSpMkLst>
+        </pc:cxnChg>
+      </pc:sldChg>
+      <pc:sldChg chg="addSp delSp modSp mod">
+        <pc:chgData name="Martin Ruchti" userId="905d7abe9b363a44" providerId="LiveId" clId="{45D224F6-8253-4FC3-8DB7-F8304B39BDBA}" dt="2026-03-31T13:38:00.019" v="377" actId="1076"/>
+        <pc:sldMkLst>
+          <pc:docMk/>
+          <pc:sldMk cId="2270234790" sldId="260"/>
+        </pc:sldMkLst>
+        <pc:spChg chg="mod">
+          <ac:chgData name="Martin Ruchti" userId="905d7abe9b363a44" providerId="LiveId" clId="{45D224F6-8253-4FC3-8DB7-F8304B39BDBA}" dt="2026-03-31T13:38:00.019" v="377" actId="1076"/>
+          <ac:spMkLst>
+            <pc:docMk/>
+            <pc:sldMk cId="2270234790" sldId="260"/>
+            <ac:spMk id="3" creationId="{68E941C5-37F1-4CB8-F4B6-BDFAFA808C76}"/>
+          </ac:spMkLst>
+        </pc:spChg>
+        <pc:spChg chg="mod">
+          <ac:chgData name="Martin Ruchti" userId="905d7abe9b363a44" providerId="LiveId" clId="{45D224F6-8253-4FC3-8DB7-F8304B39BDBA}" dt="2026-03-31T13:36:29.209" v="300" actId="6549"/>
+          <ac:spMkLst>
+            <pc:docMk/>
+            <pc:sldMk cId="2270234790" sldId="260"/>
+            <ac:spMk id="7" creationId="{1C2A7380-106C-FEE2-534B-711B92371469}"/>
+          </ac:spMkLst>
+        </pc:spChg>
+        <pc:spChg chg="mod">
+          <ac:chgData name="Martin Ruchti" userId="905d7abe9b363a44" providerId="LiveId" clId="{45D224F6-8253-4FC3-8DB7-F8304B39BDBA}" dt="2026-03-31T13:37:15.459" v="346" actId="1076"/>
+          <ac:spMkLst>
+            <pc:docMk/>
+            <pc:sldMk cId="2270234790" sldId="260"/>
+            <ac:spMk id="13" creationId="{FCB55696-F46E-D1C9-64C3-B8E0CD0A85DC}"/>
+          </ac:spMkLst>
+        </pc:spChg>
+        <pc:spChg chg="del">
+          <ac:chgData name="Martin Ruchti" userId="905d7abe9b363a44" providerId="LiveId" clId="{45D224F6-8253-4FC3-8DB7-F8304B39BDBA}" dt="2026-03-31T13:36:37.290" v="304" actId="478"/>
+          <ac:spMkLst>
+            <pc:docMk/>
+            <pc:sldMk cId="2270234790" sldId="260"/>
+            <ac:spMk id="32" creationId="{A74E195F-4649-D800-0830-6C1F97625C5A}"/>
+          </ac:spMkLst>
+        </pc:spChg>
+        <pc:spChg chg="del">
+          <ac:chgData name="Martin Ruchti" userId="905d7abe9b363a44" providerId="LiveId" clId="{45D224F6-8253-4FC3-8DB7-F8304B39BDBA}" dt="2026-03-31T13:37:17.553" v="347" actId="478"/>
+          <ac:spMkLst>
+            <pc:docMk/>
+            <pc:sldMk cId="2270234790" sldId="260"/>
+            <ac:spMk id="33" creationId="{8B579EB5-1178-E524-B50D-219B61A438FF}"/>
+          </ac:spMkLst>
+        </pc:spChg>
+        <pc:spChg chg="del">
+          <ac:chgData name="Martin Ruchti" userId="905d7abe9b363a44" providerId="LiveId" clId="{45D224F6-8253-4FC3-8DB7-F8304B39BDBA}" dt="2026-03-31T13:36:32.003" v="301" actId="478"/>
+          <ac:spMkLst>
+            <pc:docMk/>
+            <pc:sldMk cId="2270234790" sldId="260"/>
+            <ac:spMk id="35" creationId="{28B42AFE-8F8D-4320-73A7-A6C481BBF3DF}"/>
+          </ac:spMkLst>
+        </pc:spChg>
+        <pc:spChg chg="del">
+          <ac:chgData name="Martin Ruchti" userId="905d7abe9b363a44" providerId="LiveId" clId="{45D224F6-8253-4FC3-8DB7-F8304B39BDBA}" dt="2026-03-31T13:36:33.321" v="302" actId="478"/>
+          <ac:spMkLst>
+            <pc:docMk/>
+            <pc:sldMk cId="2270234790" sldId="260"/>
+            <ac:spMk id="40" creationId="{987E39FD-8329-3880-83BF-BBBDCF14C6DC}"/>
+          </ac:spMkLst>
+        </pc:spChg>
+        <pc:spChg chg="del">
+          <ac:chgData name="Martin Ruchti" userId="905d7abe9b363a44" providerId="LiveId" clId="{45D224F6-8253-4FC3-8DB7-F8304B39BDBA}" dt="2026-03-31T13:37:19.873" v="348" actId="478"/>
+          <ac:spMkLst>
+            <pc:docMk/>
+            <pc:sldMk cId="2270234790" sldId="260"/>
+            <ac:spMk id="42" creationId="{260F3848-01B8-FF76-443E-08175FD0DAED}"/>
+          </ac:spMkLst>
+        </pc:spChg>
+        <pc:picChg chg="del">
+          <ac:chgData name="Martin Ruchti" userId="905d7abe9b363a44" providerId="LiveId" clId="{45D224F6-8253-4FC3-8DB7-F8304B39BDBA}" dt="2026-03-31T13:36:32.003" v="301" actId="478"/>
+          <ac:picMkLst>
+            <pc:docMk/>
+            <pc:sldMk cId="2270234790" sldId="260"/>
+            <ac:picMk id="44" creationId="{E6F6B2CF-2426-4252-149C-D597D23C3789}"/>
+          </ac:picMkLst>
+        </pc:picChg>
+        <pc:cxnChg chg="del mod">
+          <ac:chgData name="Martin Ruchti" userId="905d7abe9b363a44" providerId="LiveId" clId="{45D224F6-8253-4FC3-8DB7-F8304B39BDBA}" dt="2026-03-31T13:36:40.890" v="305" actId="478"/>
+          <ac:cxnSpMkLst>
+            <pc:docMk/>
+            <pc:sldMk cId="2270234790" sldId="260"/>
+            <ac:cxnSpMk id="12" creationId="{984681F8-360F-BA11-3E0B-EC8269A57332}"/>
+          </ac:cxnSpMkLst>
+        </pc:cxnChg>
+        <pc:cxnChg chg="del mod">
+          <ac:chgData name="Martin Ruchti" userId="905d7abe9b363a44" providerId="LiveId" clId="{45D224F6-8253-4FC3-8DB7-F8304B39BDBA}" dt="2026-03-31T13:36:50.824" v="312" actId="478"/>
+          <ac:cxnSpMkLst>
+            <pc:docMk/>
+            <pc:sldMk cId="2270234790" sldId="260"/>
+            <ac:cxnSpMk id="14" creationId="{A5F81304-EBF1-257C-3417-620FD4F73563}"/>
+          </ac:cxnSpMkLst>
+        </pc:cxnChg>
+        <pc:cxnChg chg="add mod">
+          <ac:chgData name="Martin Ruchti" userId="905d7abe9b363a44" providerId="LiveId" clId="{45D224F6-8253-4FC3-8DB7-F8304B39BDBA}" dt="2026-03-31T13:36:46.500" v="308" actId="14100"/>
+          <ac:cxnSpMkLst>
+            <pc:docMk/>
+            <pc:sldMk cId="2270234790" sldId="260"/>
+            <ac:cxnSpMk id="16" creationId="{B0A9924C-FF19-0A50-E10D-5F793158E008}"/>
+          </ac:cxnSpMkLst>
+        </pc:cxnChg>
+        <pc:cxnChg chg="del mod">
+          <ac:chgData name="Martin Ruchti" userId="905d7abe9b363a44" providerId="LiveId" clId="{45D224F6-8253-4FC3-8DB7-F8304B39BDBA}" dt="2026-03-31T13:36:50.192" v="311" actId="478"/>
+          <ac:cxnSpMkLst>
+            <pc:docMk/>
+            <pc:sldMk cId="2270234790" sldId="260"/>
+            <ac:cxnSpMk id="17" creationId="{96AF5EB8-D7E2-FBB6-F771-ABD62B405B7B}"/>
+          </ac:cxnSpMkLst>
+        </pc:cxnChg>
+        <pc:cxnChg chg="add mod">
+          <ac:chgData name="Martin Ruchti" userId="905d7abe9b363a44" providerId="LiveId" clId="{45D224F6-8253-4FC3-8DB7-F8304B39BDBA}" dt="2026-03-31T13:36:54.281" v="314" actId="14100"/>
+          <ac:cxnSpMkLst>
+            <pc:docMk/>
+            <pc:sldMk cId="2270234790" sldId="260"/>
+            <ac:cxnSpMk id="20" creationId="{E1AF0737-FA0B-D1D9-6AAE-42B23E00189A}"/>
+          </ac:cxnSpMkLst>
+        </pc:cxnChg>
+        <pc:cxnChg chg="add mod">
+          <ac:chgData name="Martin Ruchti" userId="905d7abe9b363a44" providerId="LiveId" clId="{45D224F6-8253-4FC3-8DB7-F8304B39BDBA}" dt="2026-03-31T13:36:58.747" v="317" actId="14100"/>
+          <ac:cxnSpMkLst>
+            <pc:docMk/>
+            <pc:sldMk cId="2270234790" sldId="260"/>
+            <ac:cxnSpMk id="25" creationId="{34B8B321-9C2A-B1FD-BE87-427DD149690F}"/>
+          </ac:cxnSpMkLst>
+        </pc:cxnChg>
+        <pc:cxnChg chg="del mod">
+          <ac:chgData name="Martin Ruchti" userId="905d7abe9b363a44" providerId="LiveId" clId="{45D224F6-8253-4FC3-8DB7-F8304B39BDBA}" dt="2026-03-31T13:36:33.945" v="303" actId="478"/>
+          <ac:cxnSpMkLst>
+            <pc:docMk/>
+            <pc:sldMk cId="2270234790" sldId="260"/>
+            <ac:cxnSpMk id="37" creationId="{E991BB9C-3C48-0A80-C74D-914FD3D2A523}"/>
+          </ac:cxnSpMkLst>
+        </pc:cxnChg>
+      </pc:sldChg>
+    </pc:docChg>
+  </pc:docChgLst>
+</pc:chgInfo>
+</file>
+
 <file path=ppt/slideLayouts/slideLayout1.xml><?xml version="1.0" encoding="utf-8"?>
 <p:sldLayout xmlns:a="http://schemas.openxmlformats.org/drawingml/2006/main" xmlns:r="http://schemas.openxmlformats.org/officeDocument/2006/relationships" xmlns:p="http://schemas.openxmlformats.org/presentationml/2006/main" type="title" preserve="1">
   <p:cSld name="Titelfolie">
@@ -247,7 +832,7 @@
           <a:p>
             <a:fld id="{C7D160D4-E022-4322-8E02-FB7ADEE2C6AA}" type="datetimeFigureOut">
               <a:rPr lang="en-US" smtClean="0"/>
-              <a:t>3/17/2026</a:t>
+              <a:t>3/31/2026</a:t>
             </a:fld>
             <a:endParaRPr lang="en-US"/>
           </a:p>
@@ -417,7 +1002,7 @@
           <a:p>
             <a:fld id="{C7D160D4-E022-4322-8E02-FB7ADEE2C6AA}" type="datetimeFigureOut">
               <a:rPr lang="en-US" smtClean="0"/>
-              <a:t>3/17/2026</a:t>
+              <a:t>3/31/2026</a:t>
             </a:fld>
             <a:endParaRPr lang="en-US"/>
           </a:p>
@@ -597,7 +1182,7 @@
           <a:p>
             <a:fld id="{C7D160D4-E022-4322-8E02-FB7ADEE2C6AA}" type="datetimeFigureOut">
               <a:rPr lang="en-US" smtClean="0"/>
-              <a:t>3/17/2026</a:t>
+              <a:t>3/31/2026</a:t>
             </a:fld>
             <a:endParaRPr lang="en-US"/>
           </a:p>
@@ -767,7 +1352,7 @@
           <a:p>
             <a:fld id="{C7D160D4-E022-4322-8E02-FB7ADEE2C6AA}" type="datetimeFigureOut">
               <a:rPr lang="en-US" smtClean="0"/>
-              <a:t>3/17/2026</a:t>
+              <a:t>3/31/2026</a:t>
             </a:fld>
             <a:endParaRPr lang="en-US"/>
           </a:p>
@@ -1013,7 +1598,7 @@
           <a:p>
             <a:fld id="{C7D160D4-E022-4322-8E02-FB7ADEE2C6AA}" type="datetimeFigureOut">
               <a:rPr lang="en-US" smtClean="0"/>
-              <a:t>3/17/2026</a:t>
+              <a:t>3/31/2026</a:t>
             </a:fld>
             <a:endParaRPr lang="en-US"/>
           </a:p>
@@ -1245,7 +1830,7 @@
           <a:p>
             <a:fld id="{C7D160D4-E022-4322-8E02-FB7ADEE2C6AA}" type="datetimeFigureOut">
               <a:rPr lang="en-US" smtClean="0"/>
-              <a:t>3/17/2026</a:t>
+              <a:t>3/31/2026</a:t>
             </a:fld>
             <a:endParaRPr lang="en-US"/>
           </a:p>
@@ -1612,7 +2197,7 @@
           <a:p>
             <a:fld id="{C7D160D4-E022-4322-8E02-FB7ADEE2C6AA}" type="datetimeFigureOut">
               <a:rPr lang="en-US" smtClean="0"/>
-              <a:t>3/17/2026</a:t>
+              <a:t>3/31/2026</a:t>
             </a:fld>
             <a:endParaRPr lang="en-US"/>
           </a:p>
@@ -1730,7 +2315,7 @@
           <a:p>
             <a:fld id="{C7D160D4-E022-4322-8E02-FB7ADEE2C6AA}" type="datetimeFigureOut">
               <a:rPr lang="en-US" smtClean="0"/>
-              <a:t>3/17/2026</a:t>
+              <a:t>3/31/2026</a:t>
             </a:fld>
             <a:endParaRPr lang="en-US"/>
           </a:p>
@@ -1825,7 +2410,7 @@
           <a:p>
             <a:fld id="{C7D160D4-E022-4322-8E02-FB7ADEE2C6AA}" type="datetimeFigureOut">
               <a:rPr lang="en-US" smtClean="0"/>
-              <a:t>3/17/2026</a:t>
+              <a:t>3/31/2026</a:t>
             </a:fld>
             <a:endParaRPr lang="en-US"/>
           </a:p>
@@ -2102,7 +2687,7 @@
           <a:p>
             <a:fld id="{C7D160D4-E022-4322-8E02-FB7ADEE2C6AA}" type="datetimeFigureOut">
               <a:rPr lang="en-US" smtClean="0"/>
-              <a:t>3/17/2026</a:t>
+              <a:t>3/31/2026</a:t>
             </a:fld>
             <a:endParaRPr lang="en-US"/>
           </a:p>
@@ -2359,7 +2944,7 @@
           <a:p>
             <a:fld id="{C7D160D4-E022-4322-8E02-FB7ADEE2C6AA}" type="datetimeFigureOut">
               <a:rPr lang="en-US" smtClean="0"/>
-              <a:t>3/17/2026</a:t>
+              <a:t>3/31/2026</a:t>
             </a:fld>
             <a:endParaRPr lang="en-US"/>
           </a:p>
@@ -2572,7 +3157,7 @@
           <a:p>
             <a:fld id="{C7D160D4-E022-4322-8E02-FB7ADEE2C6AA}" type="datetimeFigureOut">
               <a:rPr lang="en-US" smtClean="0"/>
-              <a:t>3/17/2026</a:t>
+              <a:t>3/31/2026</a:t>
             </a:fld>
             <a:endParaRPr lang="en-US"/>
           </a:p>
@@ -3473,7 +4058,21 @@
                 <a:latin typeface="Roboto" panose="02000000000000000000" pitchFamily="2" charset="0"/>
                 <a:ea typeface="Roboto" panose="02000000000000000000" pitchFamily="2" charset="0"/>
               </a:rPr>
-              <a:t>Web-Backend (AWS?)</a:t>
+              <a:t>Web-Backend (</a:t>
+            </a:r>
+            <a:r>
+              <a:rPr lang="de-DE" sz="1200" dirty="0" err="1">
+                <a:latin typeface="Roboto" panose="02000000000000000000" pitchFamily="2" charset="0"/>
+                <a:ea typeface="Roboto" panose="02000000000000000000" pitchFamily="2" charset="0"/>
+              </a:rPr>
+              <a:t>supabase</a:t>
+            </a:r>
+            <a:r>
+              <a:rPr lang="de-DE" sz="1200" dirty="0">
+                <a:latin typeface="Roboto" panose="02000000000000000000" pitchFamily="2" charset="0"/>
+                <a:ea typeface="Roboto" panose="02000000000000000000" pitchFamily="2" charset="0"/>
+              </a:rPr>
+              <a:t>)</a:t>
             </a:r>
             <a:endParaRPr lang="en-US" sz="1200" dirty="0">
               <a:latin typeface="Roboto" panose="02000000000000000000" pitchFamily="2" charset="0"/>
@@ -3645,92 +4244,6 @@
           </a:p>
         </p:txBody>
       </p:sp>
-      <p:cxnSp>
-        <p:nvCxnSpPr>
-          <p:cNvPr id="12" name="Gerade Verbindung mit Pfeil 11">
-            <a:extLst>
-              <a:ext uri="{FF2B5EF4-FFF2-40B4-BE49-F238E27FC236}">
-                <a16:creationId xmlns:a16="http://schemas.microsoft.com/office/drawing/2014/main" id="{712D4005-7D82-5527-7484-D5DBBD87737E}"/>
-              </a:ext>
-            </a:extLst>
-          </p:cNvPr>
-          <p:cNvCxnSpPr>
-            <a:stCxn id="6" idx="0"/>
-            <a:endCxn id="7" idx="2"/>
-          </p:cNvCxnSpPr>
-          <p:nvPr/>
-        </p:nvCxnSpPr>
-        <p:spPr>
-          <a:xfrm flipV="1">
-            <a:off x="2084295" y="2245659"/>
-            <a:ext cx="2296083" cy="746312"/>
-          </a:xfrm>
-          <a:prstGeom prst="straightConnector1">
-            <a:avLst/>
-          </a:prstGeom>
-          <a:ln>
-            <a:headEnd type="triangle"/>
-            <a:tailEnd type="triangle"/>
-          </a:ln>
-        </p:spPr>
-        <p:style>
-          <a:lnRef idx="2">
-            <a:schemeClr val="accent1"/>
-          </a:lnRef>
-          <a:fillRef idx="0">
-            <a:schemeClr val="accent1"/>
-          </a:fillRef>
-          <a:effectRef idx="1">
-            <a:schemeClr val="accent1"/>
-          </a:effectRef>
-          <a:fontRef idx="minor">
-            <a:schemeClr val="tx1"/>
-          </a:fontRef>
-        </p:style>
-      </p:cxnSp>
-      <p:cxnSp>
-        <p:nvCxnSpPr>
-          <p:cNvPr id="14" name="Gerade Verbindung mit Pfeil 13">
-            <a:extLst>
-              <a:ext uri="{FF2B5EF4-FFF2-40B4-BE49-F238E27FC236}">
-                <a16:creationId xmlns:a16="http://schemas.microsoft.com/office/drawing/2014/main" id="{5A8F9696-CF93-060C-E9DE-B9637F9C26B8}"/>
-              </a:ext>
-            </a:extLst>
-          </p:cNvPr>
-          <p:cNvCxnSpPr>
-            <a:stCxn id="7" idx="4"/>
-            <a:endCxn id="8" idx="0"/>
-          </p:cNvCxnSpPr>
-          <p:nvPr/>
-        </p:nvCxnSpPr>
-        <p:spPr>
-          <a:xfrm>
-            <a:off x="5525621" y="2245659"/>
-            <a:ext cx="2708460" cy="732865"/>
-          </a:xfrm>
-          <a:prstGeom prst="straightConnector1">
-            <a:avLst/>
-          </a:prstGeom>
-          <a:ln>
-            <a:headEnd type="triangle"/>
-            <a:tailEnd type="triangle"/>
-          </a:ln>
-        </p:spPr>
-        <p:style>
-          <a:lnRef idx="2">
-            <a:schemeClr val="accent1"/>
-          </a:lnRef>
-          <a:fillRef idx="0">
-            <a:schemeClr val="accent1"/>
-          </a:fillRef>
-          <a:effectRef idx="1">
-            <a:schemeClr val="accent1"/>
-          </a:effectRef>
-          <a:fontRef idx="minor">
-            <a:schemeClr val="tx1"/>
-          </a:fontRef>
-        </p:style>
-      </p:cxnSp>
       <p:sp>
         <p:nvSpPr>
           <p:cNvPr id="15" name="Rechteck 14">
@@ -3796,49 +4309,6 @@
           </a:p>
         </p:txBody>
       </p:sp>
-      <p:cxnSp>
-        <p:nvCxnSpPr>
-          <p:cNvPr id="17" name="Gerade Verbindung mit Pfeil 16">
-            <a:extLst>
-              <a:ext uri="{FF2B5EF4-FFF2-40B4-BE49-F238E27FC236}">
-                <a16:creationId xmlns:a16="http://schemas.microsoft.com/office/drawing/2014/main" id="{DEDDD2C8-5FAA-B807-9B60-A1BD0C46B237}"/>
-              </a:ext>
-            </a:extLst>
-          </p:cNvPr>
-          <p:cNvCxnSpPr>
-            <a:stCxn id="7" idx="4"/>
-            <a:endCxn id="15" idx="0"/>
-          </p:cNvCxnSpPr>
-          <p:nvPr/>
-        </p:nvCxnSpPr>
-        <p:spPr>
-          <a:xfrm>
-            <a:off x="5525621" y="2245659"/>
-            <a:ext cx="2033307" cy="1848971"/>
-          </a:xfrm>
-          <a:prstGeom prst="straightConnector1">
-            <a:avLst/>
-          </a:prstGeom>
-          <a:ln>
-            <a:headEnd type="triangle"/>
-            <a:tailEnd type="triangle"/>
-          </a:ln>
-        </p:spPr>
-        <p:style>
-          <a:lnRef idx="2">
-            <a:schemeClr val="accent1"/>
-          </a:lnRef>
-          <a:fillRef idx="0">
-            <a:schemeClr val="accent1"/>
-          </a:fillRef>
-          <a:effectRef idx="1">
-            <a:schemeClr val="accent1"/>
-          </a:effectRef>
-          <a:fontRef idx="minor">
-            <a:schemeClr val="tx1"/>
-          </a:fontRef>
-        </p:style>
-      </p:cxnSp>
       <p:cxnSp>
         <p:nvCxnSpPr>
           <p:cNvPr id="22" name="Gerade Verbindung mit Pfeil 21">
@@ -3892,6 +4362,7 @@
             </a:extLst>
           </p:cNvPr>
           <p:cNvCxnSpPr>
+            <a:cxnSpLocks/>
             <a:stCxn id="5" idx="0"/>
             <a:endCxn id="6" idx="2"/>
           </p:cNvCxnSpPr>
@@ -4266,971 +4737,6 @@
           </a:p>
         </p:txBody>
       </p:sp>
-      <p:sp>
-        <p:nvSpPr>
-          <p:cNvPr id="32" name="Textfeld 31">
-            <a:extLst>
-              <a:ext uri="{FF2B5EF4-FFF2-40B4-BE49-F238E27FC236}">
-                <a16:creationId xmlns:a16="http://schemas.microsoft.com/office/drawing/2014/main" id="{A58B2F4F-E403-1463-2770-5117C2CCB9AD}"/>
-              </a:ext>
-            </a:extLst>
-          </p:cNvPr>
-          <p:cNvSpPr txBox="1"/>
-          <p:nvPr/>
-        </p:nvSpPr>
-        <p:spPr>
-          <a:xfrm>
-            <a:off x="2179135" y="1666159"/>
-            <a:ext cx="1907895" cy="707886"/>
-          </a:xfrm>
-          <a:prstGeom prst="rect">
-            <a:avLst/>
-          </a:prstGeom>
-          <a:noFill/>
-        </p:spPr>
-        <p:txBody>
-          <a:bodyPr wrap="none" rtlCol="0">
-            <a:spAutoFit/>
-          </a:bodyPr>
-          <a:lstStyle/>
-          <a:p>
-            <a:r>
-              <a:rPr lang="de-DE" sz="800" dirty="0" err="1">
-                <a:solidFill>
-                  <a:schemeClr val="tx1">
-                    <a:lumMod val="50000"/>
-                    <a:lumOff val="50000"/>
-                  </a:schemeClr>
-                </a:solidFill>
-                <a:latin typeface="Roboto" panose="02000000000000000000" pitchFamily="2" charset="0"/>
-                <a:ea typeface="Roboto" panose="02000000000000000000" pitchFamily="2" charset="0"/>
-              </a:rPr>
-              <a:t>get_current_temperature</a:t>
-            </a:r>
-            <a:r>
-              <a:rPr lang="de-DE" sz="800" dirty="0">
-                <a:solidFill>
-                  <a:schemeClr val="tx1">
-                    <a:lumMod val="50000"/>
-                    <a:lumOff val="50000"/>
-                  </a:schemeClr>
-                </a:solidFill>
-                <a:latin typeface="Roboto" panose="02000000000000000000" pitchFamily="2" charset="0"/>
-                <a:ea typeface="Roboto" panose="02000000000000000000" pitchFamily="2" charset="0"/>
-              </a:rPr>
-              <a:t>()</a:t>
-            </a:r>
-          </a:p>
-          <a:p>
-            <a:r>
-              <a:rPr lang="de-DE" sz="800" dirty="0">
-                <a:solidFill>
-                  <a:schemeClr val="tx1">
-                    <a:lumMod val="50000"/>
-                    <a:lumOff val="50000"/>
-                  </a:schemeClr>
-                </a:solidFill>
-                <a:latin typeface="Roboto" panose="02000000000000000000" pitchFamily="2" charset="0"/>
-                <a:ea typeface="Roboto" panose="02000000000000000000" pitchFamily="2" charset="0"/>
-              </a:rPr>
-              <a:t>update()</a:t>
-            </a:r>
-            <a:endParaRPr lang="en-US" sz="800" dirty="0">
-              <a:solidFill>
-                <a:schemeClr val="tx1">
-                  <a:lumMod val="50000"/>
-                  <a:lumOff val="50000"/>
-                </a:schemeClr>
-              </a:solidFill>
-              <a:latin typeface="Roboto" panose="02000000000000000000" pitchFamily="2" charset="0"/>
-              <a:ea typeface="Roboto" panose="02000000000000000000" pitchFamily="2" charset="0"/>
-            </a:endParaRPr>
-          </a:p>
-          <a:p>
-            <a:r>
-              <a:rPr lang="en-US" sz="800" dirty="0" err="1">
-                <a:solidFill>
-                  <a:schemeClr val="tx1">
-                    <a:lumMod val="50000"/>
-                    <a:lumOff val="50000"/>
-                  </a:schemeClr>
-                </a:solidFill>
-                <a:latin typeface="Roboto" panose="02000000000000000000" pitchFamily="2" charset="0"/>
-                <a:ea typeface="Roboto" panose="02000000000000000000" pitchFamily="2" charset="0"/>
-              </a:rPr>
-              <a:t>get_temperature_history</a:t>
-            </a:r>
-            <a:r>
-              <a:rPr lang="en-US" sz="800" dirty="0">
-                <a:solidFill>
-                  <a:schemeClr val="tx1">
-                    <a:lumMod val="50000"/>
-                    <a:lumOff val="50000"/>
-                  </a:schemeClr>
-                </a:solidFill>
-                <a:latin typeface="Roboto" panose="02000000000000000000" pitchFamily="2" charset="0"/>
-                <a:ea typeface="Roboto" panose="02000000000000000000" pitchFamily="2" charset="0"/>
-              </a:rPr>
-              <a:t>(int seconds)</a:t>
-            </a:r>
-          </a:p>
-          <a:p>
-            <a:r>
-              <a:rPr lang="en-US" sz="800" dirty="0" err="1">
-                <a:solidFill>
-                  <a:schemeClr val="tx1">
-                    <a:lumMod val="50000"/>
-                    <a:lumOff val="50000"/>
-                  </a:schemeClr>
-                </a:solidFill>
-                <a:latin typeface="Roboto" panose="02000000000000000000" pitchFamily="2" charset="0"/>
-                <a:ea typeface="Roboto" panose="02000000000000000000" pitchFamily="2" charset="0"/>
-              </a:rPr>
-              <a:t>set_update_interval</a:t>
-            </a:r>
-            <a:r>
-              <a:rPr lang="en-US" sz="800" dirty="0">
-                <a:solidFill>
-                  <a:schemeClr val="tx1">
-                    <a:lumMod val="50000"/>
-                    <a:lumOff val="50000"/>
-                  </a:schemeClr>
-                </a:solidFill>
-                <a:latin typeface="Roboto" panose="02000000000000000000" pitchFamily="2" charset="0"/>
-                <a:ea typeface="Roboto" panose="02000000000000000000" pitchFamily="2" charset="0"/>
-              </a:rPr>
-              <a:t>(int seconds)</a:t>
-            </a:r>
-          </a:p>
-          <a:p>
-            <a:r>
-              <a:rPr lang="en-US" sz="800" dirty="0" err="1">
-                <a:solidFill>
-                  <a:schemeClr val="tx1">
-                    <a:lumMod val="50000"/>
-                    <a:lumOff val="50000"/>
-                  </a:schemeClr>
-                </a:solidFill>
-                <a:latin typeface="Roboto" panose="02000000000000000000" pitchFamily="2" charset="0"/>
-                <a:ea typeface="Roboto" panose="02000000000000000000" pitchFamily="2" charset="0"/>
-              </a:rPr>
-              <a:t>register_status</a:t>
-            </a:r>
-            <a:r>
-              <a:rPr lang="en-US" sz="800" dirty="0">
-                <a:solidFill>
-                  <a:schemeClr val="tx1">
-                    <a:lumMod val="50000"/>
-                    <a:lumOff val="50000"/>
-                  </a:schemeClr>
-                </a:solidFill>
-                <a:latin typeface="Roboto" panose="02000000000000000000" pitchFamily="2" charset="0"/>
-                <a:ea typeface="Roboto" panose="02000000000000000000" pitchFamily="2" charset="0"/>
-              </a:rPr>
-              <a:t>()</a:t>
-            </a:r>
-          </a:p>
-        </p:txBody>
-      </p:sp>
-      <p:sp>
-        <p:nvSpPr>
-          <p:cNvPr id="33" name="Textfeld 32">
-            <a:extLst>
-              <a:ext uri="{FF2B5EF4-FFF2-40B4-BE49-F238E27FC236}">
-                <a16:creationId xmlns:a16="http://schemas.microsoft.com/office/drawing/2014/main" id="{EFC09842-EC5E-BFAD-A0F0-196EAA83A176}"/>
-              </a:ext>
-            </a:extLst>
-          </p:cNvPr>
-          <p:cNvSpPr txBox="1"/>
-          <p:nvPr/>
-        </p:nvSpPr>
-        <p:spPr>
-          <a:xfrm>
-            <a:off x="6670864" y="1927175"/>
-            <a:ext cx="1907895" cy="584775"/>
-          </a:xfrm>
-          <a:prstGeom prst="rect">
-            <a:avLst/>
-          </a:prstGeom>
-          <a:noFill/>
-        </p:spPr>
-        <p:txBody>
-          <a:bodyPr wrap="none" rtlCol="0">
-            <a:spAutoFit/>
-          </a:bodyPr>
-          <a:lstStyle/>
-          <a:p>
-            <a:r>
-              <a:rPr lang="de-DE" sz="800" dirty="0" err="1">
-                <a:solidFill>
-                  <a:schemeClr val="tx1">
-                    <a:lumMod val="50000"/>
-                    <a:lumOff val="50000"/>
-                  </a:schemeClr>
-                </a:solidFill>
-                <a:latin typeface="Roboto" panose="02000000000000000000" pitchFamily="2" charset="0"/>
-                <a:ea typeface="Roboto" panose="02000000000000000000" pitchFamily="2" charset="0"/>
-              </a:rPr>
-              <a:t>get_current_temperature</a:t>
-            </a:r>
-            <a:r>
-              <a:rPr lang="de-DE" sz="800" dirty="0">
-                <a:solidFill>
-                  <a:schemeClr val="tx1">
-                    <a:lumMod val="50000"/>
-                    <a:lumOff val="50000"/>
-                  </a:schemeClr>
-                </a:solidFill>
-                <a:latin typeface="Roboto" panose="02000000000000000000" pitchFamily="2" charset="0"/>
-                <a:ea typeface="Roboto" panose="02000000000000000000" pitchFamily="2" charset="0"/>
-              </a:rPr>
-              <a:t>()</a:t>
-            </a:r>
-          </a:p>
-          <a:p>
-            <a:r>
-              <a:rPr lang="de-DE" sz="800" dirty="0">
-                <a:solidFill>
-                  <a:schemeClr val="tx1">
-                    <a:lumMod val="50000"/>
-                    <a:lumOff val="50000"/>
-                  </a:schemeClr>
-                </a:solidFill>
-                <a:latin typeface="Roboto" panose="02000000000000000000" pitchFamily="2" charset="0"/>
-                <a:ea typeface="Roboto" panose="02000000000000000000" pitchFamily="2" charset="0"/>
-              </a:rPr>
-              <a:t>update()</a:t>
-            </a:r>
-            <a:endParaRPr lang="en-US" sz="800" dirty="0">
-              <a:solidFill>
-                <a:schemeClr val="tx1">
-                  <a:lumMod val="50000"/>
-                  <a:lumOff val="50000"/>
-                </a:schemeClr>
-              </a:solidFill>
-              <a:latin typeface="Roboto" panose="02000000000000000000" pitchFamily="2" charset="0"/>
-              <a:ea typeface="Roboto" panose="02000000000000000000" pitchFamily="2" charset="0"/>
-            </a:endParaRPr>
-          </a:p>
-          <a:p>
-            <a:r>
-              <a:rPr lang="en-US" sz="800" dirty="0" err="1">
-                <a:solidFill>
-                  <a:schemeClr val="tx1">
-                    <a:lumMod val="50000"/>
-                    <a:lumOff val="50000"/>
-                  </a:schemeClr>
-                </a:solidFill>
-                <a:latin typeface="Roboto" panose="02000000000000000000" pitchFamily="2" charset="0"/>
-                <a:ea typeface="Roboto" panose="02000000000000000000" pitchFamily="2" charset="0"/>
-              </a:rPr>
-              <a:t>Get_temperature_history</a:t>
-            </a:r>
-            <a:r>
-              <a:rPr lang="en-US" sz="800" dirty="0">
-                <a:solidFill>
-                  <a:schemeClr val="tx1">
-                    <a:lumMod val="50000"/>
-                    <a:lumOff val="50000"/>
-                  </a:schemeClr>
-                </a:solidFill>
-                <a:latin typeface="Roboto" panose="02000000000000000000" pitchFamily="2" charset="0"/>
-                <a:ea typeface="Roboto" panose="02000000000000000000" pitchFamily="2" charset="0"/>
-              </a:rPr>
-              <a:t>(int seconds)</a:t>
-            </a:r>
-          </a:p>
-          <a:p>
-            <a:r>
-              <a:rPr lang="en-US" sz="800" dirty="0" err="1">
-                <a:solidFill>
-                  <a:schemeClr val="tx1">
-                    <a:lumMod val="50000"/>
-                    <a:lumOff val="50000"/>
-                  </a:schemeClr>
-                </a:solidFill>
-                <a:latin typeface="Roboto" panose="02000000000000000000" pitchFamily="2" charset="0"/>
-                <a:ea typeface="Roboto" panose="02000000000000000000" pitchFamily="2" charset="0"/>
-              </a:rPr>
-              <a:t>Set_update_interval</a:t>
-            </a:r>
-            <a:r>
-              <a:rPr lang="en-US" sz="800" dirty="0">
-                <a:solidFill>
-                  <a:schemeClr val="tx1">
-                    <a:lumMod val="50000"/>
-                    <a:lumOff val="50000"/>
-                  </a:schemeClr>
-                </a:solidFill>
-                <a:latin typeface="Roboto" panose="02000000000000000000" pitchFamily="2" charset="0"/>
-                <a:ea typeface="Roboto" panose="02000000000000000000" pitchFamily="2" charset="0"/>
-              </a:rPr>
-              <a:t>(int seconds)</a:t>
-            </a:r>
-          </a:p>
-        </p:txBody>
-      </p:sp>
-      <p:sp>
-        <p:nvSpPr>
-          <p:cNvPr id="35" name="Rechteck 34">
-            <a:extLst>
-              <a:ext uri="{FF2B5EF4-FFF2-40B4-BE49-F238E27FC236}">
-                <a16:creationId xmlns:a16="http://schemas.microsoft.com/office/drawing/2014/main" id="{1D67D9DE-7934-A293-421D-A22EDDAFA57C}"/>
-              </a:ext>
-            </a:extLst>
-          </p:cNvPr>
-          <p:cNvSpPr/>
-          <p:nvPr/>
-        </p:nvSpPr>
-        <p:spPr>
-          <a:xfrm>
-            <a:off x="4273923" y="4528934"/>
-            <a:ext cx="1358153" cy="766483"/>
-          </a:xfrm>
-          <a:prstGeom prst="rect">
-            <a:avLst/>
-          </a:prstGeom>
-          <a:solidFill>
-            <a:srgbClr val="7030A0"/>
-          </a:solidFill>
-          <a:ln>
-            <a:noFill/>
-          </a:ln>
-        </p:spPr>
-        <p:style>
-          <a:lnRef idx="2">
-            <a:schemeClr val="accent1">
-              <a:shade val="15000"/>
-            </a:schemeClr>
-          </a:lnRef>
-          <a:fillRef idx="1">
-            <a:schemeClr val="accent1"/>
-          </a:fillRef>
-          <a:effectRef idx="0">
-            <a:schemeClr val="accent1"/>
-          </a:effectRef>
-          <a:fontRef idx="minor">
-            <a:schemeClr val="lt1"/>
-          </a:fontRef>
-        </p:style>
-        <p:txBody>
-          <a:bodyPr rtlCol="0" anchor="ctr"/>
-          <a:lstStyle/>
-          <a:p>
-            <a:pPr algn="ctr"/>
-            <a:r>
-              <a:rPr lang="de-DE" sz="1200" dirty="0">
-                <a:latin typeface="Roboto" panose="02000000000000000000" pitchFamily="2" charset="0"/>
-                <a:ea typeface="Roboto" panose="02000000000000000000" pitchFamily="2" charset="0"/>
-              </a:rPr>
-              <a:t>Admin Frontend</a:t>
-            </a:r>
-            <a:endParaRPr lang="en-US" sz="1200" dirty="0">
-              <a:latin typeface="Roboto" panose="02000000000000000000" pitchFamily="2" charset="0"/>
-              <a:ea typeface="Roboto" panose="02000000000000000000" pitchFamily="2" charset="0"/>
-            </a:endParaRPr>
-          </a:p>
-        </p:txBody>
-      </p:sp>
-      <p:cxnSp>
-        <p:nvCxnSpPr>
-          <p:cNvPr id="37" name="Gerade Verbindung mit Pfeil 36">
-            <a:extLst>
-              <a:ext uri="{FF2B5EF4-FFF2-40B4-BE49-F238E27FC236}">
-                <a16:creationId xmlns:a16="http://schemas.microsoft.com/office/drawing/2014/main" id="{FB1213EE-F4C6-B406-497B-FDE0EDD6E58F}"/>
-              </a:ext>
-            </a:extLst>
-          </p:cNvPr>
-          <p:cNvCxnSpPr>
-            <a:stCxn id="7" idx="3"/>
-            <a:endCxn id="35" idx="0"/>
-          </p:cNvCxnSpPr>
-          <p:nvPr/>
-        </p:nvCxnSpPr>
-        <p:spPr>
-          <a:xfrm>
-            <a:off x="4953000" y="2628900"/>
-            <a:ext cx="0" cy="1900034"/>
-          </a:xfrm>
-          <a:prstGeom prst="straightConnector1">
-            <a:avLst/>
-          </a:prstGeom>
-          <a:ln>
-            <a:headEnd type="triangle"/>
-            <a:tailEnd type="triangle"/>
-          </a:ln>
-        </p:spPr>
-        <p:style>
-          <a:lnRef idx="2">
-            <a:schemeClr val="accent1"/>
-          </a:lnRef>
-          <a:fillRef idx="0">
-            <a:schemeClr val="accent1"/>
-          </a:fillRef>
-          <a:effectRef idx="1">
-            <a:schemeClr val="accent1"/>
-          </a:effectRef>
-          <a:fontRef idx="minor">
-            <a:schemeClr val="tx1"/>
-          </a:fontRef>
-        </p:style>
-      </p:cxnSp>
-      <p:sp>
-        <p:nvSpPr>
-          <p:cNvPr id="40" name="Textfeld 39">
-            <a:extLst>
-              <a:ext uri="{FF2B5EF4-FFF2-40B4-BE49-F238E27FC236}">
-                <a16:creationId xmlns:a16="http://schemas.microsoft.com/office/drawing/2014/main" id="{E78742E9-20BF-BA48-F05A-BF0BB6770B31}"/>
-              </a:ext>
-            </a:extLst>
-          </p:cNvPr>
-          <p:cNvSpPr txBox="1"/>
-          <p:nvPr/>
-        </p:nvSpPr>
-        <p:spPr>
-          <a:xfrm>
-            <a:off x="4952999" y="3330232"/>
-            <a:ext cx="1167307" cy="1077218"/>
-          </a:xfrm>
-          <a:prstGeom prst="rect">
-            <a:avLst/>
-          </a:prstGeom>
-          <a:noFill/>
-        </p:spPr>
-        <p:txBody>
-          <a:bodyPr wrap="none" rtlCol="0">
-            <a:spAutoFit/>
-          </a:bodyPr>
-          <a:lstStyle/>
-          <a:p>
-            <a:r>
-              <a:rPr lang="de-DE" sz="800" dirty="0" err="1">
-                <a:solidFill>
-                  <a:schemeClr val="tx1">
-                    <a:lumMod val="50000"/>
-                    <a:lumOff val="50000"/>
-                  </a:schemeClr>
-                </a:solidFill>
-                <a:latin typeface="Roboto" panose="02000000000000000000" pitchFamily="2" charset="0"/>
-                <a:ea typeface="Roboto" panose="02000000000000000000" pitchFamily="2" charset="0"/>
-              </a:rPr>
-              <a:t>add_new_user</a:t>
-            </a:r>
-            <a:r>
-              <a:rPr lang="de-DE" sz="800" dirty="0">
-                <a:solidFill>
-                  <a:schemeClr val="tx1">
-                    <a:lumMod val="50000"/>
-                    <a:lumOff val="50000"/>
-                  </a:schemeClr>
-                </a:solidFill>
-                <a:latin typeface="Roboto" panose="02000000000000000000" pitchFamily="2" charset="0"/>
-                <a:ea typeface="Roboto" panose="02000000000000000000" pitchFamily="2" charset="0"/>
-              </a:rPr>
-              <a:t>(</a:t>
-            </a:r>
-            <a:r>
-              <a:rPr lang="de-DE" sz="800" dirty="0" err="1">
-                <a:solidFill>
-                  <a:schemeClr val="tx1">
-                    <a:lumMod val="50000"/>
-                    <a:lumOff val="50000"/>
-                  </a:schemeClr>
-                </a:solidFill>
-                <a:latin typeface="Roboto" panose="02000000000000000000" pitchFamily="2" charset="0"/>
-                <a:ea typeface="Roboto" panose="02000000000000000000" pitchFamily="2" charset="0"/>
-              </a:rPr>
-              <a:t>id</a:t>
-            </a:r>
-            <a:r>
-              <a:rPr lang="de-DE" sz="800" dirty="0">
-                <a:solidFill>
-                  <a:schemeClr val="tx1">
-                    <a:lumMod val="50000"/>
-                    <a:lumOff val="50000"/>
-                  </a:schemeClr>
-                </a:solidFill>
-                <a:latin typeface="Roboto" panose="02000000000000000000" pitchFamily="2" charset="0"/>
-                <a:ea typeface="Roboto" panose="02000000000000000000" pitchFamily="2" charset="0"/>
-              </a:rPr>
-              <a:t>)</a:t>
-            </a:r>
-          </a:p>
-          <a:p>
-            <a:r>
-              <a:rPr lang="de-DE" sz="800" dirty="0" err="1">
-                <a:solidFill>
-                  <a:schemeClr val="tx1">
-                    <a:lumMod val="50000"/>
-                    <a:lumOff val="50000"/>
-                  </a:schemeClr>
-                </a:solidFill>
-                <a:latin typeface="Roboto" panose="02000000000000000000" pitchFamily="2" charset="0"/>
-                <a:ea typeface="Roboto" panose="02000000000000000000" pitchFamily="2" charset="0"/>
-              </a:rPr>
-              <a:t>add_new_source</a:t>
-            </a:r>
-            <a:r>
-              <a:rPr lang="de-DE" sz="800" dirty="0">
-                <a:solidFill>
-                  <a:schemeClr val="tx1">
-                    <a:lumMod val="50000"/>
-                    <a:lumOff val="50000"/>
-                  </a:schemeClr>
-                </a:solidFill>
-                <a:latin typeface="Roboto" panose="02000000000000000000" pitchFamily="2" charset="0"/>
-                <a:ea typeface="Roboto" panose="02000000000000000000" pitchFamily="2" charset="0"/>
-              </a:rPr>
-              <a:t>(</a:t>
-            </a:r>
-            <a:r>
-              <a:rPr lang="de-DE" sz="800" dirty="0" err="1">
-                <a:solidFill>
-                  <a:schemeClr val="tx1">
-                    <a:lumMod val="50000"/>
-                    <a:lumOff val="50000"/>
-                  </a:schemeClr>
-                </a:solidFill>
-                <a:latin typeface="Roboto" panose="02000000000000000000" pitchFamily="2" charset="0"/>
-                <a:ea typeface="Roboto" panose="02000000000000000000" pitchFamily="2" charset="0"/>
-              </a:rPr>
-              <a:t>id</a:t>
-            </a:r>
-            <a:r>
-              <a:rPr lang="de-DE" sz="800" dirty="0">
-                <a:solidFill>
-                  <a:schemeClr val="tx1">
-                    <a:lumMod val="50000"/>
-                    <a:lumOff val="50000"/>
-                  </a:schemeClr>
-                </a:solidFill>
-                <a:latin typeface="Roboto" panose="02000000000000000000" pitchFamily="2" charset="0"/>
-                <a:ea typeface="Roboto" panose="02000000000000000000" pitchFamily="2" charset="0"/>
-              </a:rPr>
-              <a:t>)</a:t>
-            </a:r>
-          </a:p>
-          <a:p>
-            <a:r>
-              <a:rPr lang="de-DE" sz="800" dirty="0" err="1">
-                <a:solidFill>
-                  <a:schemeClr val="tx1">
-                    <a:lumMod val="50000"/>
-                    <a:lumOff val="50000"/>
-                  </a:schemeClr>
-                </a:solidFill>
-                <a:latin typeface="Roboto" panose="02000000000000000000" pitchFamily="2" charset="0"/>
-                <a:ea typeface="Roboto" panose="02000000000000000000" pitchFamily="2" charset="0"/>
-              </a:rPr>
-              <a:t>add_link</a:t>
-            </a:r>
-            <a:r>
-              <a:rPr lang="de-DE" sz="800" dirty="0">
-                <a:solidFill>
-                  <a:schemeClr val="tx1">
-                    <a:lumMod val="50000"/>
-                    <a:lumOff val="50000"/>
-                  </a:schemeClr>
-                </a:solidFill>
-                <a:latin typeface="Roboto" panose="02000000000000000000" pitchFamily="2" charset="0"/>
-                <a:ea typeface="Roboto" panose="02000000000000000000" pitchFamily="2" charset="0"/>
-              </a:rPr>
-              <a:t>(</a:t>
-            </a:r>
-            <a:r>
-              <a:rPr lang="de-DE" sz="800" dirty="0" err="1">
-                <a:solidFill>
-                  <a:schemeClr val="tx1">
-                    <a:lumMod val="50000"/>
-                    <a:lumOff val="50000"/>
-                  </a:schemeClr>
-                </a:solidFill>
-                <a:latin typeface="Roboto" panose="02000000000000000000" pitchFamily="2" charset="0"/>
-                <a:ea typeface="Roboto" panose="02000000000000000000" pitchFamily="2" charset="0"/>
-              </a:rPr>
-              <a:t>id</a:t>
-            </a:r>
-            <a:r>
-              <a:rPr lang="de-DE" sz="800" dirty="0">
-                <a:solidFill>
-                  <a:schemeClr val="tx1">
-                    <a:lumMod val="50000"/>
-                    <a:lumOff val="50000"/>
-                  </a:schemeClr>
-                </a:solidFill>
-                <a:latin typeface="Roboto" panose="02000000000000000000" pitchFamily="2" charset="0"/>
-                <a:ea typeface="Roboto" panose="02000000000000000000" pitchFamily="2" charset="0"/>
-              </a:rPr>
-              <a:t>, </a:t>
-            </a:r>
-            <a:r>
-              <a:rPr lang="de-DE" sz="800" dirty="0" err="1">
-                <a:solidFill>
-                  <a:schemeClr val="tx1">
-                    <a:lumMod val="50000"/>
-                    <a:lumOff val="50000"/>
-                  </a:schemeClr>
-                </a:solidFill>
-                <a:latin typeface="Roboto" panose="02000000000000000000" pitchFamily="2" charset="0"/>
-                <a:ea typeface="Roboto" panose="02000000000000000000" pitchFamily="2" charset="0"/>
-              </a:rPr>
-              <a:t>id</a:t>
-            </a:r>
-            <a:r>
-              <a:rPr lang="de-DE" sz="800" dirty="0">
-                <a:solidFill>
-                  <a:schemeClr val="tx1">
-                    <a:lumMod val="50000"/>
-                    <a:lumOff val="50000"/>
-                  </a:schemeClr>
-                </a:solidFill>
-                <a:latin typeface="Roboto" panose="02000000000000000000" pitchFamily="2" charset="0"/>
-                <a:ea typeface="Roboto" panose="02000000000000000000" pitchFamily="2" charset="0"/>
-              </a:rPr>
-              <a:t>)</a:t>
-            </a:r>
-          </a:p>
-          <a:p>
-            <a:r>
-              <a:rPr lang="de-DE" sz="800" dirty="0" err="1">
-                <a:solidFill>
-                  <a:schemeClr val="tx1">
-                    <a:lumMod val="50000"/>
-                    <a:lumOff val="50000"/>
-                  </a:schemeClr>
-                </a:solidFill>
-                <a:latin typeface="Roboto" panose="02000000000000000000" pitchFamily="2" charset="0"/>
-                <a:ea typeface="Roboto" panose="02000000000000000000" pitchFamily="2" charset="0"/>
-              </a:rPr>
-              <a:t>remove_user</a:t>
-            </a:r>
-            <a:r>
-              <a:rPr lang="de-DE" sz="800" dirty="0">
-                <a:solidFill>
-                  <a:schemeClr val="tx1">
-                    <a:lumMod val="50000"/>
-                    <a:lumOff val="50000"/>
-                  </a:schemeClr>
-                </a:solidFill>
-                <a:latin typeface="Roboto" panose="02000000000000000000" pitchFamily="2" charset="0"/>
-                <a:ea typeface="Roboto" panose="02000000000000000000" pitchFamily="2" charset="0"/>
-              </a:rPr>
-              <a:t>(</a:t>
-            </a:r>
-            <a:r>
-              <a:rPr lang="de-DE" sz="800" dirty="0" err="1">
-                <a:solidFill>
-                  <a:schemeClr val="tx1">
-                    <a:lumMod val="50000"/>
-                    <a:lumOff val="50000"/>
-                  </a:schemeClr>
-                </a:solidFill>
-                <a:latin typeface="Roboto" panose="02000000000000000000" pitchFamily="2" charset="0"/>
-                <a:ea typeface="Roboto" panose="02000000000000000000" pitchFamily="2" charset="0"/>
-              </a:rPr>
-              <a:t>id</a:t>
-            </a:r>
-            <a:r>
-              <a:rPr lang="de-DE" sz="800" dirty="0">
-                <a:solidFill>
-                  <a:schemeClr val="tx1">
-                    <a:lumMod val="50000"/>
-                    <a:lumOff val="50000"/>
-                  </a:schemeClr>
-                </a:solidFill>
-                <a:latin typeface="Roboto" panose="02000000000000000000" pitchFamily="2" charset="0"/>
-                <a:ea typeface="Roboto" panose="02000000000000000000" pitchFamily="2" charset="0"/>
-              </a:rPr>
-              <a:t>)</a:t>
-            </a:r>
-          </a:p>
-          <a:p>
-            <a:r>
-              <a:rPr lang="de-DE" sz="800" dirty="0" err="1">
-                <a:solidFill>
-                  <a:schemeClr val="tx1">
-                    <a:lumMod val="50000"/>
-                    <a:lumOff val="50000"/>
-                  </a:schemeClr>
-                </a:solidFill>
-                <a:latin typeface="Roboto" panose="02000000000000000000" pitchFamily="2" charset="0"/>
-                <a:ea typeface="Roboto" panose="02000000000000000000" pitchFamily="2" charset="0"/>
-              </a:rPr>
-              <a:t>remove_source</a:t>
-            </a:r>
-            <a:r>
-              <a:rPr lang="de-DE" sz="800" dirty="0">
-                <a:solidFill>
-                  <a:schemeClr val="tx1">
-                    <a:lumMod val="50000"/>
-                    <a:lumOff val="50000"/>
-                  </a:schemeClr>
-                </a:solidFill>
-                <a:latin typeface="Roboto" panose="02000000000000000000" pitchFamily="2" charset="0"/>
-                <a:ea typeface="Roboto" panose="02000000000000000000" pitchFamily="2" charset="0"/>
-              </a:rPr>
-              <a:t>(</a:t>
-            </a:r>
-            <a:r>
-              <a:rPr lang="de-DE" sz="800" dirty="0" err="1">
-                <a:solidFill>
-                  <a:schemeClr val="tx1">
-                    <a:lumMod val="50000"/>
-                    <a:lumOff val="50000"/>
-                  </a:schemeClr>
-                </a:solidFill>
-                <a:latin typeface="Roboto" panose="02000000000000000000" pitchFamily="2" charset="0"/>
-                <a:ea typeface="Roboto" panose="02000000000000000000" pitchFamily="2" charset="0"/>
-              </a:rPr>
-              <a:t>id</a:t>
-            </a:r>
-            <a:r>
-              <a:rPr lang="de-DE" sz="800" dirty="0">
-                <a:solidFill>
-                  <a:schemeClr val="tx1">
-                    <a:lumMod val="50000"/>
-                    <a:lumOff val="50000"/>
-                  </a:schemeClr>
-                </a:solidFill>
-                <a:latin typeface="Roboto" panose="02000000000000000000" pitchFamily="2" charset="0"/>
-                <a:ea typeface="Roboto" panose="02000000000000000000" pitchFamily="2" charset="0"/>
-              </a:rPr>
-              <a:t>)</a:t>
-            </a:r>
-          </a:p>
-          <a:p>
-            <a:r>
-              <a:rPr lang="de-DE" sz="800" dirty="0" err="1">
-                <a:solidFill>
-                  <a:schemeClr val="tx1">
-                    <a:lumMod val="50000"/>
-                    <a:lumOff val="50000"/>
-                  </a:schemeClr>
-                </a:solidFill>
-                <a:latin typeface="Roboto" panose="02000000000000000000" pitchFamily="2" charset="0"/>
-                <a:ea typeface="Roboto" panose="02000000000000000000" pitchFamily="2" charset="0"/>
-              </a:rPr>
-              <a:t>remove_link</a:t>
-            </a:r>
-            <a:r>
-              <a:rPr lang="de-DE" sz="800" dirty="0">
-                <a:solidFill>
-                  <a:schemeClr val="tx1">
-                    <a:lumMod val="50000"/>
-                    <a:lumOff val="50000"/>
-                  </a:schemeClr>
-                </a:solidFill>
-                <a:latin typeface="Roboto" panose="02000000000000000000" pitchFamily="2" charset="0"/>
-                <a:ea typeface="Roboto" panose="02000000000000000000" pitchFamily="2" charset="0"/>
-              </a:rPr>
-              <a:t>(</a:t>
-            </a:r>
-            <a:r>
-              <a:rPr lang="de-DE" sz="800" dirty="0" err="1">
-                <a:solidFill>
-                  <a:schemeClr val="tx1">
-                    <a:lumMod val="50000"/>
-                    <a:lumOff val="50000"/>
-                  </a:schemeClr>
-                </a:solidFill>
-                <a:latin typeface="Roboto" panose="02000000000000000000" pitchFamily="2" charset="0"/>
-                <a:ea typeface="Roboto" panose="02000000000000000000" pitchFamily="2" charset="0"/>
-              </a:rPr>
-              <a:t>id</a:t>
-            </a:r>
-            <a:r>
-              <a:rPr lang="de-DE" sz="800" dirty="0">
-                <a:solidFill>
-                  <a:schemeClr val="tx1">
-                    <a:lumMod val="50000"/>
-                    <a:lumOff val="50000"/>
-                  </a:schemeClr>
-                </a:solidFill>
-                <a:latin typeface="Roboto" panose="02000000000000000000" pitchFamily="2" charset="0"/>
-                <a:ea typeface="Roboto" panose="02000000000000000000" pitchFamily="2" charset="0"/>
-              </a:rPr>
-              <a:t>, </a:t>
-            </a:r>
-            <a:r>
-              <a:rPr lang="de-DE" sz="800" dirty="0" err="1">
-                <a:solidFill>
-                  <a:schemeClr val="tx1">
-                    <a:lumMod val="50000"/>
-                    <a:lumOff val="50000"/>
-                  </a:schemeClr>
-                </a:solidFill>
-                <a:latin typeface="Roboto" panose="02000000000000000000" pitchFamily="2" charset="0"/>
-                <a:ea typeface="Roboto" panose="02000000000000000000" pitchFamily="2" charset="0"/>
-              </a:rPr>
-              <a:t>id</a:t>
-            </a:r>
-            <a:r>
-              <a:rPr lang="de-DE" sz="800" dirty="0">
-                <a:solidFill>
-                  <a:schemeClr val="tx1">
-                    <a:lumMod val="50000"/>
-                    <a:lumOff val="50000"/>
-                  </a:schemeClr>
-                </a:solidFill>
-                <a:latin typeface="Roboto" panose="02000000000000000000" pitchFamily="2" charset="0"/>
-                <a:ea typeface="Roboto" panose="02000000000000000000" pitchFamily="2" charset="0"/>
-              </a:rPr>
-              <a:t>)</a:t>
-            </a:r>
-            <a:endParaRPr lang="en-US" sz="800" dirty="0">
-              <a:solidFill>
-                <a:schemeClr val="tx1">
-                  <a:lumMod val="50000"/>
-                  <a:lumOff val="50000"/>
-                </a:schemeClr>
-              </a:solidFill>
-              <a:latin typeface="Roboto" panose="02000000000000000000" pitchFamily="2" charset="0"/>
-              <a:ea typeface="Roboto" panose="02000000000000000000" pitchFamily="2" charset="0"/>
-            </a:endParaRPr>
-          </a:p>
-          <a:p>
-            <a:r>
-              <a:rPr lang="en-US" sz="800" dirty="0">
-                <a:solidFill>
-                  <a:schemeClr val="tx1">
-                    <a:lumMod val="50000"/>
-                    <a:lumOff val="50000"/>
-                  </a:schemeClr>
-                </a:solidFill>
-                <a:latin typeface="Roboto" panose="02000000000000000000" pitchFamily="2" charset="0"/>
-                <a:ea typeface="Roboto" panose="02000000000000000000" pitchFamily="2" charset="0"/>
-              </a:rPr>
-              <a:t>backup()</a:t>
-            </a:r>
-          </a:p>
-          <a:p>
-            <a:r>
-              <a:rPr lang="en-US" sz="800" dirty="0" err="1">
-                <a:solidFill>
-                  <a:schemeClr val="tx1">
-                    <a:lumMod val="50000"/>
-                    <a:lumOff val="50000"/>
-                  </a:schemeClr>
-                </a:solidFill>
-                <a:latin typeface="Roboto" panose="02000000000000000000" pitchFamily="2" charset="0"/>
-                <a:ea typeface="Roboto" panose="02000000000000000000" pitchFamily="2" charset="0"/>
-              </a:rPr>
-              <a:t>load_backup</a:t>
-            </a:r>
-            <a:r>
-              <a:rPr lang="en-US" sz="800" dirty="0">
-                <a:solidFill>
-                  <a:schemeClr val="tx1">
-                    <a:lumMod val="50000"/>
-                    <a:lumOff val="50000"/>
-                  </a:schemeClr>
-                </a:solidFill>
-                <a:latin typeface="Roboto" panose="02000000000000000000" pitchFamily="2" charset="0"/>
-                <a:ea typeface="Roboto" panose="02000000000000000000" pitchFamily="2" charset="0"/>
-              </a:rPr>
-              <a:t>(backup)</a:t>
-            </a:r>
-          </a:p>
-        </p:txBody>
-      </p:sp>
-      <p:sp>
-        <p:nvSpPr>
-          <p:cNvPr id="42" name="Rechteck 41">
-            <a:extLst>
-              <a:ext uri="{FF2B5EF4-FFF2-40B4-BE49-F238E27FC236}">
-                <a16:creationId xmlns:a16="http://schemas.microsoft.com/office/drawing/2014/main" id="{EFEEA0F9-CDD0-5E07-1C7F-AE34EDCB0323}"/>
-              </a:ext>
-            </a:extLst>
-          </p:cNvPr>
-          <p:cNvSpPr/>
-          <p:nvPr/>
-        </p:nvSpPr>
-        <p:spPr>
-          <a:xfrm>
-            <a:off x="8137711" y="6545066"/>
-            <a:ext cx="1358153" cy="228600"/>
-          </a:xfrm>
-          <a:prstGeom prst="rect">
-            <a:avLst/>
-          </a:prstGeom>
-          <a:solidFill>
-            <a:srgbClr val="7030A0"/>
-          </a:solidFill>
-          <a:ln>
-            <a:noFill/>
-          </a:ln>
-        </p:spPr>
-        <p:style>
-          <a:lnRef idx="2">
-            <a:schemeClr val="accent1">
-              <a:shade val="15000"/>
-            </a:schemeClr>
-          </a:lnRef>
-          <a:fillRef idx="1">
-            <a:schemeClr val="accent1"/>
-          </a:fillRef>
-          <a:effectRef idx="0">
-            <a:schemeClr val="accent1"/>
-          </a:effectRef>
-          <a:fontRef idx="minor">
-            <a:schemeClr val="lt1"/>
-          </a:fontRef>
-        </p:style>
-        <p:txBody>
-          <a:bodyPr rtlCol="0" anchor="ctr"/>
-          <a:lstStyle/>
-          <a:p>
-            <a:pPr algn="ctr"/>
-            <a:r>
-              <a:rPr lang="de-DE" sz="1000" dirty="0">
-                <a:latin typeface="Roboto" panose="02000000000000000000" pitchFamily="2" charset="0"/>
-                <a:ea typeface="Roboto" panose="02000000000000000000" pitchFamily="2" charset="0"/>
-              </a:rPr>
-              <a:t>Web frontend</a:t>
-            </a:r>
-            <a:endParaRPr lang="en-US" sz="1000" dirty="0">
-              <a:latin typeface="Roboto" panose="02000000000000000000" pitchFamily="2" charset="0"/>
-              <a:ea typeface="Roboto" panose="02000000000000000000" pitchFamily="2" charset="0"/>
-            </a:endParaRPr>
-          </a:p>
-        </p:txBody>
-      </p:sp>
-      <p:pic>
-        <p:nvPicPr>
-          <p:cNvPr id="44" name="Grafik 43" descr="Zusammendrücken Vergrößern mit einfarbiger Füllung">
-            <a:extLst>
-              <a:ext uri="{FF2B5EF4-FFF2-40B4-BE49-F238E27FC236}">
-                <a16:creationId xmlns:a16="http://schemas.microsoft.com/office/drawing/2014/main" id="{E2B7B65D-D442-B535-80A7-C731F15B9C8D}"/>
-              </a:ext>
-            </a:extLst>
-          </p:cNvPr>
-          <p:cNvPicPr>
-            <a:picLocks noChangeAspect="1"/>
-          </p:cNvPicPr>
-          <p:nvPr/>
-        </p:nvPicPr>
-        <p:blipFill>
-          <a:blip r:embed="rId2">
-            <a:extLst>
-              <a:ext uri="{96DAC541-7B7A-43D3-8B79-37D633B846F1}">
-                <asvg:svgBlip xmlns:asvg="http://schemas.microsoft.com/office/drawing/2016/SVG/main" r:embed="rId3"/>
-              </a:ext>
-            </a:extLst>
-          </a:blip>
-          <a:stretch>
-            <a:fillRect/>
-          </a:stretch>
-        </p:blipFill>
-        <p:spPr>
-          <a:xfrm>
-            <a:off x="5228665" y="5033682"/>
-            <a:ext cx="593912" cy="593912"/>
-          </a:xfrm>
-          <a:prstGeom prst="rect">
-            <a:avLst/>
-          </a:prstGeom>
-        </p:spPr>
-      </p:pic>
       <p:pic>
         <p:nvPicPr>
           <p:cNvPr id="45" name="Grafik 44" descr="Zusammendrücken Vergrößern mit einfarbiger Füllung">
@@ -5246,10 +4752,10 @@
           <p:nvPr/>
         </p:nvPicPr>
         <p:blipFill>
-          <a:blip r:embed="rId2">
+          <a:blip>
             <a:extLst>
               <a:ext uri="{96DAC541-7B7A-43D3-8B79-37D633B846F1}">
-                <asvg:svgBlip xmlns:asvg="http://schemas.microsoft.com/office/drawing/2016/SVG/main" r:embed="rId3"/>
+                <asvg:svgBlip xmlns:asvg="http://schemas.microsoft.com/office/drawing/2016/SVG/main" r:embed="rId2"/>
               </a:ext>
             </a:extLst>
           </a:blip>
@@ -5282,10 +4788,10 @@
           <p:nvPr/>
         </p:nvPicPr>
         <p:blipFill>
-          <a:blip r:embed="rId2">
+          <a:blip>
             <a:extLst>
               <a:ext uri="{96DAC541-7B7A-43D3-8B79-37D633B846F1}">
-                <asvg:svgBlip xmlns:asvg="http://schemas.microsoft.com/office/drawing/2016/SVG/main" r:embed="rId3"/>
+                <asvg:svgBlip xmlns:asvg="http://schemas.microsoft.com/office/drawing/2016/SVG/main" r:embed="rId2"/>
               </a:ext>
             </a:extLst>
           </a:blip>
@@ -5303,6 +4809,390 @@
           </a:prstGeom>
         </p:spPr>
       </p:pic>
+      <p:cxnSp>
+        <p:nvCxnSpPr>
+          <p:cNvPr id="11" name="Gerade Verbindung mit Pfeil 10">
+            <a:extLst>
+              <a:ext uri="{FF2B5EF4-FFF2-40B4-BE49-F238E27FC236}">
+                <a16:creationId xmlns:a16="http://schemas.microsoft.com/office/drawing/2014/main" id="{76310114-1796-1878-5AC5-37A1BC37F975}"/>
+              </a:ext>
+            </a:extLst>
+          </p:cNvPr>
+          <p:cNvCxnSpPr>
+            <a:cxnSpLocks/>
+            <a:stCxn id="6" idx="0"/>
+            <a:endCxn id="7" idx="2"/>
+          </p:cNvCxnSpPr>
+          <p:nvPr/>
+        </p:nvCxnSpPr>
+        <p:spPr>
+          <a:xfrm flipV="1">
+            <a:off x="2084295" y="2245659"/>
+            <a:ext cx="2296083" cy="746312"/>
+          </a:xfrm>
+          <a:prstGeom prst="straightConnector1">
+            <a:avLst/>
+          </a:prstGeom>
+          <a:ln>
+            <a:tailEnd type="triangle"/>
+          </a:ln>
+        </p:spPr>
+        <p:style>
+          <a:lnRef idx="2">
+            <a:schemeClr val="accent1"/>
+          </a:lnRef>
+          <a:fillRef idx="0">
+            <a:schemeClr val="accent1"/>
+          </a:fillRef>
+          <a:effectRef idx="1">
+            <a:schemeClr val="accent1"/>
+          </a:effectRef>
+          <a:fontRef idx="minor">
+            <a:schemeClr val="tx1"/>
+          </a:fontRef>
+        </p:style>
+      </p:cxnSp>
+      <p:cxnSp>
+        <p:nvCxnSpPr>
+          <p:cNvPr id="19" name="Gerade Verbindung mit Pfeil 18">
+            <a:extLst>
+              <a:ext uri="{FF2B5EF4-FFF2-40B4-BE49-F238E27FC236}">
+                <a16:creationId xmlns:a16="http://schemas.microsoft.com/office/drawing/2014/main" id="{D5C3545C-CC97-9FE6-2B48-CCE34D4372ED}"/>
+              </a:ext>
+            </a:extLst>
+          </p:cNvPr>
+          <p:cNvCxnSpPr>
+            <a:cxnSpLocks/>
+            <a:stCxn id="7" idx="4"/>
+            <a:endCxn id="15" idx="1"/>
+          </p:cNvCxnSpPr>
+          <p:nvPr/>
+        </p:nvCxnSpPr>
+        <p:spPr>
+          <a:xfrm>
+            <a:off x="5525621" y="2245659"/>
+            <a:ext cx="1354230" cy="2232213"/>
+          </a:xfrm>
+          <a:prstGeom prst="straightConnector1">
+            <a:avLst/>
+          </a:prstGeom>
+          <a:ln>
+            <a:tailEnd type="triangle"/>
+          </a:ln>
+        </p:spPr>
+        <p:style>
+          <a:lnRef idx="2">
+            <a:schemeClr val="accent1"/>
+          </a:lnRef>
+          <a:fillRef idx="0">
+            <a:schemeClr val="accent1"/>
+          </a:fillRef>
+          <a:effectRef idx="1">
+            <a:schemeClr val="accent1"/>
+          </a:effectRef>
+          <a:fontRef idx="minor">
+            <a:schemeClr val="tx1"/>
+          </a:fontRef>
+        </p:style>
+      </p:cxnSp>
+      <p:cxnSp>
+        <p:nvCxnSpPr>
+          <p:cNvPr id="20" name="Gerade Verbindung mit Pfeil 19">
+            <a:extLst>
+              <a:ext uri="{FF2B5EF4-FFF2-40B4-BE49-F238E27FC236}">
+                <a16:creationId xmlns:a16="http://schemas.microsoft.com/office/drawing/2014/main" id="{AC24FD6A-04D8-480D-D9E4-03169AC08F4F}"/>
+              </a:ext>
+            </a:extLst>
+          </p:cNvPr>
+          <p:cNvCxnSpPr>
+            <a:cxnSpLocks/>
+            <a:stCxn id="7" idx="4"/>
+            <a:endCxn id="8" idx="1"/>
+          </p:cNvCxnSpPr>
+          <p:nvPr/>
+        </p:nvCxnSpPr>
+        <p:spPr>
+          <a:xfrm>
+            <a:off x="5525621" y="2245659"/>
+            <a:ext cx="2029383" cy="1116107"/>
+          </a:xfrm>
+          <a:prstGeom prst="straightConnector1">
+            <a:avLst/>
+          </a:prstGeom>
+          <a:ln>
+            <a:tailEnd type="triangle"/>
+          </a:ln>
+        </p:spPr>
+        <p:style>
+          <a:lnRef idx="2">
+            <a:schemeClr val="accent1"/>
+          </a:lnRef>
+          <a:fillRef idx="0">
+            <a:schemeClr val="accent1"/>
+          </a:fillRef>
+          <a:effectRef idx="1">
+            <a:schemeClr val="accent1"/>
+          </a:effectRef>
+          <a:fontRef idx="minor">
+            <a:schemeClr val="tx1"/>
+          </a:fontRef>
+        </p:style>
+      </p:cxnSp>
+      <p:sp>
+        <p:nvSpPr>
+          <p:cNvPr id="18" name="Textfeld 17">
+            <a:extLst>
+              <a:ext uri="{FF2B5EF4-FFF2-40B4-BE49-F238E27FC236}">
+                <a16:creationId xmlns:a16="http://schemas.microsoft.com/office/drawing/2014/main" id="{C1D6C9C1-C2F8-F423-A671-FF7102DD8F16}"/>
+              </a:ext>
+            </a:extLst>
+          </p:cNvPr>
+          <p:cNvSpPr txBox="1"/>
+          <p:nvPr/>
+        </p:nvSpPr>
+        <p:spPr>
+          <a:xfrm>
+            <a:off x="5754555" y="2991971"/>
+            <a:ext cx="1653017" cy="215444"/>
+          </a:xfrm>
+          <a:prstGeom prst="rect">
+            <a:avLst/>
+          </a:prstGeom>
+          <a:solidFill>
+            <a:schemeClr val="bg1"/>
+          </a:solidFill>
+        </p:spPr>
+        <p:txBody>
+          <a:bodyPr wrap="none" rtlCol="0">
+            <a:spAutoFit/>
+          </a:bodyPr>
+          <a:lstStyle/>
+          <a:p>
+            <a:r>
+              <a:rPr lang="de-DE" sz="800" dirty="0" err="1">
+                <a:solidFill>
+                  <a:schemeClr val="tx1">
+                    <a:lumMod val="50000"/>
+                    <a:lumOff val="50000"/>
+                  </a:schemeClr>
+                </a:solidFill>
+                <a:latin typeface="Roboto" panose="02000000000000000000" pitchFamily="2" charset="0"/>
+                <a:ea typeface="Roboto" panose="02000000000000000000" pitchFamily="2" charset="0"/>
+              </a:rPr>
+              <a:t>Receive</a:t>
+            </a:r>
+            <a:r>
+              <a:rPr lang="de-DE" sz="800" dirty="0">
+                <a:solidFill>
+                  <a:schemeClr val="tx1">
+                    <a:lumMod val="50000"/>
+                    <a:lumOff val="50000"/>
+                  </a:schemeClr>
+                </a:solidFill>
+                <a:latin typeface="Roboto" panose="02000000000000000000" pitchFamily="2" charset="0"/>
+                <a:ea typeface="Roboto" panose="02000000000000000000" pitchFamily="2" charset="0"/>
+              </a:rPr>
+              <a:t> </a:t>
+            </a:r>
+            <a:r>
+              <a:rPr lang="de-DE" sz="800" dirty="0" err="1">
+                <a:solidFill>
+                  <a:schemeClr val="tx1">
+                    <a:lumMod val="50000"/>
+                    <a:lumOff val="50000"/>
+                  </a:schemeClr>
+                </a:solidFill>
+                <a:latin typeface="Roboto" panose="02000000000000000000" pitchFamily="2" charset="0"/>
+                <a:ea typeface="Roboto" panose="02000000000000000000" pitchFamily="2" charset="0"/>
+              </a:rPr>
+              <a:t>image</a:t>
+            </a:r>
+            <a:r>
+              <a:rPr lang="de-DE" sz="800" dirty="0">
+                <a:solidFill>
+                  <a:schemeClr val="tx1">
+                    <a:lumMod val="50000"/>
+                    <a:lumOff val="50000"/>
+                  </a:schemeClr>
+                </a:solidFill>
+                <a:latin typeface="Roboto" panose="02000000000000000000" pitchFamily="2" charset="0"/>
+                <a:ea typeface="Roboto" panose="02000000000000000000" pitchFamily="2" charset="0"/>
+              </a:rPr>
+              <a:t> </a:t>
+            </a:r>
+            <a:r>
+              <a:rPr lang="de-DE" sz="800" dirty="0" err="1">
+                <a:solidFill>
+                  <a:schemeClr val="tx1">
+                    <a:lumMod val="50000"/>
+                    <a:lumOff val="50000"/>
+                  </a:schemeClr>
+                </a:solidFill>
+                <a:latin typeface="Roboto" panose="02000000000000000000" pitchFamily="2" charset="0"/>
+                <a:ea typeface="Roboto" panose="02000000000000000000" pitchFamily="2" charset="0"/>
+              </a:rPr>
+              <a:t>with</a:t>
+            </a:r>
+            <a:r>
+              <a:rPr lang="de-DE" sz="800" dirty="0">
+                <a:solidFill>
+                  <a:schemeClr val="tx1">
+                    <a:lumMod val="50000"/>
+                    <a:lumOff val="50000"/>
+                  </a:schemeClr>
+                </a:solidFill>
+                <a:latin typeface="Roboto" panose="02000000000000000000" pitchFamily="2" charset="0"/>
+                <a:ea typeface="Roboto" panose="02000000000000000000" pitchFamily="2" charset="0"/>
+              </a:rPr>
+              <a:t> GET </a:t>
+            </a:r>
+            <a:r>
+              <a:rPr lang="de-DE" sz="800" dirty="0" err="1">
+                <a:solidFill>
+                  <a:schemeClr val="tx1">
+                    <a:lumMod val="50000"/>
+                    <a:lumOff val="50000"/>
+                  </a:schemeClr>
+                </a:solidFill>
+                <a:latin typeface="Roboto" panose="02000000000000000000" pitchFamily="2" charset="0"/>
+                <a:ea typeface="Roboto" panose="02000000000000000000" pitchFamily="2" charset="0"/>
+              </a:rPr>
+              <a:t>request</a:t>
+            </a:r>
+            <a:endParaRPr lang="en-US" sz="800" dirty="0">
+              <a:solidFill>
+                <a:schemeClr val="tx1">
+                  <a:lumMod val="50000"/>
+                  <a:lumOff val="50000"/>
+                </a:schemeClr>
+              </a:solidFill>
+              <a:latin typeface="Roboto" panose="02000000000000000000" pitchFamily="2" charset="0"/>
+              <a:ea typeface="Roboto" panose="02000000000000000000" pitchFamily="2" charset="0"/>
+            </a:endParaRPr>
+          </a:p>
+        </p:txBody>
+      </p:sp>
+      <p:sp>
+        <p:nvSpPr>
+          <p:cNvPr id="32" name="Textfeld 31">
+            <a:extLst>
+              <a:ext uri="{FF2B5EF4-FFF2-40B4-BE49-F238E27FC236}">
+                <a16:creationId xmlns:a16="http://schemas.microsoft.com/office/drawing/2014/main" id="{A58B2F4F-E403-1463-2770-5117C2CCB9AD}"/>
+              </a:ext>
+            </a:extLst>
+          </p:cNvPr>
+          <p:cNvSpPr txBox="1"/>
+          <p:nvPr/>
+        </p:nvSpPr>
+        <p:spPr>
+          <a:xfrm>
+            <a:off x="2685823" y="2391321"/>
+            <a:ext cx="1593706" cy="215444"/>
+          </a:xfrm>
+          <a:prstGeom prst="rect">
+            <a:avLst/>
+          </a:prstGeom>
+          <a:solidFill>
+            <a:schemeClr val="bg1"/>
+          </a:solidFill>
+        </p:spPr>
+        <p:txBody>
+          <a:bodyPr wrap="none" rtlCol="0">
+            <a:spAutoFit/>
+          </a:bodyPr>
+          <a:lstStyle/>
+          <a:p>
+            <a:r>
+              <a:rPr lang="de-DE" sz="800" dirty="0">
+                <a:solidFill>
+                  <a:schemeClr val="tx1">
+                    <a:lumMod val="50000"/>
+                    <a:lumOff val="50000"/>
+                  </a:schemeClr>
+                </a:solidFill>
+                <a:latin typeface="Roboto" panose="02000000000000000000" pitchFamily="2" charset="0"/>
+                <a:ea typeface="Roboto" panose="02000000000000000000" pitchFamily="2" charset="0"/>
+              </a:rPr>
+              <a:t>Send </a:t>
+            </a:r>
+            <a:r>
+              <a:rPr lang="de-DE" sz="800" dirty="0" err="1">
+                <a:solidFill>
+                  <a:schemeClr val="tx1">
+                    <a:lumMod val="50000"/>
+                    <a:lumOff val="50000"/>
+                  </a:schemeClr>
+                </a:solidFill>
+                <a:latin typeface="Roboto" panose="02000000000000000000" pitchFamily="2" charset="0"/>
+                <a:ea typeface="Roboto" panose="02000000000000000000" pitchFamily="2" charset="0"/>
+              </a:rPr>
+              <a:t>image</a:t>
+            </a:r>
+            <a:r>
+              <a:rPr lang="de-DE" sz="800" dirty="0">
+                <a:solidFill>
+                  <a:schemeClr val="tx1">
+                    <a:lumMod val="50000"/>
+                    <a:lumOff val="50000"/>
+                  </a:schemeClr>
+                </a:solidFill>
+                <a:latin typeface="Roboto" panose="02000000000000000000" pitchFamily="2" charset="0"/>
+                <a:ea typeface="Roboto" panose="02000000000000000000" pitchFamily="2" charset="0"/>
+              </a:rPr>
+              <a:t> </a:t>
+            </a:r>
+            <a:r>
+              <a:rPr lang="de-DE" sz="800" dirty="0" err="1">
+                <a:solidFill>
+                  <a:schemeClr val="tx1">
+                    <a:lumMod val="50000"/>
+                    <a:lumOff val="50000"/>
+                  </a:schemeClr>
+                </a:solidFill>
+                <a:latin typeface="Roboto" panose="02000000000000000000" pitchFamily="2" charset="0"/>
+                <a:ea typeface="Roboto" panose="02000000000000000000" pitchFamily="2" charset="0"/>
+              </a:rPr>
+              <a:t>with</a:t>
+            </a:r>
+            <a:r>
+              <a:rPr lang="de-DE" sz="800" dirty="0">
+                <a:solidFill>
+                  <a:schemeClr val="tx1">
+                    <a:lumMod val="50000"/>
+                    <a:lumOff val="50000"/>
+                  </a:schemeClr>
+                </a:solidFill>
+                <a:latin typeface="Roboto" panose="02000000000000000000" pitchFamily="2" charset="0"/>
+                <a:ea typeface="Roboto" panose="02000000000000000000" pitchFamily="2" charset="0"/>
+              </a:rPr>
+              <a:t> POST </a:t>
+            </a:r>
+            <a:r>
+              <a:rPr lang="de-DE" sz="800" dirty="0" err="1">
+                <a:solidFill>
+                  <a:schemeClr val="tx1">
+                    <a:lumMod val="50000"/>
+                    <a:lumOff val="50000"/>
+                  </a:schemeClr>
+                </a:solidFill>
+                <a:latin typeface="Roboto" panose="02000000000000000000" pitchFamily="2" charset="0"/>
+                <a:ea typeface="Roboto" panose="02000000000000000000" pitchFamily="2" charset="0"/>
+              </a:rPr>
+              <a:t>request</a:t>
+            </a:r>
+            <a:endParaRPr lang="en-US" sz="800" dirty="0">
+              <a:solidFill>
+                <a:schemeClr val="tx1">
+                  <a:lumMod val="50000"/>
+                  <a:lumOff val="50000"/>
+                </a:schemeClr>
+              </a:solidFill>
+              <a:latin typeface="Roboto" panose="02000000000000000000" pitchFamily="2" charset="0"/>
+              <a:ea typeface="Roboto" panose="02000000000000000000" pitchFamily="2" charset="0"/>
+            </a:endParaRPr>
+          </a:p>
+        </p:txBody>
+      </p:sp>
     </p:spTree>
     <p:extLst>
       <p:ext uri="{BB962C8B-B14F-4D97-AF65-F5344CB8AC3E}">
@@ -5862,49 +5752,6 @@
           </a:fontRef>
         </p:style>
       </p:cxnSp>
-      <p:cxnSp>
-        <p:nvCxnSpPr>
-          <p:cNvPr id="14" name="Gerade Verbindung mit Pfeil 13">
-            <a:extLst>
-              <a:ext uri="{FF2B5EF4-FFF2-40B4-BE49-F238E27FC236}">
-                <a16:creationId xmlns:a16="http://schemas.microsoft.com/office/drawing/2014/main" id="{D72AF6D9-6044-56C2-F9B2-EC7E3A664BA6}"/>
-              </a:ext>
-            </a:extLst>
-          </p:cNvPr>
-          <p:cNvCxnSpPr>
-            <a:stCxn id="7" idx="4"/>
-            <a:endCxn id="8" idx="0"/>
-          </p:cNvCxnSpPr>
-          <p:nvPr/>
-        </p:nvCxnSpPr>
-        <p:spPr>
-          <a:xfrm>
-            <a:off x="5525621" y="2245659"/>
-            <a:ext cx="2708460" cy="732865"/>
-          </a:xfrm>
-          <a:prstGeom prst="straightConnector1">
-            <a:avLst/>
-          </a:prstGeom>
-          <a:ln>
-            <a:headEnd type="triangle"/>
-            <a:tailEnd type="triangle"/>
-          </a:ln>
-        </p:spPr>
-        <p:style>
-          <a:lnRef idx="2">
-            <a:schemeClr val="accent1"/>
-          </a:lnRef>
-          <a:fillRef idx="0">
-            <a:schemeClr val="accent1"/>
-          </a:fillRef>
-          <a:effectRef idx="1">
-            <a:schemeClr val="accent1"/>
-          </a:effectRef>
-          <a:fontRef idx="minor">
-            <a:schemeClr val="tx1"/>
-          </a:fontRef>
-        </p:style>
-      </p:cxnSp>
       <p:sp>
         <p:nvSpPr>
           <p:cNvPr id="15" name="Rechteck 14">
@@ -5970,49 +5817,6 @@
           </a:p>
         </p:txBody>
       </p:sp>
-      <p:cxnSp>
-        <p:nvCxnSpPr>
-          <p:cNvPr id="17" name="Gerade Verbindung mit Pfeil 16">
-            <a:extLst>
-              <a:ext uri="{FF2B5EF4-FFF2-40B4-BE49-F238E27FC236}">
-                <a16:creationId xmlns:a16="http://schemas.microsoft.com/office/drawing/2014/main" id="{8D8AEC4B-FCCC-E6E2-7159-A48861235235}"/>
-              </a:ext>
-            </a:extLst>
-          </p:cNvPr>
-          <p:cNvCxnSpPr>
-            <a:stCxn id="7" idx="4"/>
-            <a:endCxn id="15" idx="0"/>
-          </p:cNvCxnSpPr>
-          <p:nvPr/>
-        </p:nvCxnSpPr>
-        <p:spPr>
-          <a:xfrm>
-            <a:off x="5525621" y="2245659"/>
-            <a:ext cx="2033307" cy="1848971"/>
-          </a:xfrm>
-          <a:prstGeom prst="straightConnector1">
-            <a:avLst/>
-          </a:prstGeom>
-          <a:ln>
-            <a:headEnd type="triangle"/>
-            <a:tailEnd type="triangle"/>
-          </a:ln>
-        </p:spPr>
-        <p:style>
-          <a:lnRef idx="2">
-            <a:schemeClr val="accent1"/>
-          </a:lnRef>
-          <a:fillRef idx="0">
-            <a:schemeClr val="accent1"/>
-          </a:fillRef>
-          <a:effectRef idx="1">
-            <a:schemeClr val="accent1"/>
-          </a:effectRef>
-          <a:fontRef idx="minor">
-            <a:schemeClr val="tx1"/>
-          </a:fontRef>
-        </p:style>
-      </p:cxnSp>
       <p:cxnSp>
         <p:nvCxnSpPr>
           <p:cNvPr id="22" name="Gerade Verbindung mit Pfeil 21">
@@ -6442,314 +6246,10 @@
       </p:sp>
       <p:sp>
         <p:nvSpPr>
-          <p:cNvPr id="32" name="Textfeld 31">
+          <p:cNvPr id="21" name="Rechteck 20">
             <a:extLst>
               <a:ext uri="{FF2B5EF4-FFF2-40B4-BE49-F238E27FC236}">
-                <a16:creationId xmlns:a16="http://schemas.microsoft.com/office/drawing/2014/main" id="{FB9ADFBF-FF84-8757-DDF1-C90C73FAD480}"/>
-              </a:ext>
-            </a:extLst>
-          </p:cNvPr>
-          <p:cNvSpPr txBox="1"/>
-          <p:nvPr/>
-        </p:nvSpPr>
-        <p:spPr>
-          <a:xfrm>
-            <a:off x="2535189" y="2075653"/>
-            <a:ext cx="1907895" cy="707886"/>
-          </a:xfrm>
-          <a:prstGeom prst="rect">
-            <a:avLst/>
-          </a:prstGeom>
-          <a:noFill/>
-        </p:spPr>
-        <p:txBody>
-          <a:bodyPr wrap="none" rtlCol="0">
-            <a:spAutoFit/>
-          </a:bodyPr>
-          <a:lstStyle/>
-          <a:p>
-            <a:r>
-              <a:rPr lang="de-DE" sz="800" dirty="0" err="1">
-                <a:solidFill>
-                  <a:schemeClr val="tx1">
-                    <a:lumMod val="50000"/>
-                    <a:lumOff val="50000"/>
-                  </a:schemeClr>
-                </a:solidFill>
-                <a:latin typeface="Roboto" panose="02000000000000000000" pitchFamily="2" charset="0"/>
-                <a:ea typeface="Roboto" panose="02000000000000000000" pitchFamily="2" charset="0"/>
-              </a:rPr>
-              <a:t>get_current_temperature</a:t>
-            </a:r>
-            <a:r>
-              <a:rPr lang="de-DE" sz="800" dirty="0">
-                <a:solidFill>
-                  <a:schemeClr val="tx1">
-                    <a:lumMod val="50000"/>
-                    <a:lumOff val="50000"/>
-                  </a:schemeClr>
-                </a:solidFill>
-                <a:latin typeface="Roboto" panose="02000000000000000000" pitchFamily="2" charset="0"/>
-                <a:ea typeface="Roboto" panose="02000000000000000000" pitchFamily="2" charset="0"/>
-              </a:rPr>
-              <a:t>()</a:t>
-            </a:r>
-          </a:p>
-          <a:p>
-            <a:r>
-              <a:rPr lang="de-DE" sz="800" dirty="0">
-                <a:solidFill>
-                  <a:schemeClr val="tx1">
-                    <a:lumMod val="50000"/>
-                    <a:lumOff val="50000"/>
-                  </a:schemeClr>
-                </a:solidFill>
-                <a:latin typeface="Roboto" panose="02000000000000000000" pitchFamily="2" charset="0"/>
-                <a:ea typeface="Roboto" panose="02000000000000000000" pitchFamily="2" charset="0"/>
-              </a:rPr>
-              <a:t>update()</a:t>
-            </a:r>
-            <a:endParaRPr lang="en-US" sz="800" dirty="0">
-              <a:solidFill>
-                <a:schemeClr val="tx1">
-                  <a:lumMod val="50000"/>
-                  <a:lumOff val="50000"/>
-                </a:schemeClr>
-              </a:solidFill>
-              <a:latin typeface="Roboto" panose="02000000000000000000" pitchFamily="2" charset="0"/>
-              <a:ea typeface="Roboto" panose="02000000000000000000" pitchFamily="2" charset="0"/>
-            </a:endParaRPr>
-          </a:p>
-          <a:p>
-            <a:r>
-              <a:rPr lang="en-US" sz="800" dirty="0" err="1">
-                <a:solidFill>
-                  <a:schemeClr val="tx1">
-                    <a:lumMod val="50000"/>
-                    <a:lumOff val="50000"/>
-                  </a:schemeClr>
-                </a:solidFill>
-                <a:latin typeface="Roboto" panose="02000000000000000000" pitchFamily="2" charset="0"/>
-                <a:ea typeface="Roboto" panose="02000000000000000000" pitchFamily="2" charset="0"/>
-              </a:rPr>
-              <a:t>get_temperature_history</a:t>
-            </a:r>
-            <a:r>
-              <a:rPr lang="en-US" sz="800" dirty="0">
-                <a:solidFill>
-                  <a:schemeClr val="tx1">
-                    <a:lumMod val="50000"/>
-                    <a:lumOff val="50000"/>
-                  </a:schemeClr>
-                </a:solidFill>
-                <a:latin typeface="Roboto" panose="02000000000000000000" pitchFamily="2" charset="0"/>
-                <a:ea typeface="Roboto" panose="02000000000000000000" pitchFamily="2" charset="0"/>
-              </a:rPr>
-              <a:t>(int seconds)</a:t>
-            </a:r>
-          </a:p>
-          <a:p>
-            <a:r>
-              <a:rPr lang="en-US" sz="800" dirty="0" err="1">
-                <a:solidFill>
-                  <a:schemeClr val="tx1">
-                    <a:lumMod val="50000"/>
-                    <a:lumOff val="50000"/>
-                  </a:schemeClr>
-                </a:solidFill>
-                <a:latin typeface="Roboto" panose="02000000000000000000" pitchFamily="2" charset="0"/>
-                <a:ea typeface="Roboto" panose="02000000000000000000" pitchFamily="2" charset="0"/>
-              </a:rPr>
-              <a:t>set_update_interval</a:t>
-            </a:r>
-            <a:r>
-              <a:rPr lang="en-US" sz="800" dirty="0">
-                <a:solidFill>
-                  <a:schemeClr val="tx1">
-                    <a:lumMod val="50000"/>
-                    <a:lumOff val="50000"/>
-                  </a:schemeClr>
-                </a:solidFill>
-                <a:latin typeface="Roboto" panose="02000000000000000000" pitchFamily="2" charset="0"/>
-                <a:ea typeface="Roboto" panose="02000000000000000000" pitchFamily="2" charset="0"/>
-              </a:rPr>
-              <a:t>(int seconds)</a:t>
-            </a:r>
-          </a:p>
-          <a:p>
-            <a:r>
-              <a:rPr lang="en-US" sz="800" dirty="0" err="1">
-                <a:solidFill>
-                  <a:schemeClr val="tx1">
-                    <a:lumMod val="50000"/>
-                    <a:lumOff val="50000"/>
-                  </a:schemeClr>
-                </a:solidFill>
-                <a:latin typeface="Roboto" panose="02000000000000000000" pitchFamily="2" charset="0"/>
-                <a:ea typeface="Roboto" panose="02000000000000000000" pitchFamily="2" charset="0"/>
-              </a:rPr>
-              <a:t>register_status</a:t>
-            </a:r>
-            <a:r>
-              <a:rPr lang="en-US" sz="800" dirty="0">
-                <a:solidFill>
-                  <a:schemeClr val="tx1">
-                    <a:lumMod val="50000"/>
-                    <a:lumOff val="50000"/>
-                  </a:schemeClr>
-                </a:solidFill>
-                <a:latin typeface="Roboto" panose="02000000000000000000" pitchFamily="2" charset="0"/>
-                <a:ea typeface="Roboto" panose="02000000000000000000" pitchFamily="2" charset="0"/>
-              </a:rPr>
-              <a:t>()</a:t>
-            </a:r>
-          </a:p>
-        </p:txBody>
-      </p:sp>
-      <p:sp>
-        <p:nvSpPr>
-          <p:cNvPr id="33" name="Textfeld 32">
-            <a:extLst>
-              <a:ext uri="{FF2B5EF4-FFF2-40B4-BE49-F238E27FC236}">
-                <a16:creationId xmlns:a16="http://schemas.microsoft.com/office/drawing/2014/main" id="{BCF7CB91-96EC-768C-C609-EC1B06AD002B}"/>
-              </a:ext>
-            </a:extLst>
-          </p:cNvPr>
-          <p:cNvSpPr txBox="1"/>
-          <p:nvPr/>
-        </p:nvSpPr>
-        <p:spPr>
-          <a:xfrm>
-            <a:off x="6670864" y="1927175"/>
-            <a:ext cx="1907895" cy="584775"/>
-          </a:xfrm>
-          <a:prstGeom prst="rect">
-            <a:avLst/>
-          </a:prstGeom>
-          <a:noFill/>
-        </p:spPr>
-        <p:txBody>
-          <a:bodyPr wrap="none" rtlCol="0">
-            <a:spAutoFit/>
-          </a:bodyPr>
-          <a:lstStyle/>
-          <a:p>
-            <a:r>
-              <a:rPr lang="de-DE" sz="800" dirty="0" err="1">
-                <a:solidFill>
-                  <a:schemeClr val="tx1">
-                    <a:lumMod val="50000"/>
-                    <a:lumOff val="50000"/>
-                  </a:schemeClr>
-                </a:solidFill>
-                <a:latin typeface="Roboto" panose="02000000000000000000" pitchFamily="2" charset="0"/>
-                <a:ea typeface="Roboto" panose="02000000000000000000" pitchFamily="2" charset="0"/>
-              </a:rPr>
-              <a:t>get_current_temperature</a:t>
-            </a:r>
-            <a:r>
-              <a:rPr lang="de-DE" sz="800" dirty="0">
-                <a:solidFill>
-                  <a:schemeClr val="tx1">
-                    <a:lumMod val="50000"/>
-                    <a:lumOff val="50000"/>
-                  </a:schemeClr>
-                </a:solidFill>
-                <a:latin typeface="Roboto" panose="02000000000000000000" pitchFamily="2" charset="0"/>
-                <a:ea typeface="Roboto" panose="02000000000000000000" pitchFamily="2" charset="0"/>
-              </a:rPr>
-              <a:t>()</a:t>
-            </a:r>
-          </a:p>
-          <a:p>
-            <a:r>
-              <a:rPr lang="de-DE" sz="800" dirty="0">
-                <a:solidFill>
-                  <a:schemeClr val="tx1">
-                    <a:lumMod val="50000"/>
-                    <a:lumOff val="50000"/>
-                  </a:schemeClr>
-                </a:solidFill>
-                <a:latin typeface="Roboto" panose="02000000000000000000" pitchFamily="2" charset="0"/>
-                <a:ea typeface="Roboto" panose="02000000000000000000" pitchFamily="2" charset="0"/>
-              </a:rPr>
-              <a:t>update()</a:t>
-            </a:r>
-            <a:endParaRPr lang="en-US" sz="800" dirty="0">
-              <a:solidFill>
-                <a:schemeClr val="tx1">
-                  <a:lumMod val="50000"/>
-                  <a:lumOff val="50000"/>
-                </a:schemeClr>
-              </a:solidFill>
-              <a:latin typeface="Roboto" panose="02000000000000000000" pitchFamily="2" charset="0"/>
-              <a:ea typeface="Roboto" panose="02000000000000000000" pitchFamily="2" charset="0"/>
-            </a:endParaRPr>
-          </a:p>
-          <a:p>
-            <a:r>
-              <a:rPr lang="en-US" sz="800" dirty="0" err="1">
-                <a:solidFill>
-                  <a:schemeClr val="tx1">
-                    <a:lumMod val="50000"/>
-                    <a:lumOff val="50000"/>
-                  </a:schemeClr>
-                </a:solidFill>
-                <a:latin typeface="Roboto" panose="02000000000000000000" pitchFamily="2" charset="0"/>
-                <a:ea typeface="Roboto" panose="02000000000000000000" pitchFamily="2" charset="0"/>
-              </a:rPr>
-              <a:t>Get_temperature_history</a:t>
-            </a:r>
-            <a:r>
-              <a:rPr lang="en-US" sz="800" dirty="0">
-                <a:solidFill>
-                  <a:schemeClr val="tx1">
-                    <a:lumMod val="50000"/>
-                    <a:lumOff val="50000"/>
-                  </a:schemeClr>
-                </a:solidFill>
-                <a:latin typeface="Roboto" panose="02000000000000000000" pitchFamily="2" charset="0"/>
-                <a:ea typeface="Roboto" panose="02000000000000000000" pitchFamily="2" charset="0"/>
-              </a:rPr>
-              <a:t>(int seconds)</a:t>
-            </a:r>
-          </a:p>
-          <a:p>
-            <a:r>
-              <a:rPr lang="en-US" sz="800" dirty="0" err="1">
-                <a:solidFill>
-                  <a:schemeClr val="tx1">
-                    <a:lumMod val="50000"/>
-                    <a:lumOff val="50000"/>
-                  </a:schemeClr>
-                </a:solidFill>
-                <a:latin typeface="Roboto" panose="02000000000000000000" pitchFamily="2" charset="0"/>
-                <a:ea typeface="Roboto" panose="02000000000000000000" pitchFamily="2" charset="0"/>
-              </a:rPr>
-              <a:t>Set_update_interval</a:t>
-            </a:r>
-            <a:r>
-              <a:rPr lang="en-US" sz="800" dirty="0">
-                <a:solidFill>
-                  <a:schemeClr val="tx1">
-                    <a:lumMod val="50000"/>
-                    <a:lumOff val="50000"/>
-                  </a:schemeClr>
-                </a:solidFill>
-                <a:latin typeface="Roboto" panose="02000000000000000000" pitchFamily="2" charset="0"/>
-                <a:ea typeface="Roboto" panose="02000000000000000000" pitchFamily="2" charset="0"/>
-              </a:rPr>
-              <a:t>(int seconds)</a:t>
-            </a:r>
-          </a:p>
-        </p:txBody>
-      </p:sp>
-      <p:sp>
-        <p:nvSpPr>
-          <p:cNvPr id="35" name="Rechteck 34">
-            <a:extLst>
-              <a:ext uri="{FF2B5EF4-FFF2-40B4-BE49-F238E27FC236}">
-                <a16:creationId xmlns:a16="http://schemas.microsoft.com/office/drawing/2014/main" id="{57558249-092D-38F5-F3A5-BB6F26B62E27}"/>
+                <a16:creationId xmlns:a16="http://schemas.microsoft.com/office/drawing/2014/main" id="{79C9461F-D00D-999F-98D0-69CDB729BE61}"/>
               </a:ext>
             </a:extLst>
           </p:cNvPr>
@@ -6758,884 +6258,7 @@
         </p:nvSpPr>
         <p:spPr>
           <a:xfrm>
-            <a:off x="4273923" y="4528934"/>
-            <a:ext cx="1358153" cy="766483"/>
-          </a:xfrm>
-          <a:prstGeom prst="rect">
-            <a:avLst/>
-          </a:prstGeom>
-          <a:solidFill>
-            <a:srgbClr val="7030A0"/>
-          </a:solidFill>
-          <a:ln>
-            <a:noFill/>
-          </a:ln>
-        </p:spPr>
-        <p:style>
-          <a:lnRef idx="2">
-            <a:schemeClr val="accent1">
-              <a:shade val="15000"/>
-            </a:schemeClr>
-          </a:lnRef>
-          <a:fillRef idx="1">
-            <a:schemeClr val="accent1"/>
-          </a:fillRef>
-          <a:effectRef idx="0">
-            <a:schemeClr val="accent1"/>
-          </a:effectRef>
-          <a:fontRef idx="minor">
-            <a:schemeClr val="lt1"/>
-          </a:fontRef>
-        </p:style>
-        <p:txBody>
-          <a:bodyPr rtlCol="0" anchor="ctr"/>
-          <a:lstStyle/>
-          <a:p>
-            <a:pPr algn="ctr"/>
-            <a:r>
-              <a:rPr lang="de-DE" sz="1200" dirty="0">
-                <a:latin typeface="Roboto" panose="02000000000000000000" pitchFamily="2" charset="0"/>
-                <a:ea typeface="Roboto" panose="02000000000000000000" pitchFamily="2" charset="0"/>
-              </a:rPr>
-              <a:t>Admin Frontend</a:t>
-            </a:r>
-            <a:endParaRPr lang="en-US" sz="1200" dirty="0">
-              <a:latin typeface="Roboto" panose="02000000000000000000" pitchFamily="2" charset="0"/>
-              <a:ea typeface="Roboto" panose="02000000000000000000" pitchFamily="2" charset="0"/>
-            </a:endParaRPr>
-          </a:p>
-        </p:txBody>
-      </p:sp>
-      <p:cxnSp>
-        <p:nvCxnSpPr>
-          <p:cNvPr id="37" name="Gerade Verbindung mit Pfeil 36">
-            <a:extLst>
-              <a:ext uri="{FF2B5EF4-FFF2-40B4-BE49-F238E27FC236}">
-                <a16:creationId xmlns:a16="http://schemas.microsoft.com/office/drawing/2014/main" id="{101CFBEE-75FB-5E34-9CEB-22BC6763F311}"/>
-              </a:ext>
-            </a:extLst>
-          </p:cNvPr>
-          <p:cNvCxnSpPr>
-            <a:stCxn id="7" idx="3"/>
-            <a:endCxn id="35" idx="0"/>
-          </p:cNvCxnSpPr>
-          <p:nvPr/>
-        </p:nvCxnSpPr>
-        <p:spPr>
-          <a:xfrm>
-            <a:off x="4953000" y="2628900"/>
-            <a:ext cx="0" cy="1900034"/>
-          </a:xfrm>
-          <a:prstGeom prst="straightConnector1">
-            <a:avLst/>
-          </a:prstGeom>
-          <a:ln>
-            <a:headEnd type="triangle"/>
-            <a:tailEnd type="triangle"/>
-          </a:ln>
-        </p:spPr>
-        <p:style>
-          <a:lnRef idx="2">
-            <a:schemeClr val="accent1"/>
-          </a:lnRef>
-          <a:fillRef idx="0">
-            <a:schemeClr val="accent1"/>
-          </a:fillRef>
-          <a:effectRef idx="1">
-            <a:schemeClr val="accent1"/>
-          </a:effectRef>
-          <a:fontRef idx="minor">
-            <a:schemeClr val="tx1"/>
-          </a:fontRef>
-        </p:style>
-      </p:cxnSp>
-      <p:sp>
-        <p:nvSpPr>
-          <p:cNvPr id="40" name="Textfeld 39">
-            <a:extLst>
-              <a:ext uri="{FF2B5EF4-FFF2-40B4-BE49-F238E27FC236}">
-                <a16:creationId xmlns:a16="http://schemas.microsoft.com/office/drawing/2014/main" id="{47844B84-8851-0C83-BB1A-D3B1CB919D4D}"/>
-              </a:ext>
-            </a:extLst>
-          </p:cNvPr>
-          <p:cNvSpPr txBox="1"/>
-          <p:nvPr/>
-        </p:nvSpPr>
-        <p:spPr>
-          <a:xfrm>
-            <a:off x="4952999" y="3330232"/>
-            <a:ext cx="1167307" cy="1077218"/>
-          </a:xfrm>
-          <a:prstGeom prst="rect">
-            <a:avLst/>
-          </a:prstGeom>
-          <a:noFill/>
-        </p:spPr>
-        <p:txBody>
-          <a:bodyPr wrap="none" rtlCol="0">
-            <a:spAutoFit/>
-          </a:bodyPr>
-          <a:lstStyle/>
-          <a:p>
-            <a:r>
-              <a:rPr lang="de-DE" sz="800" dirty="0" err="1">
-                <a:solidFill>
-                  <a:schemeClr val="tx1">
-                    <a:lumMod val="50000"/>
-                    <a:lumOff val="50000"/>
-                  </a:schemeClr>
-                </a:solidFill>
-                <a:latin typeface="Roboto" panose="02000000000000000000" pitchFamily="2" charset="0"/>
-                <a:ea typeface="Roboto" panose="02000000000000000000" pitchFamily="2" charset="0"/>
-              </a:rPr>
-              <a:t>add_new_user</a:t>
-            </a:r>
-            <a:r>
-              <a:rPr lang="de-DE" sz="800" dirty="0">
-                <a:solidFill>
-                  <a:schemeClr val="tx1">
-                    <a:lumMod val="50000"/>
-                    <a:lumOff val="50000"/>
-                  </a:schemeClr>
-                </a:solidFill>
-                <a:latin typeface="Roboto" panose="02000000000000000000" pitchFamily="2" charset="0"/>
-                <a:ea typeface="Roboto" panose="02000000000000000000" pitchFamily="2" charset="0"/>
-              </a:rPr>
-              <a:t>(</a:t>
-            </a:r>
-            <a:r>
-              <a:rPr lang="de-DE" sz="800" dirty="0" err="1">
-                <a:solidFill>
-                  <a:schemeClr val="tx1">
-                    <a:lumMod val="50000"/>
-                    <a:lumOff val="50000"/>
-                  </a:schemeClr>
-                </a:solidFill>
-                <a:latin typeface="Roboto" panose="02000000000000000000" pitchFamily="2" charset="0"/>
-                <a:ea typeface="Roboto" panose="02000000000000000000" pitchFamily="2" charset="0"/>
-              </a:rPr>
-              <a:t>id</a:t>
-            </a:r>
-            <a:r>
-              <a:rPr lang="de-DE" sz="800" dirty="0">
-                <a:solidFill>
-                  <a:schemeClr val="tx1">
-                    <a:lumMod val="50000"/>
-                    <a:lumOff val="50000"/>
-                  </a:schemeClr>
-                </a:solidFill>
-                <a:latin typeface="Roboto" panose="02000000000000000000" pitchFamily="2" charset="0"/>
-                <a:ea typeface="Roboto" panose="02000000000000000000" pitchFamily="2" charset="0"/>
-              </a:rPr>
-              <a:t>)</a:t>
-            </a:r>
-          </a:p>
-          <a:p>
-            <a:r>
-              <a:rPr lang="de-DE" sz="800" dirty="0" err="1">
-                <a:solidFill>
-                  <a:schemeClr val="tx1">
-                    <a:lumMod val="50000"/>
-                    <a:lumOff val="50000"/>
-                  </a:schemeClr>
-                </a:solidFill>
-                <a:latin typeface="Roboto" panose="02000000000000000000" pitchFamily="2" charset="0"/>
-                <a:ea typeface="Roboto" panose="02000000000000000000" pitchFamily="2" charset="0"/>
-              </a:rPr>
-              <a:t>add_new_source</a:t>
-            </a:r>
-            <a:r>
-              <a:rPr lang="de-DE" sz="800" dirty="0">
-                <a:solidFill>
-                  <a:schemeClr val="tx1">
-                    <a:lumMod val="50000"/>
-                    <a:lumOff val="50000"/>
-                  </a:schemeClr>
-                </a:solidFill>
-                <a:latin typeface="Roboto" panose="02000000000000000000" pitchFamily="2" charset="0"/>
-                <a:ea typeface="Roboto" panose="02000000000000000000" pitchFamily="2" charset="0"/>
-              </a:rPr>
-              <a:t>(</a:t>
-            </a:r>
-            <a:r>
-              <a:rPr lang="de-DE" sz="800" dirty="0" err="1">
-                <a:solidFill>
-                  <a:schemeClr val="tx1">
-                    <a:lumMod val="50000"/>
-                    <a:lumOff val="50000"/>
-                  </a:schemeClr>
-                </a:solidFill>
-                <a:latin typeface="Roboto" panose="02000000000000000000" pitchFamily="2" charset="0"/>
-                <a:ea typeface="Roboto" panose="02000000000000000000" pitchFamily="2" charset="0"/>
-              </a:rPr>
-              <a:t>id</a:t>
-            </a:r>
-            <a:r>
-              <a:rPr lang="de-DE" sz="800" dirty="0">
-                <a:solidFill>
-                  <a:schemeClr val="tx1">
-                    <a:lumMod val="50000"/>
-                    <a:lumOff val="50000"/>
-                  </a:schemeClr>
-                </a:solidFill>
-                <a:latin typeface="Roboto" panose="02000000000000000000" pitchFamily="2" charset="0"/>
-                <a:ea typeface="Roboto" panose="02000000000000000000" pitchFamily="2" charset="0"/>
-              </a:rPr>
-              <a:t>)</a:t>
-            </a:r>
-          </a:p>
-          <a:p>
-            <a:r>
-              <a:rPr lang="de-DE" sz="800" dirty="0" err="1">
-                <a:solidFill>
-                  <a:schemeClr val="tx1">
-                    <a:lumMod val="50000"/>
-                    <a:lumOff val="50000"/>
-                  </a:schemeClr>
-                </a:solidFill>
-                <a:latin typeface="Roboto" panose="02000000000000000000" pitchFamily="2" charset="0"/>
-                <a:ea typeface="Roboto" panose="02000000000000000000" pitchFamily="2" charset="0"/>
-              </a:rPr>
-              <a:t>add_link</a:t>
-            </a:r>
-            <a:r>
-              <a:rPr lang="de-DE" sz="800" dirty="0">
-                <a:solidFill>
-                  <a:schemeClr val="tx1">
-                    <a:lumMod val="50000"/>
-                    <a:lumOff val="50000"/>
-                  </a:schemeClr>
-                </a:solidFill>
-                <a:latin typeface="Roboto" panose="02000000000000000000" pitchFamily="2" charset="0"/>
-                <a:ea typeface="Roboto" panose="02000000000000000000" pitchFamily="2" charset="0"/>
-              </a:rPr>
-              <a:t>(</a:t>
-            </a:r>
-            <a:r>
-              <a:rPr lang="de-DE" sz="800" dirty="0" err="1">
-                <a:solidFill>
-                  <a:schemeClr val="tx1">
-                    <a:lumMod val="50000"/>
-                    <a:lumOff val="50000"/>
-                  </a:schemeClr>
-                </a:solidFill>
-                <a:latin typeface="Roboto" panose="02000000000000000000" pitchFamily="2" charset="0"/>
-                <a:ea typeface="Roboto" panose="02000000000000000000" pitchFamily="2" charset="0"/>
-              </a:rPr>
-              <a:t>id</a:t>
-            </a:r>
-            <a:r>
-              <a:rPr lang="de-DE" sz="800" dirty="0">
-                <a:solidFill>
-                  <a:schemeClr val="tx1">
-                    <a:lumMod val="50000"/>
-                    <a:lumOff val="50000"/>
-                  </a:schemeClr>
-                </a:solidFill>
-                <a:latin typeface="Roboto" panose="02000000000000000000" pitchFamily="2" charset="0"/>
-                <a:ea typeface="Roboto" panose="02000000000000000000" pitchFamily="2" charset="0"/>
-              </a:rPr>
-              <a:t>, </a:t>
-            </a:r>
-            <a:r>
-              <a:rPr lang="de-DE" sz="800" dirty="0" err="1">
-                <a:solidFill>
-                  <a:schemeClr val="tx1">
-                    <a:lumMod val="50000"/>
-                    <a:lumOff val="50000"/>
-                  </a:schemeClr>
-                </a:solidFill>
-                <a:latin typeface="Roboto" panose="02000000000000000000" pitchFamily="2" charset="0"/>
-                <a:ea typeface="Roboto" panose="02000000000000000000" pitchFamily="2" charset="0"/>
-              </a:rPr>
-              <a:t>id</a:t>
-            </a:r>
-            <a:r>
-              <a:rPr lang="de-DE" sz="800" dirty="0">
-                <a:solidFill>
-                  <a:schemeClr val="tx1">
-                    <a:lumMod val="50000"/>
-                    <a:lumOff val="50000"/>
-                  </a:schemeClr>
-                </a:solidFill>
-                <a:latin typeface="Roboto" panose="02000000000000000000" pitchFamily="2" charset="0"/>
-                <a:ea typeface="Roboto" panose="02000000000000000000" pitchFamily="2" charset="0"/>
-              </a:rPr>
-              <a:t>)</a:t>
-            </a:r>
-          </a:p>
-          <a:p>
-            <a:r>
-              <a:rPr lang="de-DE" sz="800" dirty="0" err="1">
-                <a:solidFill>
-                  <a:schemeClr val="tx1">
-                    <a:lumMod val="50000"/>
-                    <a:lumOff val="50000"/>
-                  </a:schemeClr>
-                </a:solidFill>
-                <a:latin typeface="Roboto" panose="02000000000000000000" pitchFamily="2" charset="0"/>
-                <a:ea typeface="Roboto" panose="02000000000000000000" pitchFamily="2" charset="0"/>
-              </a:rPr>
-              <a:t>remove_user</a:t>
-            </a:r>
-            <a:r>
-              <a:rPr lang="de-DE" sz="800" dirty="0">
-                <a:solidFill>
-                  <a:schemeClr val="tx1">
-                    <a:lumMod val="50000"/>
-                    <a:lumOff val="50000"/>
-                  </a:schemeClr>
-                </a:solidFill>
-                <a:latin typeface="Roboto" panose="02000000000000000000" pitchFamily="2" charset="0"/>
-                <a:ea typeface="Roboto" panose="02000000000000000000" pitchFamily="2" charset="0"/>
-              </a:rPr>
-              <a:t>(</a:t>
-            </a:r>
-            <a:r>
-              <a:rPr lang="de-DE" sz="800" dirty="0" err="1">
-                <a:solidFill>
-                  <a:schemeClr val="tx1">
-                    <a:lumMod val="50000"/>
-                    <a:lumOff val="50000"/>
-                  </a:schemeClr>
-                </a:solidFill>
-                <a:latin typeface="Roboto" panose="02000000000000000000" pitchFamily="2" charset="0"/>
-                <a:ea typeface="Roboto" panose="02000000000000000000" pitchFamily="2" charset="0"/>
-              </a:rPr>
-              <a:t>id</a:t>
-            </a:r>
-            <a:r>
-              <a:rPr lang="de-DE" sz="800" dirty="0">
-                <a:solidFill>
-                  <a:schemeClr val="tx1">
-                    <a:lumMod val="50000"/>
-                    <a:lumOff val="50000"/>
-                  </a:schemeClr>
-                </a:solidFill>
-                <a:latin typeface="Roboto" panose="02000000000000000000" pitchFamily="2" charset="0"/>
-                <a:ea typeface="Roboto" panose="02000000000000000000" pitchFamily="2" charset="0"/>
-              </a:rPr>
-              <a:t>)</a:t>
-            </a:r>
-          </a:p>
-          <a:p>
-            <a:r>
-              <a:rPr lang="de-DE" sz="800" dirty="0" err="1">
-                <a:solidFill>
-                  <a:schemeClr val="tx1">
-                    <a:lumMod val="50000"/>
-                    <a:lumOff val="50000"/>
-                  </a:schemeClr>
-                </a:solidFill>
-                <a:latin typeface="Roboto" panose="02000000000000000000" pitchFamily="2" charset="0"/>
-                <a:ea typeface="Roboto" panose="02000000000000000000" pitchFamily="2" charset="0"/>
-              </a:rPr>
-              <a:t>remove_source</a:t>
-            </a:r>
-            <a:r>
-              <a:rPr lang="de-DE" sz="800" dirty="0">
-                <a:solidFill>
-                  <a:schemeClr val="tx1">
-                    <a:lumMod val="50000"/>
-                    <a:lumOff val="50000"/>
-                  </a:schemeClr>
-                </a:solidFill>
-                <a:latin typeface="Roboto" panose="02000000000000000000" pitchFamily="2" charset="0"/>
-                <a:ea typeface="Roboto" panose="02000000000000000000" pitchFamily="2" charset="0"/>
-              </a:rPr>
-              <a:t>(</a:t>
-            </a:r>
-            <a:r>
-              <a:rPr lang="de-DE" sz="800" dirty="0" err="1">
-                <a:solidFill>
-                  <a:schemeClr val="tx1">
-                    <a:lumMod val="50000"/>
-                    <a:lumOff val="50000"/>
-                  </a:schemeClr>
-                </a:solidFill>
-                <a:latin typeface="Roboto" panose="02000000000000000000" pitchFamily="2" charset="0"/>
-                <a:ea typeface="Roboto" panose="02000000000000000000" pitchFamily="2" charset="0"/>
-              </a:rPr>
-              <a:t>id</a:t>
-            </a:r>
-            <a:r>
-              <a:rPr lang="de-DE" sz="800" dirty="0">
-                <a:solidFill>
-                  <a:schemeClr val="tx1">
-                    <a:lumMod val="50000"/>
-                    <a:lumOff val="50000"/>
-                  </a:schemeClr>
-                </a:solidFill>
-                <a:latin typeface="Roboto" panose="02000000000000000000" pitchFamily="2" charset="0"/>
-                <a:ea typeface="Roboto" panose="02000000000000000000" pitchFamily="2" charset="0"/>
-              </a:rPr>
-              <a:t>)</a:t>
-            </a:r>
-          </a:p>
-          <a:p>
-            <a:r>
-              <a:rPr lang="de-DE" sz="800" dirty="0" err="1">
-                <a:solidFill>
-                  <a:schemeClr val="tx1">
-                    <a:lumMod val="50000"/>
-                    <a:lumOff val="50000"/>
-                  </a:schemeClr>
-                </a:solidFill>
-                <a:latin typeface="Roboto" panose="02000000000000000000" pitchFamily="2" charset="0"/>
-                <a:ea typeface="Roboto" panose="02000000000000000000" pitchFamily="2" charset="0"/>
-              </a:rPr>
-              <a:t>remove_link</a:t>
-            </a:r>
-            <a:r>
-              <a:rPr lang="de-DE" sz="800" dirty="0">
-                <a:solidFill>
-                  <a:schemeClr val="tx1">
-                    <a:lumMod val="50000"/>
-                    <a:lumOff val="50000"/>
-                  </a:schemeClr>
-                </a:solidFill>
-                <a:latin typeface="Roboto" panose="02000000000000000000" pitchFamily="2" charset="0"/>
-                <a:ea typeface="Roboto" panose="02000000000000000000" pitchFamily="2" charset="0"/>
-              </a:rPr>
-              <a:t>(</a:t>
-            </a:r>
-            <a:r>
-              <a:rPr lang="de-DE" sz="800" dirty="0" err="1">
-                <a:solidFill>
-                  <a:schemeClr val="tx1">
-                    <a:lumMod val="50000"/>
-                    <a:lumOff val="50000"/>
-                  </a:schemeClr>
-                </a:solidFill>
-                <a:latin typeface="Roboto" panose="02000000000000000000" pitchFamily="2" charset="0"/>
-                <a:ea typeface="Roboto" panose="02000000000000000000" pitchFamily="2" charset="0"/>
-              </a:rPr>
-              <a:t>id</a:t>
-            </a:r>
-            <a:r>
-              <a:rPr lang="de-DE" sz="800" dirty="0">
-                <a:solidFill>
-                  <a:schemeClr val="tx1">
-                    <a:lumMod val="50000"/>
-                    <a:lumOff val="50000"/>
-                  </a:schemeClr>
-                </a:solidFill>
-                <a:latin typeface="Roboto" panose="02000000000000000000" pitchFamily="2" charset="0"/>
-                <a:ea typeface="Roboto" panose="02000000000000000000" pitchFamily="2" charset="0"/>
-              </a:rPr>
-              <a:t>, </a:t>
-            </a:r>
-            <a:r>
-              <a:rPr lang="de-DE" sz="800" dirty="0" err="1">
-                <a:solidFill>
-                  <a:schemeClr val="tx1">
-                    <a:lumMod val="50000"/>
-                    <a:lumOff val="50000"/>
-                  </a:schemeClr>
-                </a:solidFill>
-                <a:latin typeface="Roboto" panose="02000000000000000000" pitchFamily="2" charset="0"/>
-                <a:ea typeface="Roboto" panose="02000000000000000000" pitchFamily="2" charset="0"/>
-              </a:rPr>
-              <a:t>id</a:t>
-            </a:r>
-            <a:r>
-              <a:rPr lang="de-DE" sz="800" dirty="0">
-                <a:solidFill>
-                  <a:schemeClr val="tx1">
-                    <a:lumMod val="50000"/>
-                    <a:lumOff val="50000"/>
-                  </a:schemeClr>
-                </a:solidFill>
-                <a:latin typeface="Roboto" panose="02000000000000000000" pitchFamily="2" charset="0"/>
-                <a:ea typeface="Roboto" panose="02000000000000000000" pitchFamily="2" charset="0"/>
-              </a:rPr>
-              <a:t>)</a:t>
-            </a:r>
-            <a:endParaRPr lang="en-US" sz="800" dirty="0">
-              <a:solidFill>
-                <a:schemeClr val="tx1">
-                  <a:lumMod val="50000"/>
-                  <a:lumOff val="50000"/>
-                </a:schemeClr>
-              </a:solidFill>
-              <a:latin typeface="Roboto" panose="02000000000000000000" pitchFamily="2" charset="0"/>
-              <a:ea typeface="Roboto" panose="02000000000000000000" pitchFamily="2" charset="0"/>
-            </a:endParaRPr>
-          </a:p>
-          <a:p>
-            <a:r>
-              <a:rPr lang="en-US" sz="800" dirty="0">
-                <a:solidFill>
-                  <a:schemeClr val="tx1">
-                    <a:lumMod val="50000"/>
-                    <a:lumOff val="50000"/>
-                  </a:schemeClr>
-                </a:solidFill>
-                <a:latin typeface="Roboto" panose="02000000000000000000" pitchFamily="2" charset="0"/>
-                <a:ea typeface="Roboto" panose="02000000000000000000" pitchFamily="2" charset="0"/>
-              </a:rPr>
-              <a:t>backup()</a:t>
-            </a:r>
-          </a:p>
-          <a:p>
-            <a:r>
-              <a:rPr lang="en-US" sz="800" dirty="0" err="1">
-                <a:solidFill>
-                  <a:schemeClr val="tx1">
-                    <a:lumMod val="50000"/>
-                    <a:lumOff val="50000"/>
-                  </a:schemeClr>
-                </a:solidFill>
-                <a:latin typeface="Roboto" panose="02000000000000000000" pitchFamily="2" charset="0"/>
-                <a:ea typeface="Roboto" panose="02000000000000000000" pitchFamily="2" charset="0"/>
-              </a:rPr>
-              <a:t>load_backup</a:t>
-            </a:r>
-            <a:r>
-              <a:rPr lang="en-US" sz="800" dirty="0">
-                <a:solidFill>
-                  <a:schemeClr val="tx1">
-                    <a:lumMod val="50000"/>
-                    <a:lumOff val="50000"/>
-                  </a:schemeClr>
-                </a:solidFill>
-                <a:latin typeface="Roboto" panose="02000000000000000000" pitchFamily="2" charset="0"/>
-                <a:ea typeface="Roboto" panose="02000000000000000000" pitchFamily="2" charset="0"/>
-              </a:rPr>
-              <a:t>(backup)</a:t>
-            </a:r>
-          </a:p>
-        </p:txBody>
-      </p:sp>
-      <p:sp>
-        <p:nvSpPr>
-          <p:cNvPr id="42" name="Rechteck 41">
-            <a:extLst>
-              <a:ext uri="{FF2B5EF4-FFF2-40B4-BE49-F238E27FC236}">
-                <a16:creationId xmlns:a16="http://schemas.microsoft.com/office/drawing/2014/main" id="{3F75E0FF-8931-B5F6-2351-3B8AE548FABB}"/>
-              </a:ext>
-            </a:extLst>
-          </p:cNvPr>
-          <p:cNvSpPr/>
-          <p:nvPr/>
-        </p:nvSpPr>
-        <p:spPr>
-          <a:xfrm>
-            <a:off x="8137711" y="6545066"/>
-            <a:ext cx="1358153" cy="228600"/>
-          </a:xfrm>
-          <a:prstGeom prst="rect">
-            <a:avLst/>
-          </a:prstGeom>
-          <a:solidFill>
-            <a:srgbClr val="7030A0"/>
-          </a:solidFill>
-          <a:ln>
-            <a:noFill/>
-          </a:ln>
-        </p:spPr>
-        <p:style>
-          <a:lnRef idx="2">
-            <a:schemeClr val="accent1">
-              <a:shade val="15000"/>
-            </a:schemeClr>
-          </a:lnRef>
-          <a:fillRef idx="1">
-            <a:schemeClr val="accent1"/>
-          </a:fillRef>
-          <a:effectRef idx="0">
-            <a:schemeClr val="accent1"/>
-          </a:effectRef>
-          <a:fontRef idx="minor">
-            <a:schemeClr val="lt1"/>
-          </a:fontRef>
-        </p:style>
-        <p:txBody>
-          <a:bodyPr rtlCol="0" anchor="ctr"/>
-          <a:lstStyle/>
-          <a:p>
-            <a:pPr algn="ctr"/>
-            <a:r>
-              <a:rPr lang="de-DE" sz="1000" dirty="0">
-                <a:latin typeface="Roboto" panose="02000000000000000000" pitchFamily="2" charset="0"/>
-                <a:ea typeface="Roboto" panose="02000000000000000000" pitchFamily="2" charset="0"/>
-              </a:rPr>
-              <a:t>Web frontend</a:t>
-            </a:r>
-            <a:endParaRPr lang="en-US" sz="1000" dirty="0">
-              <a:latin typeface="Roboto" panose="02000000000000000000" pitchFamily="2" charset="0"/>
-              <a:ea typeface="Roboto" panose="02000000000000000000" pitchFamily="2" charset="0"/>
-            </a:endParaRPr>
-          </a:p>
-        </p:txBody>
-      </p:sp>
-      <p:pic>
-        <p:nvPicPr>
-          <p:cNvPr id="44" name="Grafik 43" descr="Zusammendrücken Vergrößern mit einfarbiger Füllung">
-            <a:extLst>
-              <a:ext uri="{FF2B5EF4-FFF2-40B4-BE49-F238E27FC236}">
-                <a16:creationId xmlns:a16="http://schemas.microsoft.com/office/drawing/2014/main" id="{07C35C1A-CADE-9A88-D626-12CC34BC6914}"/>
-              </a:ext>
-            </a:extLst>
-          </p:cNvPr>
-          <p:cNvPicPr>
-            <a:picLocks noChangeAspect="1"/>
-          </p:cNvPicPr>
-          <p:nvPr/>
-        </p:nvPicPr>
-        <p:blipFill>
-          <a:blip r:embed="rId2">
-            <a:extLst>
-              <a:ext uri="{96DAC541-7B7A-43D3-8B79-37D633B846F1}">
-                <asvg:svgBlip xmlns:asvg="http://schemas.microsoft.com/office/drawing/2016/SVG/main" r:embed="rId3"/>
-              </a:ext>
-            </a:extLst>
-          </a:blip>
-          <a:stretch>
-            <a:fillRect/>
-          </a:stretch>
-        </p:blipFill>
-        <p:spPr>
-          <a:xfrm>
-            <a:off x="5228665" y="5033682"/>
-            <a:ext cx="593912" cy="593912"/>
-          </a:xfrm>
-          <a:prstGeom prst="rect">
-            <a:avLst/>
-          </a:prstGeom>
-        </p:spPr>
-      </p:pic>
-      <p:pic>
-        <p:nvPicPr>
-          <p:cNvPr id="45" name="Grafik 44" descr="Zusammendrücken Vergrößern mit einfarbiger Füllung">
-            <a:extLst>
-              <a:ext uri="{FF2B5EF4-FFF2-40B4-BE49-F238E27FC236}">
-                <a16:creationId xmlns:a16="http://schemas.microsoft.com/office/drawing/2014/main" id="{1C51EB5F-031D-532B-6FF0-63D8DFF74A25}"/>
-              </a:ext>
-            </a:extLst>
-          </p:cNvPr>
-          <p:cNvPicPr>
-            <a:picLocks noChangeAspect="1"/>
-          </p:cNvPicPr>
-          <p:nvPr/>
-        </p:nvPicPr>
-        <p:blipFill>
-          <a:blip r:embed="rId2">
-            <a:extLst>
-              <a:ext uri="{96DAC541-7B7A-43D3-8B79-37D633B846F1}">
-                <asvg:svgBlip xmlns:asvg="http://schemas.microsoft.com/office/drawing/2016/SVG/main" r:embed="rId3"/>
-              </a:ext>
-            </a:extLst>
-          </a:blip>
-          <a:stretch>
-            <a:fillRect/>
-          </a:stretch>
-        </p:blipFill>
-        <p:spPr>
-          <a:xfrm>
-            <a:off x="7937124" y="4528934"/>
-            <a:ext cx="593912" cy="593912"/>
-          </a:xfrm>
-          <a:prstGeom prst="rect">
-            <a:avLst/>
-          </a:prstGeom>
-        </p:spPr>
-      </p:pic>
-      <p:pic>
-        <p:nvPicPr>
-          <p:cNvPr id="46" name="Grafik 45" descr="Zusammendrücken Vergrößern mit einfarbiger Füllung">
-            <a:extLst>
-              <a:ext uri="{FF2B5EF4-FFF2-40B4-BE49-F238E27FC236}">
-                <a16:creationId xmlns:a16="http://schemas.microsoft.com/office/drawing/2014/main" id="{24D22725-B990-2A7B-5F48-6E15858F064A}"/>
-              </a:ext>
-            </a:extLst>
-          </p:cNvPr>
-          <p:cNvPicPr>
-            <a:picLocks noChangeAspect="1"/>
-          </p:cNvPicPr>
-          <p:nvPr/>
-        </p:nvPicPr>
-        <p:blipFill>
-          <a:blip r:embed="rId2">
-            <a:extLst>
-              <a:ext uri="{96DAC541-7B7A-43D3-8B79-37D633B846F1}">
-                <asvg:svgBlip xmlns:asvg="http://schemas.microsoft.com/office/drawing/2016/SVG/main" r:embed="rId3"/>
-              </a:ext>
-            </a:extLst>
-          </a:blip>
-          <a:stretch>
-            <a:fillRect/>
-          </a:stretch>
-        </p:blipFill>
-        <p:spPr>
-          <a:xfrm>
-            <a:off x="8631051" y="3429000"/>
-            <a:ext cx="593912" cy="593912"/>
-          </a:xfrm>
-          <a:prstGeom prst="rect">
-            <a:avLst/>
-          </a:prstGeom>
-        </p:spPr>
-      </p:pic>
-      <p:sp>
-        <p:nvSpPr>
-          <p:cNvPr id="3" name="Textfeld 2">
-            <a:extLst>
-              <a:ext uri="{FF2B5EF4-FFF2-40B4-BE49-F238E27FC236}">
-                <a16:creationId xmlns:a16="http://schemas.microsoft.com/office/drawing/2014/main" id="{4EE99CF0-6E10-06D7-5B16-1C8318F0E202}"/>
-              </a:ext>
-            </a:extLst>
-          </p:cNvPr>
-          <p:cNvSpPr txBox="1"/>
-          <p:nvPr/>
-        </p:nvSpPr>
-        <p:spPr>
-          <a:xfrm>
-            <a:off x="6344098" y="1427442"/>
-            <a:ext cx="3167062" cy="523220"/>
-          </a:xfrm>
-          <a:prstGeom prst="rect">
-            <a:avLst/>
-          </a:prstGeom>
-          <a:noFill/>
-        </p:spPr>
-        <p:txBody>
-          <a:bodyPr wrap="square" rtlCol="0">
-            <a:spAutoFit/>
-          </a:bodyPr>
-          <a:lstStyle/>
-          <a:p>
-            <a:r>
-              <a:rPr lang="de-DE" sz="1400" dirty="0"/>
-              <a:t>Security </a:t>
-            </a:r>
-            <a:r>
-              <a:rPr lang="de-DE" sz="1400" dirty="0" err="1"/>
-              <a:t>by</a:t>
-            </a:r>
-            <a:r>
-              <a:rPr lang="de-DE" sz="1400" dirty="0"/>
-              <a:t> </a:t>
-            </a:r>
-            <a:r>
-              <a:rPr lang="de-DE" sz="1400" dirty="0" err="1"/>
-              <a:t>auth_key</a:t>
-            </a:r>
-            <a:r>
-              <a:rPr lang="de-DE" sz="1400" dirty="0"/>
-              <a:t> + mac-</a:t>
-            </a:r>
-            <a:r>
-              <a:rPr lang="de-DE" sz="1400" dirty="0" err="1"/>
-              <a:t>address</a:t>
-            </a:r>
-            <a:r>
-              <a:rPr lang="de-DE" sz="1400" dirty="0"/>
-              <a:t> </a:t>
-            </a:r>
-            <a:r>
-              <a:rPr lang="de-DE" sz="1400" dirty="0" err="1"/>
-              <a:t>white</a:t>
-            </a:r>
-            <a:r>
-              <a:rPr lang="de-DE" sz="1400" dirty="0"/>
-              <a:t>-list + link-</a:t>
-            </a:r>
-            <a:r>
-              <a:rPr lang="de-DE" sz="1400" dirty="0" err="1"/>
-              <a:t>table</a:t>
-            </a:r>
-            <a:endParaRPr lang="en-US" sz="1400" dirty="0"/>
-          </a:p>
-        </p:txBody>
-      </p:sp>
-      <p:sp>
-        <p:nvSpPr>
-          <p:cNvPr id="13" name="Textfeld 12">
-            <a:extLst>
-              <a:ext uri="{FF2B5EF4-FFF2-40B4-BE49-F238E27FC236}">
-                <a16:creationId xmlns:a16="http://schemas.microsoft.com/office/drawing/2014/main" id="{5F2EAFA6-8363-1BC2-2607-8791588EB1B8}"/>
-              </a:ext>
-            </a:extLst>
-          </p:cNvPr>
-          <p:cNvSpPr txBox="1"/>
-          <p:nvPr/>
-        </p:nvSpPr>
-        <p:spPr>
-          <a:xfrm>
-            <a:off x="1011609" y="1500096"/>
-            <a:ext cx="4626523" cy="307777"/>
-          </a:xfrm>
-          <a:prstGeom prst="rect">
-            <a:avLst/>
-          </a:prstGeom>
-          <a:noFill/>
-        </p:spPr>
-        <p:txBody>
-          <a:bodyPr wrap="none" rtlCol="0">
-            <a:spAutoFit/>
-          </a:bodyPr>
-          <a:lstStyle/>
-          <a:p>
-            <a:r>
-              <a:rPr lang="de-DE" sz="1400" dirty="0"/>
-              <a:t>Security </a:t>
-            </a:r>
-            <a:r>
-              <a:rPr lang="de-DE" sz="1400" dirty="0" err="1"/>
-              <a:t>by</a:t>
-            </a:r>
-            <a:r>
-              <a:rPr lang="de-DE" sz="1400" dirty="0"/>
-              <a:t> </a:t>
-            </a:r>
-            <a:r>
-              <a:rPr lang="de-DE" sz="1400" dirty="0" err="1"/>
-              <a:t>auth_key</a:t>
-            </a:r>
-            <a:r>
-              <a:rPr lang="de-DE" sz="1400" dirty="0"/>
-              <a:t> + mac-</a:t>
-            </a:r>
-            <a:r>
-              <a:rPr lang="de-DE" sz="1400" dirty="0" err="1"/>
-              <a:t>address</a:t>
-            </a:r>
-            <a:r>
-              <a:rPr lang="de-DE" sz="1400" dirty="0"/>
-              <a:t> </a:t>
-            </a:r>
-            <a:r>
-              <a:rPr lang="de-DE" sz="1400" dirty="0" err="1"/>
-              <a:t>white</a:t>
-            </a:r>
-            <a:r>
-              <a:rPr lang="de-DE" sz="1400" dirty="0"/>
-              <a:t>-list + link-</a:t>
-            </a:r>
-            <a:r>
-              <a:rPr lang="de-DE" sz="1400" dirty="0" err="1"/>
-              <a:t>table</a:t>
-            </a:r>
-            <a:endParaRPr lang="en-US" sz="1400" dirty="0"/>
-          </a:p>
-        </p:txBody>
-      </p:sp>
-      <p:sp>
-        <p:nvSpPr>
-          <p:cNvPr id="16" name="Rechteck 15">
-            <a:extLst>
-              <a:ext uri="{FF2B5EF4-FFF2-40B4-BE49-F238E27FC236}">
-                <a16:creationId xmlns:a16="http://schemas.microsoft.com/office/drawing/2014/main" id="{7018E9F0-A788-C0E0-9CB3-ECC4DF57381C}"/>
-              </a:ext>
-            </a:extLst>
-          </p:cNvPr>
-          <p:cNvSpPr/>
-          <p:nvPr/>
-        </p:nvSpPr>
-        <p:spPr>
-          <a:xfrm>
-            <a:off x="8057656" y="4217894"/>
+            <a:off x="2313412" y="3490786"/>
             <a:ext cx="1167307" cy="228600"/>
           </a:xfrm>
           <a:prstGeom prst="rect">
@@ -7670,19 +6293,6 @@
           <a:p>
             <a:pPr algn="ctr"/>
             <a:r>
-              <a:rPr lang="de-DE" sz="700" dirty="0">
-                <a:solidFill>
-                  <a:schemeClr val="tx1">
-                    <a:lumMod val="75000"/>
-                    <a:lumOff val="25000"/>
-                  </a:schemeClr>
-                </a:solidFill>
-                <a:latin typeface="Roboto" panose="02000000000000000000" pitchFamily="2" charset="0"/>
-                <a:ea typeface="Roboto" panose="02000000000000000000" pitchFamily="2" charset="0"/>
-              </a:rPr>
-              <a:t>private </a:t>
-            </a:r>
-            <a:r>
               <a:rPr lang="de-DE" sz="700" dirty="0" err="1">
                 <a:solidFill>
                   <a:schemeClr val="tx1">
@@ -7693,7 +6303,7 @@
                 <a:latin typeface="Roboto" panose="02000000000000000000" pitchFamily="2" charset="0"/>
                 <a:ea typeface="Roboto" panose="02000000000000000000" pitchFamily="2" charset="0"/>
               </a:rPr>
-              <a:t>auth_key</a:t>
+              <a:t>anon-key</a:t>
             </a:r>
             <a:endParaRPr lang="en-US" sz="700" dirty="0">
               <a:solidFill>
@@ -7710,10 +6320,10 @@
       </p:sp>
       <p:sp>
         <p:nvSpPr>
-          <p:cNvPr id="18" name="Rechteck 17">
+          <p:cNvPr id="11" name="Rechteck 10">
             <a:extLst>
               <a:ext uri="{FF2B5EF4-FFF2-40B4-BE49-F238E27FC236}">
-                <a16:creationId xmlns:a16="http://schemas.microsoft.com/office/drawing/2014/main" id="{8C9BB353-0299-857B-A670-E3A873296693}"/>
+                <a16:creationId xmlns:a16="http://schemas.microsoft.com/office/drawing/2014/main" id="{544CE029-680D-0CE7-6B37-94249F79F571}"/>
               </a:ext>
             </a:extLst>
           </p:cNvPr>
@@ -7722,7 +6332,7 @@
         </p:nvSpPr>
         <p:spPr>
           <a:xfrm>
-            <a:off x="8710959" y="3036795"/>
+            <a:off x="2313412" y="3200400"/>
             <a:ext cx="1167307" cy="228600"/>
           </a:xfrm>
           <a:prstGeom prst="rect">
@@ -7767,7 +6377,7 @@
                 <a:latin typeface="Roboto" panose="02000000000000000000" pitchFamily="2" charset="0"/>
                 <a:ea typeface="Roboto" panose="02000000000000000000" pitchFamily="2" charset="0"/>
               </a:rPr>
-              <a:t>private </a:t>
+              <a:t>X-</a:t>
             </a:r>
             <a:r>
               <a:rPr lang="de-DE" sz="700" dirty="0" err="1">
@@ -7780,7 +6390,33 @@
                 <a:latin typeface="Roboto" panose="02000000000000000000" pitchFamily="2" charset="0"/>
                 <a:ea typeface="Roboto" panose="02000000000000000000" pitchFamily="2" charset="0"/>
               </a:rPr>
-              <a:t>auth_key</a:t>
+              <a:t>api</a:t>
+            </a:r>
+            <a:r>
+              <a:rPr lang="de-DE" sz="700" dirty="0">
+                <a:solidFill>
+                  <a:schemeClr val="tx1">
+                    <a:lumMod val="75000"/>
+                    <a:lumOff val="25000"/>
+                  </a:schemeClr>
+                </a:solidFill>
+                <a:latin typeface="Roboto" panose="02000000000000000000" pitchFamily="2" charset="0"/>
+                <a:ea typeface="Roboto" panose="02000000000000000000" pitchFamily="2" charset="0"/>
+              </a:rPr>
+              <a:t>-</a:t>
+            </a:r>
+            <a:r>
+              <a:rPr lang="de-DE" sz="700" dirty="0" err="1">
+                <a:solidFill>
+                  <a:schemeClr val="tx1">
+                    <a:lumMod val="75000"/>
+                    <a:lumOff val="25000"/>
+                  </a:schemeClr>
+                </a:solidFill>
+                <a:latin typeface="Roboto" panose="02000000000000000000" pitchFamily="2" charset="0"/>
+                <a:ea typeface="Roboto" panose="02000000000000000000" pitchFamily="2" charset="0"/>
+              </a:rPr>
+              <a:t>key</a:t>
             </a:r>
             <a:endParaRPr lang="en-US" sz="700" dirty="0">
               <a:solidFill>
@@ -7797,10 +6433,10 @@
       </p:sp>
       <p:sp>
         <p:nvSpPr>
-          <p:cNvPr id="19" name="Rechteck 18">
+          <p:cNvPr id="39" name="Rechteck 38">
             <a:extLst>
               <a:ext uri="{FF2B5EF4-FFF2-40B4-BE49-F238E27FC236}">
-                <a16:creationId xmlns:a16="http://schemas.microsoft.com/office/drawing/2014/main" id="{297E2B5D-6DEE-2632-E0FC-849FDBC9FD8D}"/>
+                <a16:creationId xmlns:a16="http://schemas.microsoft.com/office/drawing/2014/main" id="{5EAEA946-E271-58AD-1825-8912BD80901F}"/>
               </a:ext>
             </a:extLst>
           </p:cNvPr>
@@ -7809,7 +6445,7 @@
         </p:nvSpPr>
         <p:spPr>
           <a:xfrm>
-            <a:off x="4369345" y="2764007"/>
+            <a:off x="4353226" y="2978524"/>
             <a:ext cx="1167307" cy="228600"/>
           </a:xfrm>
           <a:prstGeom prst="rect">
@@ -7854,33 +6490,7 @@
                 <a:latin typeface="Roboto" panose="02000000000000000000" pitchFamily="2" charset="0"/>
                 <a:ea typeface="Roboto" panose="02000000000000000000" pitchFamily="2" charset="0"/>
               </a:rPr>
-              <a:t>public</a:t>
-            </a:r>
-            <a:r>
-              <a:rPr lang="de-DE" sz="700" dirty="0">
-                <a:solidFill>
-                  <a:schemeClr val="tx1">
-                    <a:lumMod val="75000"/>
-                    <a:lumOff val="25000"/>
-                  </a:schemeClr>
-                </a:solidFill>
-                <a:latin typeface="Roboto" panose="02000000000000000000" pitchFamily="2" charset="0"/>
-                <a:ea typeface="Roboto" panose="02000000000000000000" pitchFamily="2" charset="0"/>
-              </a:rPr>
-              <a:t> </a:t>
-            </a:r>
-            <a:r>
-              <a:rPr lang="de-DE" sz="700" dirty="0" err="1">
-                <a:solidFill>
-                  <a:schemeClr val="tx1">
-                    <a:lumMod val="75000"/>
-                    <a:lumOff val="25000"/>
-                  </a:schemeClr>
-                </a:solidFill>
-                <a:latin typeface="Roboto" panose="02000000000000000000" pitchFamily="2" charset="0"/>
-                <a:ea typeface="Roboto" panose="02000000000000000000" pitchFamily="2" charset="0"/>
-              </a:rPr>
-              <a:t>auth_key</a:t>
+              <a:t>anon-key</a:t>
             </a:r>
             <a:endParaRPr lang="en-US" sz="700" dirty="0">
               <a:solidFill>
@@ -7897,10 +6507,10 @@
       </p:sp>
       <p:sp>
         <p:nvSpPr>
-          <p:cNvPr id="20" name="Rechteck 19">
+          <p:cNvPr id="41" name="Rechteck 40">
             <a:extLst>
               <a:ext uri="{FF2B5EF4-FFF2-40B4-BE49-F238E27FC236}">
-                <a16:creationId xmlns:a16="http://schemas.microsoft.com/office/drawing/2014/main" id="{1E3E335F-AD13-E991-8C29-024DDE86F95B}"/>
+                <a16:creationId xmlns:a16="http://schemas.microsoft.com/office/drawing/2014/main" id="{326BC23D-E107-A1AA-9F78-83097D6B81F5}"/>
               </a:ext>
             </a:extLst>
           </p:cNvPr>
@@ -7909,7 +6519,7 @@
         </p:nvSpPr>
         <p:spPr>
           <a:xfrm>
-            <a:off x="4369345" y="3019348"/>
+            <a:off x="4353226" y="2688138"/>
             <a:ext cx="1167307" cy="228600"/>
           </a:xfrm>
           <a:prstGeom prst="rect">
@@ -7944,6 +6554,19 @@
           <a:p>
             <a:pPr algn="ctr"/>
             <a:r>
+              <a:rPr lang="de-DE" sz="700" dirty="0">
+                <a:solidFill>
+                  <a:schemeClr val="tx1">
+                    <a:lumMod val="75000"/>
+                    <a:lumOff val="25000"/>
+                  </a:schemeClr>
+                </a:solidFill>
+                <a:latin typeface="Roboto" panose="02000000000000000000" pitchFamily="2" charset="0"/>
+                <a:ea typeface="Roboto" panose="02000000000000000000" pitchFamily="2" charset="0"/>
+              </a:rPr>
+              <a:t>X-</a:t>
+            </a:r>
+            <a:r>
               <a:rPr lang="de-DE" sz="700" dirty="0" err="1">
                 <a:solidFill>
                   <a:schemeClr val="tx1">
@@ -7954,7 +6577,7 @@
                 <a:latin typeface="Roboto" panose="02000000000000000000" pitchFamily="2" charset="0"/>
                 <a:ea typeface="Roboto" panose="02000000000000000000" pitchFamily="2" charset="0"/>
               </a:rPr>
-              <a:t>public</a:t>
+              <a:t>api</a:t>
             </a:r>
             <a:r>
               <a:rPr lang="de-DE" sz="700" dirty="0">
@@ -7967,7 +6590,7 @@
                 <a:latin typeface="Roboto" panose="02000000000000000000" pitchFamily="2" charset="0"/>
                 <a:ea typeface="Roboto" panose="02000000000000000000" pitchFamily="2" charset="0"/>
               </a:rPr>
-              <a:t> </a:t>
+              <a:t>-</a:t>
             </a:r>
             <a:r>
               <a:rPr lang="de-DE" sz="700" dirty="0" err="1">
@@ -7980,7 +6603,7 @@
                 <a:latin typeface="Roboto" panose="02000000000000000000" pitchFamily="2" charset="0"/>
                 <a:ea typeface="Roboto" panose="02000000000000000000" pitchFamily="2" charset="0"/>
               </a:rPr>
-              <a:t>auth_key</a:t>
+              <a:t>key</a:t>
             </a:r>
             <a:endParaRPr lang="en-US" sz="700" dirty="0">
               <a:solidFill>
@@ -7997,10 +6620,10 @@
       </p:sp>
       <p:sp>
         <p:nvSpPr>
-          <p:cNvPr id="21" name="Rechteck 20">
+          <p:cNvPr id="43" name="Rechteck 42">
             <a:extLst>
               <a:ext uri="{FF2B5EF4-FFF2-40B4-BE49-F238E27FC236}">
-                <a16:creationId xmlns:a16="http://schemas.microsoft.com/office/drawing/2014/main" id="{79C9461F-D00D-999F-98D0-69CDB729BE61}"/>
+                <a16:creationId xmlns:a16="http://schemas.microsoft.com/office/drawing/2014/main" id="{77997CF8-1FDF-B781-FCB8-42A7E2A9503D}"/>
               </a:ext>
             </a:extLst>
           </p:cNvPr>
@@ -8009,7 +6632,7 @@
         </p:nvSpPr>
         <p:spPr>
           <a:xfrm>
-            <a:off x="2313412" y="3490786"/>
+            <a:off x="7021390" y="5097072"/>
             <a:ext cx="1167307" cy="228600"/>
           </a:xfrm>
           <a:prstGeom prst="rect">
@@ -8044,19 +6667,6 @@
           <a:p>
             <a:pPr algn="ctr"/>
             <a:r>
-              <a:rPr lang="de-DE" sz="700" dirty="0">
-                <a:solidFill>
-                  <a:schemeClr val="tx1">
-                    <a:lumMod val="75000"/>
-                    <a:lumOff val="25000"/>
-                  </a:schemeClr>
-                </a:solidFill>
-                <a:latin typeface="Roboto" panose="02000000000000000000" pitchFamily="2" charset="0"/>
-                <a:ea typeface="Roboto" panose="02000000000000000000" pitchFamily="2" charset="0"/>
-              </a:rPr>
-              <a:t>private </a:t>
-            </a:r>
-            <a:r>
               <a:rPr lang="de-DE" sz="700" dirty="0" err="1">
                 <a:solidFill>
                   <a:schemeClr val="tx1">
@@ -8067,7 +6677,7 @@
                 <a:latin typeface="Roboto" panose="02000000000000000000" pitchFamily="2" charset="0"/>
                 <a:ea typeface="Roboto" panose="02000000000000000000" pitchFamily="2" charset="0"/>
               </a:rPr>
-              <a:t>auth_key</a:t>
+              <a:t>anon-key</a:t>
             </a:r>
             <a:endParaRPr lang="en-US" sz="700" dirty="0">
               <a:solidFill>
@@ -8084,10 +6694,10 @@
       </p:sp>
       <p:sp>
         <p:nvSpPr>
-          <p:cNvPr id="23" name="Rechteck 22">
+          <p:cNvPr id="47" name="Rechteck 46">
             <a:extLst>
               <a:ext uri="{FF2B5EF4-FFF2-40B4-BE49-F238E27FC236}">
-                <a16:creationId xmlns:a16="http://schemas.microsoft.com/office/drawing/2014/main" id="{7795FC20-4100-2EC0-8AF2-AEED84EE1048}"/>
+                <a16:creationId xmlns:a16="http://schemas.microsoft.com/office/drawing/2014/main" id="{F7281860-A7A2-1BAB-4850-4D333DAB24B3}"/>
               </a:ext>
             </a:extLst>
           </p:cNvPr>
@@ -8096,17 +6706,14 @@
         </p:nvSpPr>
         <p:spPr>
           <a:xfrm>
-            <a:off x="4380378" y="3529932"/>
+            <a:off x="7021390" y="4806686"/>
             <a:ext cx="1167307" cy="228600"/>
           </a:xfrm>
           <a:prstGeom prst="rect">
             <a:avLst/>
           </a:prstGeom>
           <a:solidFill>
-            <a:schemeClr val="accent2">
-              <a:lumMod val="60000"/>
-              <a:lumOff val="40000"/>
-            </a:schemeClr>
+            <a:srgbClr val="FFC000"/>
           </a:solidFill>
           <a:ln>
             <a:noFill/>
@@ -8144,7 +6751,7 @@
                 <a:latin typeface="Roboto" panose="02000000000000000000" pitchFamily="2" charset="0"/>
                 <a:ea typeface="Roboto" panose="02000000000000000000" pitchFamily="2" charset="0"/>
               </a:rPr>
-              <a:t>Link-</a:t>
+              <a:t>X-</a:t>
             </a:r>
             <a:r>
               <a:rPr lang="de-DE" sz="700" dirty="0" err="1">
@@ -8157,7 +6764,33 @@
                 <a:latin typeface="Roboto" panose="02000000000000000000" pitchFamily="2" charset="0"/>
                 <a:ea typeface="Roboto" panose="02000000000000000000" pitchFamily="2" charset="0"/>
               </a:rPr>
-              <a:t>table</a:t>
+              <a:t>api</a:t>
+            </a:r>
+            <a:r>
+              <a:rPr lang="de-DE" sz="700" dirty="0">
+                <a:solidFill>
+                  <a:schemeClr val="tx1">
+                    <a:lumMod val="75000"/>
+                    <a:lumOff val="25000"/>
+                  </a:schemeClr>
+                </a:solidFill>
+                <a:latin typeface="Roboto" panose="02000000000000000000" pitchFamily="2" charset="0"/>
+                <a:ea typeface="Roboto" panose="02000000000000000000" pitchFamily="2" charset="0"/>
+              </a:rPr>
+              <a:t>-</a:t>
+            </a:r>
+            <a:r>
+              <a:rPr lang="de-DE" sz="700" dirty="0" err="1">
+                <a:solidFill>
+                  <a:schemeClr val="tx1">
+                    <a:lumMod val="75000"/>
+                    <a:lumOff val="25000"/>
+                  </a:schemeClr>
+                </a:solidFill>
+                <a:latin typeface="Roboto" panose="02000000000000000000" pitchFamily="2" charset="0"/>
+                <a:ea typeface="Roboto" panose="02000000000000000000" pitchFamily="2" charset="0"/>
+              </a:rPr>
+              <a:t>key</a:t>
             </a:r>
             <a:endParaRPr lang="en-US" sz="700" dirty="0">
               <a:solidFill>
@@ -8174,10 +6807,10 @@
       </p:sp>
       <p:sp>
         <p:nvSpPr>
-          <p:cNvPr id="25" name="Rechteck 24">
+          <p:cNvPr id="48" name="Rechteck 47">
             <a:extLst>
               <a:ext uri="{FF2B5EF4-FFF2-40B4-BE49-F238E27FC236}">
-                <a16:creationId xmlns:a16="http://schemas.microsoft.com/office/drawing/2014/main" id="{C230194C-D3C4-A2F4-5D1A-6811EAA8E833}"/>
+                <a16:creationId xmlns:a16="http://schemas.microsoft.com/office/drawing/2014/main" id="{1F29EB1E-AC53-7334-DF37-DD5AD623CF24}"/>
               </a:ext>
             </a:extLst>
           </p:cNvPr>
@@ -8186,117 +6819,7 @@
         </p:nvSpPr>
         <p:spPr>
           <a:xfrm>
-            <a:off x="4380378" y="3792632"/>
-            <a:ext cx="1167307" cy="228600"/>
-          </a:xfrm>
-          <a:prstGeom prst="rect">
-            <a:avLst/>
-          </a:prstGeom>
-          <a:solidFill>
-            <a:schemeClr val="accent2">
-              <a:lumMod val="75000"/>
-            </a:schemeClr>
-          </a:solidFill>
-          <a:ln>
-            <a:noFill/>
-          </a:ln>
-        </p:spPr>
-        <p:style>
-          <a:lnRef idx="2">
-            <a:schemeClr val="accent1">
-              <a:shade val="15000"/>
-            </a:schemeClr>
-          </a:lnRef>
-          <a:fillRef idx="1">
-            <a:schemeClr val="accent1"/>
-          </a:fillRef>
-          <a:effectRef idx="0">
-            <a:schemeClr val="accent1"/>
-          </a:effectRef>
-          <a:fontRef idx="minor">
-            <a:schemeClr val="lt1"/>
-          </a:fontRef>
-        </p:style>
-        <p:txBody>
-          <a:bodyPr rtlCol="0" anchor="ctr"/>
-          <a:lstStyle/>
-          <a:p>
-            <a:pPr algn="ctr"/>
-            <a:r>
-              <a:rPr lang="de-DE" sz="700" dirty="0">
-                <a:solidFill>
-                  <a:schemeClr val="bg1"/>
-                </a:solidFill>
-                <a:latin typeface="Roboto" panose="02000000000000000000" pitchFamily="2" charset="0"/>
-                <a:ea typeface="Roboto" panose="02000000000000000000" pitchFamily="2" charset="0"/>
-              </a:rPr>
-              <a:t>mac-</a:t>
-            </a:r>
-            <a:r>
-              <a:rPr lang="de-DE" sz="700" dirty="0" err="1">
-                <a:solidFill>
-                  <a:schemeClr val="bg1"/>
-                </a:solidFill>
-                <a:latin typeface="Roboto" panose="02000000000000000000" pitchFamily="2" charset="0"/>
-                <a:ea typeface="Roboto" panose="02000000000000000000" pitchFamily="2" charset="0"/>
-              </a:rPr>
-              <a:t>address</a:t>
-            </a:r>
-            <a:r>
-              <a:rPr lang="de-DE" sz="700" dirty="0">
-                <a:solidFill>
-                  <a:schemeClr val="bg1"/>
-                </a:solidFill>
-                <a:latin typeface="Roboto" panose="02000000000000000000" pitchFamily="2" charset="0"/>
-                <a:ea typeface="Roboto" panose="02000000000000000000" pitchFamily="2" charset="0"/>
-              </a:rPr>
-              <a:t> </a:t>
-            </a:r>
-            <a:r>
-              <a:rPr lang="de-DE" sz="700" dirty="0" err="1">
-                <a:solidFill>
-                  <a:schemeClr val="bg1"/>
-                </a:solidFill>
-                <a:latin typeface="Roboto" panose="02000000000000000000" pitchFamily="2" charset="0"/>
-                <a:ea typeface="Roboto" panose="02000000000000000000" pitchFamily="2" charset="0"/>
-              </a:rPr>
-              <a:t>white</a:t>
-            </a:r>
-            <a:r>
-              <a:rPr lang="de-DE" sz="700" dirty="0">
-                <a:solidFill>
-                  <a:schemeClr val="bg1"/>
-                </a:solidFill>
-                <a:latin typeface="Roboto" panose="02000000000000000000" pitchFamily="2" charset="0"/>
-                <a:ea typeface="Roboto" panose="02000000000000000000" pitchFamily="2" charset="0"/>
-              </a:rPr>
-              <a:t>-list</a:t>
-            </a:r>
-            <a:endParaRPr lang="en-US" sz="700" dirty="0">
-              <a:solidFill>
-                <a:schemeClr val="bg1"/>
-              </a:solidFill>
-              <a:latin typeface="Roboto" panose="02000000000000000000" pitchFamily="2" charset="0"/>
-              <a:ea typeface="Roboto" panose="02000000000000000000" pitchFamily="2" charset="0"/>
-            </a:endParaRPr>
-          </a:p>
-        </p:txBody>
-      </p:sp>
-      <p:sp>
-        <p:nvSpPr>
-          <p:cNvPr id="26" name="Rechteck 25">
-            <a:extLst>
-              <a:ext uri="{FF2B5EF4-FFF2-40B4-BE49-F238E27FC236}">
-                <a16:creationId xmlns:a16="http://schemas.microsoft.com/office/drawing/2014/main" id="{6FF081F6-6499-69DC-2A0B-A62E865EFF97}"/>
-              </a:ext>
-            </a:extLst>
-          </p:cNvPr>
-          <p:cNvSpPr/>
-          <p:nvPr/>
-        </p:nvSpPr>
-        <p:spPr>
-          <a:xfrm>
-            <a:off x="5547685" y="4938231"/>
+            <a:off x="8210335" y="3973286"/>
             <a:ext cx="1167307" cy="228600"/>
           </a:xfrm>
           <a:prstGeom prst="rect">
@@ -8331,19 +6854,6 @@
           <a:p>
             <a:pPr algn="ctr"/>
             <a:r>
-              <a:rPr lang="de-DE" sz="700" dirty="0">
-                <a:solidFill>
-                  <a:schemeClr val="tx1">
-                    <a:lumMod val="75000"/>
-                    <a:lumOff val="25000"/>
-                  </a:schemeClr>
-                </a:solidFill>
-                <a:latin typeface="Roboto" panose="02000000000000000000" pitchFamily="2" charset="0"/>
-                <a:ea typeface="Roboto" panose="02000000000000000000" pitchFamily="2" charset="0"/>
-              </a:rPr>
-              <a:t>private </a:t>
-            </a:r>
-            <a:r>
               <a:rPr lang="de-DE" sz="700" dirty="0" err="1">
                 <a:solidFill>
                   <a:schemeClr val="tx1">
@@ -8354,20 +6864,7 @@
                 <a:latin typeface="Roboto" panose="02000000000000000000" pitchFamily="2" charset="0"/>
                 <a:ea typeface="Roboto" panose="02000000000000000000" pitchFamily="2" charset="0"/>
               </a:rPr>
-              <a:t>auth_key</a:t>
-            </a:r>
-            <a:r>
-              <a:rPr lang="de-DE" sz="700" dirty="0">
-                <a:solidFill>
-                  <a:schemeClr val="tx1">
-                    <a:lumMod val="75000"/>
-                    <a:lumOff val="25000"/>
-                  </a:schemeClr>
-                </a:solidFill>
-                <a:latin typeface="Roboto" panose="02000000000000000000" pitchFamily="2" charset="0"/>
-                <a:ea typeface="Roboto" panose="02000000000000000000" pitchFamily="2" charset="0"/>
-              </a:rPr>
-              <a:t>???</a:t>
+              <a:t>anon-key</a:t>
             </a:r>
             <a:endParaRPr lang="en-US" sz="700" dirty="0">
               <a:solidFill>
@@ -8384,10 +6881,10 @@
       </p:sp>
       <p:sp>
         <p:nvSpPr>
-          <p:cNvPr id="34" name="Rechteck 33">
+          <p:cNvPr id="49" name="Rechteck 48">
             <a:extLst>
               <a:ext uri="{FF2B5EF4-FFF2-40B4-BE49-F238E27FC236}">
-                <a16:creationId xmlns:a16="http://schemas.microsoft.com/office/drawing/2014/main" id="{81CF9102-5848-6671-F7BF-5905E4C268DC}"/>
+                <a16:creationId xmlns:a16="http://schemas.microsoft.com/office/drawing/2014/main" id="{EE4755BA-50E5-8334-D1A3-EF52473F0C28}"/>
               </a:ext>
             </a:extLst>
           </p:cNvPr>
@@ -8396,7 +6893,7 @@
         </p:nvSpPr>
         <p:spPr>
           <a:xfrm>
-            <a:off x="4369345" y="3274322"/>
+            <a:off x="8210335" y="3682900"/>
             <a:ext cx="1167307" cy="228600"/>
           </a:xfrm>
           <a:prstGeom prst="rect">
@@ -8431,6 +6928,19 @@
           <a:p>
             <a:pPr algn="ctr"/>
             <a:r>
+              <a:rPr lang="de-DE" sz="700" dirty="0">
+                <a:solidFill>
+                  <a:schemeClr val="tx1">
+                    <a:lumMod val="75000"/>
+                    <a:lumOff val="25000"/>
+                  </a:schemeClr>
+                </a:solidFill>
+                <a:latin typeface="Roboto" panose="02000000000000000000" pitchFamily="2" charset="0"/>
+                <a:ea typeface="Roboto" panose="02000000000000000000" pitchFamily="2" charset="0"/>
+              </a:rPr>
+              <a:t>X-</a:t>
+            </a:r>
+            <a:r>
               <a:rPr lang="de-DE" sz="700" dirty="0" err="1">
                 <a:solidFill>
                   <a:schemeClr val="tx1">
@@ -8441,7 +6951,7 @@
                 <a:latin typeface="Roboto" panose="02000000000000000000" pitchFamily="2" charset="0"/>
                 <a:ea typeface="Roboto" panose="02000000000000000000" pitchFamily="2" charset="0"/>
               </a:rPr>
-              <a:t>public</a:t>
+              <a:t>api</a:t>
             </a:r>
             <a:r>
               <a:rPr lang="de-DE" sz="700" dirty="0">
@@ -8454,7 +6964,7 @@
                 <a:latin typeface="Roboto" panose="02000000000000000000" pitchFamily="2" charset="0"/>
                 <a:ea typeface="Roboto" panose="02000000000000000000" pitchFamily="2" charset="0"/>
               </a:rPr>
-              <a:t> </a:t>
+              <a:t>-</a:t>
             </a:r>
             <a:r>
               <a:rPr lang="de-DE" sz="700" dirty="0" err="1">
@@ -8467,20 +6977,7 @@
                 <a:latin typeface="Roboto" panose="02000000000000000000" pitchFamily="2" charset="0"/>
                 <a:ea typeface="Roboto" panose="02000000000000000000" pitchFamily="2" charset="0"/>
               </a:rPr>
-              <a:t>auth_key</a:t>
-            </a:r>
-            <a:r>
-              <a:rPr lang="de-DE" sz="700" dirty="0">
-                <a:solidFill>
-                  <a:schemeClr val="tx1">
-                    <a:lumMod val="75000"/>
-                    <a:lumOff val="25000"/>
-                  </a:schemeClr>
-                </a:solidFill>
-                <a:latin typeface="Roboto" panose="02000000000000000000" pitchFamily="2" charset="0"/>
-                <a:ea typeface="Roboto" panose="02000000000000000000" pitchFamily="2" charset="0"/>
-              </a:rPr>
-              <a:t>???</a:t>
+              <a:t>key</a:t>
             </a:r>
             <a:endParaRPr lang="en-US" sz="700" dirty="0">
               <a:solidFill>
@@ -8497,10 +6994,10 @@
       </p:sp>
       <p:sp>
         <p:nvSpPr>
-          <p:cNvPr id="36" name="Rechteck 35">
+          <p:cNvPr id="50" name="Ellipse 49">
             <a:extLst>
               <a:ext uri="{FF2B5EF4-FFF2-40B4-BE49-F238E27FC236}">
-                <a16:creationId xmlns:a16="http://schemas.microsoft.com/office/drawing/2014/main" id="{7BC134E9-F005-A896-8F2C-C753D7531B45}"/>
+                <a16:creationId xmlns:a16="http://schemas.microsoft.com/office/drawing/2014/main" id="{6AFA5385-794A-6719-2181-0F8688DB294E}"/>
               </a:ext>
             </a:extLst>
           </p:cNvPr>
@@ -8509,18 +7006,15 @@
         </p:nvSpPr>
         <p:spPr>
           <a:xfrm>
-            <a:off x="5547685" y="5201958"/>
-            <a:ext cx="1167307" cy="228600"/>
-          </a:xfrm>
-          <a:prstGeom prst="rect">
+            <a:off x="3229539" y="3616200"/>
+            <a:ext cx="1069089" cy="746312"/>
+          </a:xfrm>
+          <a:prstGeom prst="ellipse">
             <a:avLst/>
           </a:prstGeom>
           <a:solidFill>
-            <a:srgbClr val="FFC000"/>
+            <a:schemeClr val="bg1"/>
           </a:solidFill>
-          <a:ln>
-            <a:noFill/>
-          </a:ln>
         </p:spPr>
         <p:style>
           <a:lnRef idx="2">
@@ -8544,37 +7038,59 @@
           <a:p>
             <a:pPr algn="ctr"/>
             <a:r>
-              <a:rPr lang="de-DE" sz="700" dirty="0" err="1">
+              <a:rPr lang="de-DE" sz="800" dirty="0" err="1">
                 <a:solidFill>
-                  <a:schemeClr val="tx1">
-                    <a:lumMod val="75000"/>
-                    <a:lumOff val="25000"/>
-                  </a:schemeClr>
+                  <a:schemeClr val="tx1"/>
                 </a:solidFill>
-                <a:latin typeface="Roboto" panose="02000000000000000000" pitchFamily="2" charset="0"/>
-                <a:ea typeface="Roboto" panose="02000000000000000000" pitchFamily="2" charset="0"/>
-              </a:rPr>
-              <a:t>user:password</a:t>
-            </a:r>
-            <a:endParaRPr lang="en-US" sz="700" dirty="0">
+              </a:rPr>
+              <a:t>Give</a:t>
+            </a:r>
+            <a:r>
+              <a:rPr lang="de-DE" sz="800" dirty="0">
+                <a:solidFill>
+                  <a:schemeClr val="tx1"/>
+                </a:solidFill>
+              </a:rPr>
+              <a:t> </a:t>
+            </a:r>
+            <a:r>
+              <a:rPr lang="de-DE" sz="800" dirty="0" err="1">
+                <a:solidFill>
+                  <a:schemeClr val="tx1"/>
+                </a:solidFill>
+              </a:rPr>
+              <a:t>keys</a:t>
+            </a:r>
+            <a:r>
+              <a:rPr lang="de-DE" sz="800" dirty="0">
+                <a:solidFill>
+                  <a:schemeClr val="tx1"/>
+                </a:solidFill>
+              </a:rPr>
+              <a:t> on </a:t>
+            </a:r>
+            <a:r>
+              <a:rPr lang="de-DE" sz="800" dirty="0" err="1">
+                <a:solidFill>
+                  <a:schemeClr val="tx1"/>
+                </a:solidFill>
+              </a:rPr>
+              <a:t>startup</a:t>
+            </a:r>
+            <a:endParaRPr lang="en-US" sz="800" dirty="0">
               <a:solidFill>
-                <a:schemeClr val="tx1">
-                  <a:lumMod val="75000"/>
-                  <a:lumOff val="25000"/>
-                </a:schemeClr>
+                <a:schemeClr val="tx1"/>
               </a:solidFill>
-              <a:latin typeface="Roboto" panose="02000000000000000000" pitchFamily="2" charset="0"/>
-              <a:ea typeface="Roboto" panose="02000000000000000000" pitchFamily="2" charset="0"/>
             </a:endParaRPr>
           </a:p>
         </p:txBody>
       </p:sp>
       <p:sp>
         <p:nvSpPr>
-          <p:cNvPr id="38" name="Rechteck 37">
+          <p:cNvPr id="51" name="Ellipse 50">
             <a:extLst>
               <a:ext uri="{FF2B5EF4-FFF2-40B4-BE49-F238E27FC236}">
-                <a16:creationId xmlns:a16="http://schemas.microsoft.com/office/drawing/2014/main" id="{3E2ECD59-6663-909A-3260-27376871ECAA}"/>
+                <a16:creationId xmlns:a16="http://schemas.microsoft.com/office/drawing/2014/main" id="{56E19A8F-26CA-0EAA-3E8B-C15C5FB124AE}"/>
               </a:ext>
             </a:extLst>
           </p:cNvPr>
@@ -8583,18 +7099,15 @@
         </p:nvSpPr>
         <p:spPr>
           <a:xfrm>
-            <a:off x="4380658" y="4053529"/>
-            <a:ext cx="1167307" cy="228600"/>
-          </a:xfrm>
-          <a:prstGeom prst="rect">
+            <a:off x="4874214" y="3165188"/>
+            <a:ext cx="1069089" cy="746312"/>
+          </a:xfrm>
+          <a:prstGeom prst="ellipse">
             <a:avLst/>
           </a:prstGeom>
           <a:solidFill>
-            <a:srgbClr val="FFC000"/>
+            <a:schemeClr val="bg1"/>
           </a:solidFill>
-          <a:ln>
-            <a:noFill/>
-          </a:ln>
         </p:spPr>
         <p:style>
           <a:lnRef idx="2">
@@ -8618,31 +7131,300 @@
           <a:p>
             <a:pPr algn="ctr"/>
             <a:r>
-              <a:rPr lang="de-DE" sz="700" dirty="0" err="1">
+              <a:rPr lang="de-DE" sz="800" dirty="0">
                 <a:solidFill>
-                  <a:schemeClr val="tx1">
-                    <a:lumMod val="75000"/>
-                    <a:lumOff val="25000"/>
-                  </a:schemeClr>
+                  <a:schemeClr val="tx1"/>
                 </a:solidFill>
-                <a:latin typeface="Roboto" panose="02000000000000000000" pitchFamily="2" charset="0"/>
-                <a:ea typeface="Roboto" panose="02000000000000000000" pitchFamily="2" charset="0"/>
-              </a:rPr>
-              <a:t>user_hash:pw_hash</a:t>
-            </a:r>
-            <a:endParaRPr lang="en-US" sz="700" dirty="0">
+              </a:rPr>
+              <a:t>Keys </a:t>
+            </a:r>
+            <a:r>
+              <a:rPr lang="de-DE" sz="800" dirty="0" err="1">
+                <a:solidFill>
+                  <a:schemeClr val="tx1"/>
+                </a:solidFill>
+              </a:rPr>
+              <a:t>stored</a:t>
+            </a:r>
+            <a:r>
+              <a:rPr lang="de-DE" sz="800" dirty="0">
+                <a:solidFill>
+                  <a:schemeClr val="tx1"/>
+                </a:solidFill>
+              </a:rPr>
+              <a:t> in </a:t>
+            </a:r>
+            <a:r>
+              <a:rPr lang="de-DE" sz="800" dirty="0" err="1">
+                <a:solidFill>
+                  <a:schemeClr val="tx1"/>
+                </a:solidFill>
+              </a:rPr>
+              <a:t>secrets</a:t>
+            </a:r>
+            <a:r>
+              <a:rPr lang="de-DE" sz="800" dirty="0">
+                <a:solidFill>
+                  <a:schemeClr val="tx1"/>
+                </a:solidFill>
+              </a:rPr>
+              <a:t> </a:t>
+            </a:r>
+            <a:r>
+              <a:rPr lang="de-DE" sz="800" dirty="0" err="1">
+                <a:solidFill>
+                  <a:schemeClr val="tx1"/>
+                </a:solidFill>
+              </a:rPr>
+              <a:t>storage</a:t>
+            </a:r>
+            <a:endParaRPr lang="en-US" sz="800" dirty="0">
               <a:solidFill>
-                <a:schemeClr val="tx1">
-                  <a:lumMod val="75000"/>
-                  <a:lumOff val="25000"/>
-                </a:schemeClr>
+                <a:schemeClr val="tx1"/>
               </a:solidFill>
-              <a:latin typeface="Roboto" panose="02000000000000000000" pitchFamily="2" charset="0"/>
-              <a:ea typeface="Roboto" panose="02000000000000000000" pitchFamily="2" charset="0"/>
             </a:endParaRPr>
           </a:p>
         </p:txBody>
       </p:sp>
+      <p:sp>
+        <p:nvSpPr>
+          <p:cNvPr id="52" name="Ellipse 51">
+            <a:extLst>
+              <a:ext uri="{FF2B5EF4-FFF2-40B4-BE49-F238E27FC236}">
+                <a16:creationId xmlns:a16="http://schemas.microsoft.com/office/drawing/2014/main" id="{AA8BB5B1-D69E-0B28-97E5-406D6B932FA6}"/>
+              </a:ext>
+            </a:extLst>
+          </p:cNvPr>
+          <p:cNvSpPr/>
+          <p:nvPr/>
+        </p:nvSpPr>
+        <p:spPr>
+          <a:xfrm>
+            <a:off x="8019490" y="4242226"/>
+            <a:ext cx="1358152" cy="746312"/>
+          </a:xfrm>
+          <a:prstGeom prst="ellipse">
+            <a:avLst/>
+          </a:prstGeom>
+          <a:solidFill>
+            <a:schemeClr val="bg1"/>
+          </a:solidFill>
+        </p:spPr>
+        <p:style>
+          <a:lnRef idx="2">
+            <a:schemeClr val="accent1">
+              <a:shade val="15000"/>
+            </a:schemeClr>
+          </a:lnRef>
+          <a:fillRef idx="1">
+            <a:schemeClr val="accent1"/>
+          </a:fillRef>
+          <a:effectRef idx="0">
+            <a:schemeClr val="accent1"/>
+          </a:effectRef>
+          <a:fontRef idx="minor">
+            <a:schemeClr val="lt1"/>
+          </a:fontRef>
+        </p:style>
+        <p:txBody>
+          <a:bodyPr rtlCol="0" anchor="ctr"/>
+          <a:lstStyle/>
+          <a:p>
+            <a:pPr algn="ctr"/>
+            <a:r>
+              <a:rPr lang="de-DE" sz="800" dirty="0" err="1">
+                <a:solidFill>
+                  <a:schemeClr val="tx1"/>
+                </a:solidFill>
+              </a:rPr>
+              <a:t>Give</a:t>
+            </a:r>
+            <a:r>
+              <a:rPr lang="de-DE" sz="800" dirty="0">
+                <a:solidFill>
+                  <a:schemeClr val="tx1"/>
+                </a:solidFill>
+              </a:rPr>
+              <a:t> </a:t>
+            </a:r>
+            <a:r>
+              <a:rPr lang="de-DE" sz="800" dirty="0" err="1">
+                <a:solidFill>
+                  <a:schemeClr val="tx1"/>
+                </a:solidFill>
+              </a:rPr>
+              <a:t>keys</a:t>
+            </a:r>
+            <a:r>
+              <a:rPr lang="de-DE" sz="800" dirty="0">
+                <a:solidFill>
+                  <a:schemeClr val="tx1"/>
+                </a:solidFill>
+              </a:rPr>
+              <a:t> on </a:t>
+            </a:r>
+            <a:r>
+              <a:rPr lang="de-DE" sz="800" dirty="0" err="1">
+                <a:solidFill>
+                  <a:schemeClr val="tx1"/>
+                </a:solidFill>
+              </a:rPr>
+              <a:t>first</a:t>
+            </a:r>
+            <a:r>
+              <a:rPr lang="de-DE" sz="800" dirty="0">
+                <a:solidFill>
+                  <a:schemeClr val="tx1"/>
+                </a:solidFill>
+              </a:rPr>
+              <a:t> </a:t>
+            </a:r>
+            <a:r>
+              <a:rPr lang="de-DE" sz="800" dirty="0" err="1">
+                <a:solidFill>
+                  <a:schemeClr val="tx1"/>
+                </a:solidFill>
+              </a:rPr>
+              <a:t>startup</a:t>
+            </a:r>
+            <a:r>
+              <a:rPr lang="de-DE" sz="800" dirty="0">
+                <a:solidFill>
+                  <a:schemeClr val="tx1"/>
+                </a:solidFill>
+              </a:rPr>
+              <a:t>, </a:t>
+            </a:r>
+            <a:r>
+              <a:rPr lang="de-DE" sz="800" dirty="0" err="1">
+                <a:solidFill>
+                  <a:schemeClr val="tx1"/>
+                </a:solidFill>
+              </a:rPr>
+              <a:t>then</a:t>
+            </a:r>
+            <a:r>
+              <a:rPr lang="de-DE" sz="800" dirty="0">
+                <a:solidFill>
+                  <a:schemeClr val="tx1"/>
+                </a:solidFill>
+              </a:rPr>
+              <a:t> </a:t>
+            </a:r>
+            <a:r>
+              <a:rPr lang="de-DE" sz="800" dirty="0" err="1">
+                <a:solidFill>
+                  <a:schemeClr val="tx1"/>
+                </a:solidFill>
+              </a:rPr>
+              <a:t>stored</a:t>
+            </a:r>
+            <a:r>
+              <a:rPr lang="de-DE" sz="800" dirty="0">
+                <a:solidFill>
+                  <a:schemeClr val="tx1"/>
+                </a:solidFill>
+              </a:rPr>
+              <a:t> in internal </a:t>
+            </a:r>
+            <a:r>
+              <a:rPr lang="de-DE" sz="800" dirty="0" err="1">
+                <a:solidFill>
+                  <a:schemeClr val="tx1"/>
+                </a:solidFill>
+              </a:rPr>
+              <a:t>memory</a:t>
+            </a:r>
+            <a:endParaRPr lang="en-US" sz="800" dirty="0">
+              <a:solidFill>
+                <a:schemeClr val="tx1"/>
+              </a:solidFill>
+            </a:endParaRPr>
+          </a:p>
+        </p:txBody>
+      </p:sp>
+      <p:cxnSp>
+        <p:nvCxnSpPr>
+          <p:cNvPr id="53" name="Gerade Verbindung mit Pfeil 52">
+            <a:extLst>
+              <a:ext uri="{FF2B5EF4-FFF2-40B4-BE49-F238E27FC236}">
+                <a16:creationId xmlns:a16="http://schemas.microsoft.com/office/drawing/2014/main" id="{66FD883A-4D2C-960B-7E19-2F54F3E8656A}"/>
+              </a:ext>
+            </a:extLst>
+          </p:cNvPr>
+          <p:cNvCxnSpPr>
+            <a:cxnSpLocks/>
+          </p:cNvCxnSpPr>
+          <p:nvPr/>
+        </p:nvCxnSpPr>
+        <p:spPr>
+          <a:xfrm>
+            <a:off x="5525621" y="2245659"/>
+            <a:ext cx="1354230" cy="2232213"/>
+          </a:xfrm>
+          <a:prstGeom prst="straightConnector1">
+            <a:avLst/>
+          </a:prstGeom>
+          <a:ln>
+            <a:tailEnd type="triangle"/>
+          </a:ln>
+        </p:spPr>
+        <p:style>
+          <a:lnRef idx="2">
+            <a:schemeClr val="accent1"/>
+          </a:lnRef>
+          <a:fillRef idx="0">
+            <a:schemeClr val="accent1"/>
+          </a:fillRef>
+          <a:effectRef idx="1">
+            <a:schemeClr val="accent1"/>
+          </a:effectRef>
+          <a:fontRef idx="minor">
+            <a:schemeClr val="tx1"/>
+          </a:fontRef>
+        </p:style>
+      </p:cxnSp>
+      <p:cxnSp>
+        <p:nvCxnSpPr>
+          <p:cNvPr id="54" name="Gerade Verbindung mit Pfeil 53">
+            <a:extLst>
+              <a:ext uri="{FF2B5EF4-FFF2-40B4-BE49-F238E27FC236}">
+                <a16:creationId xmlns:a16="http://schemas.microsoft.com/office/drawing/2014/main" id="{9A0CF01A-226F-AD0C-502C-43CB4156A1C3}"/>
+              </a:ext>
+            </a:extLst>
+          </p:cNvPr>
+          <p:cNvCxnSpPr>
+            <a:cxnSpLocks/>
+          </p:cNvCxnSpPr>
+          <p:nvPr/>
+        </p:nvCxnSpPr>
+        <p:spPr>
+          <a:xfrm>
+            <a:off x="5525621" y="2245659"/>
+            <a:ext cx="2029383" cy="1116107"/>
+          </a:xfrm>
+          <a:prstGeom prst="straightConnector1">
+            <a:avLst/>
+          </a:prstGeom>
+          <a:ln>
+            <a:tailEnd type="triangle"/>
+          </a:ln>
+        </p:spPr>
+        <p:style>
+          <a:lnRef idx="2">
+            <a:schemeClr val="accent1"/>
+          </a:lnRef>
+          <a:fillRef idx="0">
+            <a:schemeClr val="accent1"/>
+          </a:fillRef>
+          <a:effectRef idx="1">
+            <a:schemeClr val="accent1"/>
+          </a:effectRef>
+          <a:fontRef idx="minor">
+            <a:schemeClr val="tx1"/>
+          </a:fontRef>
+        </p:style>
+      </p:cxnSp>
     </p:spTree>
     <p:extLst>
       <p:ext uri="{BB962C8B-B14F-4D97-AF65-F5344CB8AC3E}">
@@ -8979,7 +7761,21 @@
                 <a:latin typeface="Roboto" panose="02000000000000000000" pitchFamily="2" charset="0"/>
                 <a:ea typeface="Roboto" panose="02000000000000000000" pitchFamily="2" charset="0"/>
               </a:rPr>
-              <a:t>Web-Backend (AWS?)</a:t>
+              <a:t>Web-Backend (</a:t>
+            </a:r>
+            <a:r>
+              <a:rPr lang="de-DE" sz="1200" dirty="0" err="1">
+                <a:latin typeface="Roboto" panose="02000000000000000000" pitchFamily="2" charset="0"/>
+                <a:ea typeface="Roboto" panose="02000000000000000000" pitchFamily="2" charset="0"/>
+              </a:rPr>
+              <a:t>supabase</a:t>
+            </a:r>
+            <a:r>
+              <a:rPr lang="de-DE" sz="1200" dirty="0">
+                <a:latin typeface="Roboto" panose="02000000000000000000" pitchFamily="2" charset="0"/>
+                <a:ea typeface="Roboto" panose="02000000000000000000" pitchFamily="2" charset="0"/>
+              </a:rPr>
+              <a:t>)</a:t>
             </a:r>
             <a:endParaRPr lang="en-US" sz="1200" dirty="0">
               <a:latin typeface="Roboto" panose="02000000000000000000" pitchFamily="2" charset="0"/>
@@ -9151,92 +7947,6 @@
           </a:p>
         </p:txBody>
       </p:sp>
-      <p:cxnSp>
-        <p:nvCxnSpPr>
-          <p:cNvPr id="12" name="Gerade Verbindung mit Pfeil 11">
-            <a:extLst>
-              <a:ext uri="{FF2B5EF4-FFF2-40B4-BE49-F238E27FC236}">
-                <a16:creationId xmlns:a16="http://schemas.microsoft.com/office/drawing/2014/main" id="{984681F8-360F-BA11-3E0B-EC8269A57332}"/>
-              </a:ext>
-            </a:extLst>
-          </p:cNvPr>
-          <p:cNvCxnSpPr>
-            <a:stCxn id="6" idx="0"/>
-            <a:endCxn id="7" idx="2"/>
-          </p:cNvCxnSpPr>
-          <p:nvPr/>
-        </p:nvCxnSpPr>
-        <p:spPr>
-          <a:xfrm flipV="1">
-            <a:off x="2084295" y="2245659"/>
-            <a:ext cx="2296083" cy="746312"/>
-          </a:xfrm>
-          <a:prstGeom prst="straightConnector1">
-            <a:avLst/>
-          </a:prstGeom>
-          <a:ln>
-            <a:headEnd type="triangle"/>
-            <a:tailEnd type="triangle"/>
-          </a:ln>
-        </p:spPr>
-        <p:style>
-          <a:lnRef idx="2">
-            <a:schemeClr val="accent1"/>
-          </a:lnRef>
-          <a:fillRef idx="0">
-            <a:schemeClr val="accent1"/>
-          </a:fillRef>
-          <a:effectRef idx="1">
-            <a:schemeClr val="accent1"/>
-          </a:effectRef>
-          <a:fontRef idx="minor">
-            <a:schemeClr val="tx1"/>
-          </a:fontRef>
-        </p:style>
-      </p:cxnSp>
-      <p:cxnSp>
-        <p:nvCxnSpPr>
-          <p:cNvPr id="14" name="Gerade Verbindung mit Pfeil 13">
-            <a:extLst>
-              <a:ext uri="{FF2B5EF4-FFF2-40B4-BE49-F238E27FC236}">
-                <a16:creationId xmlns:a16="http://schemas.microsoft.com/office/drawing/2014/main" id="{A5F81304-EBF1-257C-3417-620FD4F73563}"/>
-              </a:ext>
-            </a:extLst>
-          </p:cNvPr>
-          <p:cNvCxnSpPr>
-            <a:stCxn id="7" idx="4"/>
-            <a:endCxn id="8" idx="0"/>
-          </p:cNvCxnSpPr>
-          <p:nvPr/>
-        </p:nvCxnSpPr>
-        <p:spPr>
-          <a:xfrm>
-            <a:off x="5525621" y="2245659"/>
-            <a:ext cx="2708460" cy="732865"/>
-          </a:xfrm>
-          <a:prstGeom prst="straightConnector1">
-            <a:avLst/>
-          </a:prstGeom>
-          <a:ln>
-            <a:headEnd type="triangle"/>
-            <a:tailEnd type="triangle"/>
-          </a:ln>
-        </p:spPr>
-        <p:style>
-          <a:lnRef idx="2">
-            <a:schemeClr val="accent1"/>
-          </a:lnRef>
-          <a:fillRef idx="0">
-            <a:schemeClr val="accent1"/>
-          </a:fillRef>
-          <a:effectRef idx="1">
-            <a:schemeClr val="accent1"/>
-          </a:effectRef>
-          <a:fontRef idx="minor">
-            <a:schemeClr val="tx1"/>
-          </a:fontRef>
-        </p:style>
-      </p:cxnSp>
       <p:sp>
         <p:nvSpPr>
           <p:cNvPr id="15" name="Rechteck 14">
@@ -9302,49 +8012,6 @@
           </a:p>
         </p:txBody>
       </p:sp>
-      <p:cxnSp>
-        <p:nvCxnSpPr>
-          <p:cNvPr id="17" name="Gerade Verbindung mit Pfeil 16">
-            <a:extLst>
-              <a:ext uri="{FF2B5EF4-FFF2-40B4-BE49-F238E27FC236}">
-                <a16:creationId xmlns:a16="http://schemas.microsoft.com/office/drawing/2014/main" id="{96AF5EB8-D7E2-FBB6-F771-ABD62B405B7B}"/>
-              </a:ext>
-            </a:extLst>
-          </p:cNvPr>
-          <p:cNvCxnSpPr>
-            <a:stCxn id="7" idx="4"/>
-            <a:endCxn id="15" idx="0"/>
-          </p:cNvCxnSpPr>
-          <p:nvPr/>
-        </p:nvCxnSpPr>
-        <p:spPr>
-          <a:xfrm>
-            <a:off x="5525621" y="2245659"/>
-            <a:ext cx="2033307" cy="1848971"/>
-          </a:xfrm>
-          <a:prstGeom prst="straightConnector1">
-            <a:avLst/>
-          </a:prstGeom>
-          <a:ln>
-            <a:headEnd type="triangle"/>
-            <a:tailEnd type="triangle"/>
-          </a:ln>
-        </p:spPr>
-        <p:style>
-          <a:lnRef idx="2">
-            <a:schemeClr val="accent1"/>
-          </a:lnRef>
-          <a:fillRef idx="0">
-            <a:schemeClr val="accent1"/>
-          </a:fillRef>
-          <a:effectRef idx="1">
-            <a:schemeClr val="accent1"/>
-          </a:effectRef>
-          <a:fontRef idx="minor">
-            <a:schemeClr val="tx1"/>
-          </a:fontRef>
-        </p:style>
-      </p:cxnSp>
       <p:cxnSp>
         <p:nvCxnSpPr>
           <p:cNvPr id="22" name="Gerade Verbindung mit Pfeil 21">
@@ -9772,971 +8439,6 @@
           </a:p>
         </p:txBody>
       </p:sp>
-      <p:sp>
-        <p:nvSpPr>
-          <p:cNvPr id="32" name="Textfeld 31">
-            <a:extLst>
-              <a:ext uri="{FF2B5EF4-FFF2-40B4-BE49-F238E27FC236}">
-                <a16:creationId xmlns:a16="http://schemas.microsoft.com/office/drawing/2014/main" id="{A74E195F-4649-D800-0830-6C1F97625C5A}"/>
-              </a:ext>
-            </a:extLst>
-          </p:cNvPr>
-          <p:cNvSpPr txBox="1"/>
-          <p:nvPr/>
-        </p:nvSpPr>
-        <p:spPr>
-          <a:xfrm>
-            <a:off x="2179135" y="1666159"/>
-            <a:ext cx="1907895" cy="707886"/>
-          </a:xfrm>
-          <a:prstGeom prst="rect">
-            <a:avLst/>
-          </a:prstGeom>
-          <a:noFill/>
-        </p:spPr>
-        <p:txBody>
-          <a:bodyPr wrap="none" rtlCol="0">
-            <a:spAutoFit/>
-          </a:bodyPr>
-          <a:lstStyle/>
-          <a:p>
-            <a:r>
-              <a:rPr lang="de-DE" sz="800" dirty="0" err="1">
-                <a:solidFill>
-                  <a:schemeClr val="tx1">
-                    <a:lumMod val="50000"/>
-                    <a:lumOff val="50000"/>
-                  </a:schemeClr>
-                </a:solidFill>
-                <a:latin typeface="Roboto" panose="02000000000000000000" pitchFamily="2" charset="0"/>
-                <a:ea typeface="Roboto" panose="02000000000000000000" pitchFamily="2" charset="0"/>
-              </a:rPr>
-              <a:t>get_current_temperature</a:t>
-            </a:r>
-            <a:r>
-              <a:rPr lang="de-DE" sz="800" dirty="0">
-                <a:solidFill>
-                  <a:schemeClr val="tx1">
-                    <a:lumMod val="50000"/>
-                    <a:lumOff val="50000"/>
-                  </a:schemeClr>
-                </a:solidFill>
-                <a:latin typeface="Roboto" panose="02000000000000000000" pitchFamily="2" charset="0"/>
-                <a:ea typeface="Roboto" panose="02000000000000000000" pitchFamily="2" charset="0"/>
-              </a:rPr>
-              <a:t>()</a:t>
-            </a:r>
-          </a:p>
-          <a:p>
-            <a:r>
-              <a:rPr lang="de-DE" sz="800" dirty="0">
-                <a:solidFill>
-                  <a:schemeClr val="tx1">
-                    <a:lumMod val="50000"/>
-                    <a:lumOff val="50000"/>
-                  </a:schemeClr>
-                </a:solidFill>
-                <a:latin typeface="Roboto" panose="02000000000000000000" pitchFamily="2" charset="0"/>
-                <a:ea typeface="Roboto" panose="02000000000000000000" pitchFamily="2" charset="0"/>
-              </a:rPr>
-              <a:t>update()</a:t>
-            </a:r>
-            <a:endParaRPr lang="en-US" sz="800" dirty="0">
-              <a:solidFill>
-                <a:schemeClr val="tx1">
-                  <a:lumMod val="50000"/>
-                  <a:lumOff val="50000"/>
-                </a:schemeClr>
-              </a:solidFill>
-              <a:latin typeface="Roboto" panose="02000000000000000000" pitchFamily="2" charset="0"/>
-              <a:ea typeface="Roboto" panose="02000000000000000000" pitchFamily="2" charset="0"/>
-            </a:endParaRPr>
-          </a:p>
-          <a:p>
-            <a:r>
-              <a:rPr lang="en-US" sz="800" dirty="0" err="1">
-                <a:solidFill>
-                  <a:schemeClr val="tx1">
-                    <a:lumMod val="50000"/>
-                    <a:lumOff val="50000"/>
-                  </a:schemeClr>
-                </a:solidFill>
-                <a:latin typeface="Roboto" panose="02000000000000000000" pitchFamily="2" charset="0"/>
-                <a:ea typeface="Roboto" panose="02000000000000000000" pitchFamily="2" charset="0"/>
-              </a:rPr>
-              <a:t>get_temperature_history</a:t>
-            </a:r>
-            <a:r>
-              <a:rPr lang="en-US" sz="800" dirty="0">
-                <a:solidFill>
-                  <a:schemeClr val="tx1">
-                    <a:lumMod val="50000"/>
-                    <a:lumOff val="50000"/>
-                  </a:schemeClr>
-                </a:solidFill>
-                <a:latin typeface="Roboto" panose="02000000000000000000" pitchFamily="2" charset="0"/>
-                <a:ea typeface="Roboto" panose="02000000000000000000" pitchFamily="2" charset="0"/>
-              </a:rPr>
-              <a:t>(int seconds)</a:t>
-            </a:r>
-          </a:p>
-          <a:p>
-            <a:r>
-              <a:rPr lang="en-US" sz="800" dirty="0" err="1">
-                <a:solidFill>
-                  <a:schemeClr val="tx1">
-                    <a:lumMod val="50000"/>
-                    <a:lumOff val="50000"/>
-                  </a:schemeClr>
-                </a:solidFill>
-                <a:latin typeface="Roboto" panose="02000000000000000000" pitchFamily="2" charset="0"/>
-                <a:ea typeface="Roboto" panose="02000000000000000000" pitchFamily="2" charset="0"/>
-              </a:rPr>
-              <a:t>set_update_interval</a:t>
-            </a:r>
-            <a:r>
-              <a:rPr lang="en-US" sz="800" dirty="0">
-                <a:solidFill>
-                  <a:schemeClr val="tx1">
-                    <a:lumMod val="50000"/>
-                    <a:lumOff val="50000"/>
-                  </a:schemeClr>
-                </a:solidFill>
-                <a:latin typeface="Roboto" panose="02000000000000000000" pitchFamily="2" charset="0"/>
-                <a:ea typeface="Roboto" panose="02000000000000000000" pitchFamily="2" charset="0"/>
-              </a:rPr>
-              <a:t>(int seconds)</a:t>
-            </a:r>
-          </a:p>
-          <a:p>
-            <a:r>
-              <a:rPr lang="en-US" sz="800" dirty="0" err="1">
-                <a:solidFill>
-                  <a:schemeClr val="tx1">
-                    <a:lumMod val="50000"/>
-                    <a:lumOff val="50000"/>
-                  </a:schemeClr>
-                </a:solidFill>
-                <a:latin typeface="Roboto" panose="02000000000000000000" pitchFamily="2" charset="0"/>
-                <a:ea typeface="Roboto" panose="02000000000000000000" pitchFamily="2" charset="0"/>
-              </a:rPr>
-              <a:t>register_status</a:t>
-            </a:r>
-            <a:r>
-              <a:rPr lang="en-US" sz="800" dirty="0">
-                <a:solidFill>
-                  <a:schemeClr val="tx1">
-                    <a:lumMod val="50000"/>
-                    <a:lumOff val="50000"/>
-                  </a:schemeClr>
-                </a:solidFill>
-                <a:latin typeface="Roboto" panose="02000000000000000000" pitchFamily="2" charset="0"/>
-                <a:ea typeface="Roboto" panose="02000000000000000000" pitchFamily="2" charset="0"/>
-              </a:rPr>
-              <a:t>()</a:t>
-            </a:r>
-          </a:p>
-        </p:txBody>
-      </p:sp>
-      <p:sp>
-        <p:nvSpPr>
-          <p:cNvPr id="33" name="Textfeld 32">
-            <a:extLst>
-              <a:ext uri="{FF2B5EF4-FFF2-40B4-BE49-F238E27FC236}">
-                <a16:creationId xmlns:a16="http://schemas.microsoft.com/office/drawing/2014/main" id="{8B579EB5-1178-E524-B50D-219B61A438FF}"/>
-              </a:ext>
-            </a:extLst>
-          </p:cNvPr>
-          <p:cNvSpPr txBox="1"/>
-          <p:nvPr/>
-        </p:nvSpPr>
-        <p:spPr>
-          <a:xfrm>
-            <a:off x="6670864" y="1927175"/>
-            <a:ext cx="1907895" cy="584775"/>
-          </a:xfrm>
-          <a:prstGeom prst="rect">
-            <a:avLst/>
-          </a:prstGeom>
-          <a:noFill/>
-        </p:spPr>
-        <p:txBody>
-          <a:bodyPr wrap="none" rtlCol="0">
-            <a:spAutoFit/>
-          </a:bodyPr>
-          <a:lstStyle/>
-          <a:p>
-            <a:r>
-              <a:rPr lang="de-DE" sz="800" dirty="0" err="1">
-                <a:solidFill>
-                  <a:schemeClr val="tx1">
-                    <a:lumMod val="50000"/>
-                    <a:lumOff val="50000"/>
-                  </a:schemeClr>
-                </a:solidFill>
-                <a:latin typeface="Roboto" panose="02000000000000000000" pitchFamily="2" charset="0"/>
-                <a:ea typeface="Roboto" panose="02000000000000000000" pitchFamily="2" charset="0"/>
-              </a:rPr>
-              <a:t>get_current_temperature</a:t>
-            </a:r>
-            <a:r>
-              <a:rPr lang="de-DE" sz="800" dirty="0">
-                <a:solidFill>
-                  <a:schemeClr val="tx1">
-                    <a:lumMod val="50000"/>
-                    <a:lumOff val="50000"/>
-                  </a:schemeClr>
-                </a:solidFill>
-                <a:latin typeface="Roboto" panose="02000000000000000000" pitchFamily="2" charset="0"/>
-                <a:ea typeface="Roboto" panose="02000000000000000000" pitchFamily="2" charset="0"/>
-              </a:rPr>
-              <a:t>()</a:t>
-            </a:r>
-          </a:p>
-          <a:p>
-            <a:r>
-              <a:rPr lang="de-DE" sz="800" dirty="0">
-                <a:solidFill>
-                  <a:schemeClr val="tx1">
-                    <a:lumMod val="50000"/>
-                    <a:lumOff val="50000"/>
-                  </a:schemeClr>
-                </a:solidFill>
-                <a:latin typeface="Roboto" panose="02000000000000000000" pitchFamily="2" charset="0"/>
-                <a:ea typeface="Roboto" panose="02000000000000000000" pitchFamily="2" charset="0"/>
-              </a:rPr>
-              <a:t>update()</a:t>
-            </a:r>
-            <a:endParaRPr lang="en-US" sz="800" dirty="0">
-              <a:solidFill>
-                <a:schemeClr val="tx1">
-                  <a:lumMod val="50000"/>
-                  <a:lumOff val="50000"/>
-                </a:schemeClr>
-              </a:solidFill>
-              <a:latin typeface="Roboto" panose="02000000000000000000" pitchFamily="2" charset="0"/>
-              <a:ea typeface="Roboto" panose="02000000000000000000" pitchFamily="2" charset="0"/>
-            </a:endParaRPr>
-          </a:p>
-          <a:p>
-            <a:r>
-              <a:rPr lang="en-US" sz="800" dirty="0" err="1">
-                <a:solidFill>
-                  <a:schemeClr val="tx1">
-                    <a:lumMod val="50000"/>
-                    <a:lumOff val="50000"/>
-                  </a:schemeClr>
-                </a:solidFill>
-                <a:latin typeface="Roboto" panose="02000000000000000000" pitchFamily="2" charset="0"/>
-                <a:ea typeface="Roboto" panose="02000000000000000000" pitchFamily="2" charset="0"/>
-              </a:rPr>
-              <a:t>Get_temperature_history</a:t>
-            </a:r>
-            <a:r>
-              <a:rPr lang="en-US" sz="800" dirty="0">
-                <a:solidFill>
-                  <a:schemeClr val="tx1">
-                    <a:lumMod val="50000"/>
-                    <a:lumOff val="50000"/>
-                  </a:schemeClr>
-                </a:solidFill>
-                <a:latin typeface="Roboto" panose="02000000000000000000" pitchFamily="2" charset="0"/>
-                <a:ea typeface="Roboto" panose="02000000000000000000" pitchFamily="2" charset="0"/>
-              </a:rPr>
-              <a:t>(int seconds)</a:t>
-            </a:r>
-          </a:p>
-          <a:p>
-            <a:r>
-              <a:rPr lang="en-US" sz="800" dirty="0" err="1">
-                <a:solidFill>
-                  <a:schemeClr val="tx1">
-                    <a:lumMod val="50000"/>
-                    <a:lumOff val="50000"/>
-                  </a:schemeClr>
-                </a:solidFill>
-                <a:latin typeface="Roboto" panose="02000000000000000000" pitchFamily="2" charset="0"/>
-                <a:ea typeface="Roboto" panose="02000000000000000000" pitchFamily="2" charset="0"/>
-              </a:rPr>
-              <a:t>Set_update_interval</a:t>
-            </a:r>
-            <a:r>
-              <a:rPr lang="en-US" sz="800" dirty="0">
-                <a:solidFill>
-                  <a:schemeClr val="tx1">
-                    <a:lumMod val="50000"/>
-                    <a:lumOff val="50000"/>
-                  </a:schemeClr>
-                </a:solidFill>
-                <a:latin typeface="Roboto" panose="02000000000000000000" pitchFamily="2" charset="0"/>
-                <a:ea typeface="Roboto" panose="02000000000000000000" pitchFamily="2" charset="0"/>
-              </a:rPr>
-              <a:t>(int seconds)</a:t>
-            </a:r>
-          </a:p>
-        </p:txBody>
-      </p:sp>
-      <p:sp>
-        <p:nvSpPr>
-          <p:cNvPr id="35" name="Rechteck 34">
-            <a:extLst>
-              <a:ext uri="{FF2B5EF4-FFF2-40B4-BE49-F238E27FC236}">
-                <a16:creationId xmlns:a16="http://schemas.microsoft.com/office/drawing/2014/main" id="{28B42AFE-8F8D-4320-73A7-A6C481BBF3DF}"/>
-              </a:ext>
-            </a:extLst>
-          </p:cNvPr>
-          <p:cNvSpPr/>
-          <p:nvPr/>
-        </p:nvSpPr>
-        <p:spPr>
-          <a:xfrm>
-            <a:off x="4273923" y="4528934"/>
-            <a:ext cx="1358153" cy="766483"/>
-          </a:xfrm>
-          <a:prstGeom prst="rect">
-            <a:avLst/>
-          </a:prstGeom>
-          <a:solidFill>
-            <a:srgbClr val="7030A0"/>
-          </a:solidFill>
-          <a:ln>
-            <a:noFill/>
-          </a:ln>
-        </p:spPr>
-        <p:style>
-          <a:lnRef idx="2">
-            <a:schemeClr val="accent1">
-              <a:shade val="15000"/>
-            </a:schemeClr>
-          </a:lnRef>
-          <a:fillRef idx="1">
-            <a:schemeClr val="accent1"/>
-          </a:fillRef>
-          <a:effectRef idx="0">
-            <a:schemeClr val="accent1"/>
-          </a:effectRef>
-          <a:fontRef idx="minor">
-            <a:schemeClr val="lt1"/>
-          </a:fontRef>
-        </p:style>
-        <p:txBody>
-          <a:bodyPr rtlCol="0" anchor="ctr"/>
-          <a:lstStyle/>
-          <a:p>
-            <a:pPr algn="ctr"/>
-            <a:r>
-              <a:rPr lang="de-DE" sz="1200" dirty="0">
-                <a:latin typeface="Roboto" panose="02000000000000000000" pitchFamily="2" charset="0"/>
-                <a:ea typeface="Roboto" panose="02000000000000000000" pitchFamily="2" charset="0"/>
-              </a:rPr>
-              <a:t>Admin Frontend</a:t>
-            </a:r>
-            <a:endParaRPr lang="en-US" sz="1200" dirty="0">
-              <a:latin typeface="Roboto" panose="02000000000000000000" pitchFamily="2" charset="0"/>
-              <a:ea typeface="Roboto" panose="02000000000000000000" pitchFamily="2" charset="0"/>
-            </a:endParaRPr>
-          </a:p>
-        </p:txBody>
-      </p:sp>
-      <p:cxnSp>
-        <p:nvCxnSpPr>
-          <p:cNvPr id="37" name="Gerade Verbindung mit Pfeil 36">
-            <a:extLst>
-              <a:ext uri="{FF2B5EF4-FFF2-40B4-BE49-F238E27FC236}">
-                <a16:creationId xmlns:a16="http://schemas.microsoft.com/office/drawing/2014/main" id="{E991BB9C-3C48-0A80-C74D-914FD3D2A523}"/>
-              </a:ext>
-            </a:extLst>
-          </p:cNvPr>
-          <p:cNvCxnSpPr>
-            <a:stCxn id="7" idx="3"/>
-            <a:endCxn id="35" idx="0"/>
-          </p:cNvCxnSpPr>
-          <p:nvPr/>
-        </p:nvCxnSpPr>
-        <p:spPr>
-          <a:xfrm>
-            <a:off x="4953000" y="2628900"/>
-            <a:ext cx="0" cy="1900034"/>
-          </a:xfrm>
-          <a:prstGeom prst="straightConnector1">
-            <a:avLst/>
-          </a:prstGeom>
-          <a:ln>
-            <a:headEnd type="triangle"/>
-            <a:tailEnd type="triangle"/>
-          </a:ln>
-        </p:spPr>
-        <p:style>
-          <a:lnRef idx="2">
-            <a:schemeClr val="accent1"/>
-          </a:lnRef>
-          <a:fillRef idx="0">
-            <a:schemeClr val="accent1"/>
-          </a:fillRef>
-          <a:effectRef idx="1">
-            <a:schemeClr val="accent1"/>
-          </a:effectRef>
-          <a:fontRef idx="minor">
-            <a:schemeClr val="tx1"/>
-          </a:fontRef>
-        </p:style>
-      </p:cxnSp>
-      <p:sp>
-        <p:nvSpPr>
-          <p:cNvPr id="40" name="Textfeld 39">
-            <a:extLst>
-              <a:ext uri="{FF2B5EF4-FFF2-40B4-BE49-F238E27FC236}">
-                <a16:creationId xmlns:a16="http://schemas.microsoft.com/office/drawing/2014/main" id="{987E39FD-8329-3880-83BF-BBBDCF14C6DC}"/>
-              </a:ext>
-            </a:extLst>
-          </p:cNvPr>
-          <p:cNvSpPr txBox="1"/>
-          <p:nvPr/>
-        </p:nvSpPr>
-        <p:spPr>
-          <a:xfrm>
-            <a:off x="4952999" y="3330232"/>
-            <a:ext cx="1167307" cy="1077218"/>
-          </a:xfrm>
-          <a:prstGeom prst="rect">
-            <a:avLst/>
-          </a:prstGeom>
-          <a:noFill/>
-        </p:spPr>
-        <p:txBody>
-          <a:bodyPr wrap="none" rtlCol="0">
-            <a:spAutoFit/>
-          </a:bodyPr>
-          <a:lstStyle/>
-          <a:p>
-            <a:r>
-              <a:rPr lang="de-DE" sz="800" dirty="0" err="1">
-                <a:solidFill>
-                  <a:schemeClr val="tx1">
-                    <a:lumMod val="50000"/>
-                    <a:lumOff val="50000"/>
-                  </a:schemeClr>
-                </a:solidFill>
-                <a:latin typeface="Roboto" panose="02000000000000000000" pitchFamily="2" charset="0"/>
-                <a:ea typeface="Roboto" panose="02000000000000000000" pitchFamily="2" charset="0"/>
-              </a:rPr>
-              <a:t>add_new_user</a:t>
-            </a:r>
-            <a:r>
-              <a:rPr lang="de-DE" sz="800" dirty="0">
-                <a:solidFill>
-                  <a:schemeClr val="tx1">
-                    <a:lumMod val="50000"/>
-                    <a:lumOff val="50000"/>
-                  </a:schemeClr>
-                </a:solidFill>
-                <a:latin typeface="Roboto" panose="02000000000000000000" pitchFamily="2" charset="0"/>
-                <a:ea typeface="Roboto" panose="02000000000000000000" pitchFamily="2" charset="0"/>
-              </a:rPr>
-              <a:t>(</a:t>
-            </a:r>
-            <a:r>
-              <a:rPr lang="de-DE" sz="800" dirty="0" err="1">
-                <a:solidFill>
-                  <a:schemeClr val="tx1">
-                    <a:lumMod val="50000"/>
-                    <a:lumOff val="50000"/>
-                  </a:schemeClr>
-                </a:solidFill>
-                <a:latin typeface="Roboto" panose="02000000000000000000" pitchFamily="2" charset="0"/>
-                <a:ea typeface="Roboto" panose="02000000000000000000" pitchFamily="2" charset="0"/>
-              </a:rPr>
-              <a:t>id</a:t>
-            </a:r>
-            <a:r>
-              <a:rPr lang="de-DE" sz="800" dirty="0">
-                <a:solidFill>
-                  <a:schemeClr val="tx1">
-                    <a:lumMod val="50000"/>
-                    <a:lumOff val="50000"/>
-                  </a:schemeClr>
-                </a:solidFill>
-                <a:latin typeface="Roboto" panose="02000000000000000000" pitchFamily="2" charset="0"/>
-                <a:ea typeface="Roboto" panose="02000000000000000000" pitchFamily="2" charset="0"/>
-              </a:rPr>
-              <a:t>)</a:t>
-            </a:r>
-          </a:p>
-          <a:p>
-            <a:r>
-              <a:rPr lang="de-DE" sz="800" dirty="0" err="1">
-                <a:solidFill>
-                  <a:schemeClr val="tx1">
-                    <a:lumMod val="50000"/>
-                    <a:lumOff val="50000"/>
-                  </a:schemeClr>
-                </a:solidFill>
-                <a:latin typeface="Roboto" panose="02000000000000000000" pitchFamily="2" charset="0"/>
-                <a:ea typeface="Roboto" panose="02000000000000000000" pitchFamily="2" charset="0"/>
-              </a:rPr>
-              <a:t>add_new_source</a:t>
-            </a:r>
-            <a:r>
-              <a:rPr lang="de-DE" sz="800" dirty="0">
-                <a:solidFill>
-                  <a:schemeClr val="tx1">
-                    <a:lumMod val="50000"/>
-                    <a:lumOff val="50000"/>
-                  </a:schemeClr>
-                </a:solidFill>
-                <a:latin typeface="Roboto" panose="02000000000000000000" pitchFamily="2" charset="0"/>
-                <a:ea typeface="Roboto" panose="02000000000000000000" pitchFamily="2" charset="0"/>
-              </a:rPr>
-              <a:t>(</a:t>
-            </a:r>
-            <a:r>
-              <a:rPr lang="de-DE" sz="800" dirty="0" err="1">
-                <a:solidFill>
-                  <a:schemeClr val="tx1">
-                    <a:lumMod val="50000"/>
-                    <a:lumOff val="50000"/>
-                  </a:schemeClr>
-                </a:solidFill>
-                <a:latin typeface="Roboto" panose="02000000000000000000" pitchFamily="2" charset="0"/>
-                <a:ea typeface="Roboto" panose="02000000000000000000" pitchFamily="2" charset="0"/>
-              </a:rPr>
-              <a:t>id</a:t>
-            </a:r>
-            <a:r>
-              <a:rPr lang="de-DE" sz="800" dirty="0">
-                <a:solidFill>
-                  <a:schemeClr val="tx1">
-                    <a:lumMod val="50000"/>
-                    <a:lumOff val="50000"/>
-                  </a:schemeClr>
-                </a:solidFill>
-                <a:latin typeface="Roboto" panose="02000000000000000000" pitchFamily="2" charset="0"/>
-                <a:ea typeface="Roboto" panose="02000000000000000000" pitchFamily="2" charset="0"/>
-              </a:rPr>
-              <a:t>)</a:t>
-            </a:r>
-          </a:p>
-          <a:p>
-            <a:r>
-              <a:rPr lang="de-DE" sz="800" dirty="0" err="1">
-                <a:solidFill>
-                  <a:schemeClr val="tx1">
-                    <a:lumMod val="50000"/>
-                    <a:lumOff val="50000"/>
-                  </a:schemeClr>
-                </a:solidFill>
-                <a:latin typeface="Roboto" panose="02000000000000000000" pitchFamily="2" charset="0"/>
-                <a:ea typeface="Roboto" panose="02000000000000000000" pitchFamily="2" charset="0"/>
-              </a:rPr>
-              <a:t>add_link</a:t>
-            </a:r>
-            <a:r>
-              <a:rPr lang="de-DE" sz="800" dirty="0">
-                <a:solidFill>
-                  <a:schemeClr val="tx1">
-                    <a:lumMod val="50000"/>
-                    <a:lumOff val="50000"/>
-                  </a:schemeClr>
-                </a:solidFill>
-                <a:latin typeface="Roboto" panose="02000000000000000000" pitchFamily="2" charset="0"/>
-                <a:ea typeface="Roboto" panose="02000000000000000000" pitchFamily="2" charset="0"/>
-              </a:rPr>
-              <a:t>(</a:t>
-            </a:r>
-            <a:r>
-              <a:rPr lang="de-DE" sz="800" dirty="0" err="1">
-                <a:solidFill>
-                  <a:schemeClr val="tx1">
-                    <a:lumMod val="50000"/>
-                    <a:lumOff val="50000"/>
-                  </a:schemeClr>
-                </a:solidFill>
-                <a:latin typeface="Roboto" panose="02000000000000000000" pitchFamily="2" charset="0"/>
-                <a:ea typeface="Roboto" panose="02000000000000000000" pitchFamily="2" charset="0"/>
-              </a:rPr>
-              <a:t>id</a:t>
-            </a:r>
-            <a:r>
-              <a:rPr lang="de-DE" sz="800" dirty="0">
-                <a:solidFill>
-                  <a:schemeClr val="tx1">
-                    <a:lumMod val="50000"/>
-                    <a:lumOff val="50000"/>
-                  </a:schemeClr>
-                </a:solidFill>
-                <a:latin typeface="Roboto" panose="02000000000000000000" pitchFamily="2" charset="0"/>
-                <a:ea typeface="Roboto" panose="02000000000000000000" pitchFamily="2" charset="0"/>
-              </a:rPr>
-              <a:t>, </a:t>
-            </a:r>
-            <a:r>
-              <a:rPr lang="de-DE" sz="800" dirty="0" err="1">
-                <a:solidFill>
-                  <a:schemeClr val="tx1">
-                    <a:lumMod val="50000"/>
-                    <a:lumOff val="50000"/>
-                  </a:schemeClr>
-                </a:solidFill>
-                <a:latin typeface="Roboto" panose="02000000000000000000" pitchFamily="2" charset="0"/>
-                <a:ea typeface="Roboto" panose="02000000000000000000" pitchFamily="2" charset="0"/>
-              </a:rPr>
-              <a:t>id</a:t>
-            </a:r>
-            <a:r>
-              <a:rPr lang="de-DE" sz="800" dirty="0">
-                <a:solidFill>
-                  <a:schemeClr val="tx1">
-                    <a:lumMod val="50000"/>
-                    <a:lumOff val="50000"/>
-                  </a:schemeClr>
-                </a:solidFill>
-                <a:latin typeface="Roboto" panose="02000000000000000000" pitchFamily="2" charset="0"/>
-                <a:ea typeface="Roboto" panose="02000000000000000000" pitchFamily="2" charset="0"/>
-              </a:rPr>
-              <a:t>)</a:t>
-            </a:r>
-          </a:p>
-          <a:p>
-            <a:r>
-              <a:rPr lang="de-DE" sz="800" dirty="0" err="1">
-                <a:solidFill>
-                  <a:schemeClr val="tx1">
-                    <a:lumMod val="50000"/>
-                    <a:lumOff val="50000"/>
-                  </a:schemeClr>
-                </a:solidFill>
-                <a:latin typeface="Roboto" panose="02000000000000000000" pitchFamily="2" charset="0"/>
-                <a:ea typeface="Roboto" panose="02000000000000000000" pitchFamily="2" charset="0"/>
-              </a:rPr>
-              <a:t>remove_user</a:t>
-            </a:r>
-            <a:r>
-              <a:rPr lang="de-DE" sz="800" dirty="0">
-                <a:solidFill>
-                  <a:schemeClr val="tx1">
-                    <a:lumMod val="50000"/>
-                    <a:lumOff val="50000"/>
-                  </a:schemeClr>
-                </a:solidFill>
-                <a:latin typeface="Roboto" panose="02000000000000000000" pitchFamily="2" charset="0"/>
-                <a:ea typeface="Roboto" panose="02000000000000000000" pitchFamily="2" charset="0"/>
-              </a:rPr>
-              <a:t>(</a:t>
-            </a:r>
-            <a:r>
-              <a:rPr lang="de-DE" sz="800" dirty="0" err="1">
-                <a:solidFill>
-                  <a:schemeClr val="tx1">
-                    <a:lumMod val="50000"/>
-                    <a:lumOff val="50000"/>
-                  </a:schemeClr>
-                </a:solidFill>
-                <a:latin typeface="Roboto" panose="02000000000000000000" pitchFamily="2" charset="0"/>
-                <a:ea typeface="Roboto" panose="02000000000000000000" pitchFamily="2" charset="0"/>
-              </a:rPr>
-              <a:t>id</a:t>
-            </a:r>
-            <a:r>
-              <a:rPr lang="de-DE" sz="800" dirty="0">
-                <a:solidFill>
-                  <a:schemeClr val="tx1">
-                    <a:lumMod val="50000"/>
-                    <a:lumOff val="50000"/>
-                  </a:schemeClr>
-                </a:solidFill>
-                <a:latin typeface="Roboto" panose="02000000000000000000" pitchFamily="2" charset="0"/>
-                <a:ea typeface="Roboto" panose="02000000000000000000" pitchFamily="2" charset="0"/>
-              </a:rPr>
-              <a:t>)</a:t>
-            </a:r>
-          </a:p>
-          <a:p>
-            <a:r>
-              <a:rPr lang="de-DE" sz="800" dirty="0" err="1">
-                <a:solidFill>
-                  <a:schemeClr val="tx1">
-                    <a:lumMod val="50000"/>
-                    <a:lumOff val="50000"/>
-                  </a:schemeClr>
-                </a:solidFill>
-                <a:latin typeface="Roboto" panose="02000000000000000000" pitchFamily="2" charset="0"/>
-                <a:ea typeface="Roboto" panose="02000000000000000000" pitchFamily="2" charset="0"/>
-              </a:rPr>
-              <a:t>remove_source</a:t>
-            </a:r>
-            <a:r>
-              <a:rPr lang="de-DE" sz="800" dirty="0">
-                <a:solidFill>
-                  <a:schemeClr val="tx1">
-                    <a:lumMod val="50000"/>
-                    <a:lumOff val="50000"/>
-                  </a:schemeClr>
-                </a:solidFill>
-                <a:latin typeface="Roboto" panose="02000000000000000000" pitchFamily="2" charset="0"/>
-                <a:ea typeface="Roboto" panose="02000000000000000000" pitchFamily="2" charset="0"/>
-              </a:rPr>
-              <a:t>(</a:t>
-            </a:r>
-            <a:r>
-              <a:rPr lang="de-DE" sz="800" dirty="0" err="1">
-                <a:solidFill>
-                  <a:schemeClr val="tx1">
-                    <a:lumMod val="50000"/>
-                    <a:lumOff val="50000"/>
-                  </a:schemeClr>
-                </a:solidFill>
-                <a:latin typeface="Roboto" panose="02000000000000000000" pitchFamily="2" charset="0"/>
-                <a:ea typeface="Roboto" panose="02000000000000000000" pitchFamily="2" charset="0"/>
-              </a:rPr>
-              <a:t>id</a:t>
-            </a:r>
-            <a:r>
-              <a:rPr lang="de-DE" sz="800" dirty="0">
-                <a:solidFill>
-                  <a:schemeClr val="tx1">
-                    <a:lumMod val="50000"/>
-                    <a:lumOff val="50000"/>
-                  </a:schemeClr>
-                </a:solidFill>
-                <a:latin typeface="Roboto" panose="02000000000000000000" pitchFamily="2" charset="0"/>
-                <a:ea typeface="Roboto" panose="02000000000000000000" pitchFamily="2" charset="0"/>
-              </a:rPr>
-              <a:t>)</a:t>
-            </a:r>
-          </a:p>
-          <a:p>
-            <a:r>
-              <a:rPr lang="de-DE" sz="800" dirty="0" err="1">
-                <a:solidFill>
-                  <a:schemeClr val="tx1">
-                    <a:lumMod val="50000"/>
-                    <a:lumOff val="50000"/>
-                  </a:schemeClr>
-                </a:solidFill>
-                <a:latin typeface="Roboto" panose="02000000000000000000" pitchFamily="2" charset="0"/>
-                <a:ea typeface="Roboto" panose="02000000000000000000" pitchFamily="2" charset="0"/>
-              </a:rPr>
-              <a:t>remove_link</a:t>
-            </a:r>
-            <a:r>
-              <a:rPr lang="de-DE" sz="800" dirty="0">
-                <a:solidFill>
-                  <a:schemeClr val="tx1">
-                    <a:lumMod val="50000"/>
-                    <a:lumOff val="50000"/>
-                  </a:schemeClr>
-                </a:solidFill>
-                <a:latin typeface="Roboto" panose="02000000000000000000" pitchFamily="2" charset="0"/>
-                <a:ea typeface="Roboto" panose="02000000000000000000" pitchFamily="2" charset="0"/>
-              </a:rPr>
-              <a:t>(</a:t>
-            </a:r>
-            <a:r>
-              <a:rPr lang="de-DE" sz="800" dirty="0" err="1">
-                <a:solidFill>
-                  <a:schemeClr val="tx1">
-                    <a:lumMod val="50000"/>
-                    <a:lumOff val="50000"/>
-                  </a:schemeClr>
-                </a:solidFill>
-                <a:latin typeface="Roboto" panose="02000000000000000000" pitchFamily="2" charset="0"/>
-                <a:ea typeface="Roboto" panose="02000000000000000000" pitchFamily="2" charset="0"/>
-              </a:rPr>
-              <a:t>id</a:t>
-            </a:r>
-            <a:r>
-              <a:rPr lang="de-DE" sz="800" dirty="0">
-                <a:solidFill>
-                  <a:schemeClr val="tx1">
-                    <a:lumMod val="50000"/>
-                    <a:lumOff val="50000"/>
-                  </a:schemeClr>
-                </a:solidFill>
-                <a:latin typeface="Roboto" panose="02000000000000000000" pitchFamily="2" charset="0"/>
-                <a:ea typeface="Roboto" panose="02000000000000000000" pitchFamily="2" charset="0"/>
-              </a:rPr>
-              <a:t>, </a:t>
-            </a:r>
-            <a:r>
-              <a:rPr lang="de-DE" sz="800" dirty="0" err="1">
-                <a:solidFill>
-                  <a:schemeClr val="tx1">
-                    <a:lumMod val="50000"/>
-                    <a:lumOff val="50000"/>
-                  </a:schemeClr>
-                </a:solidFill>
-                <a:latin typeface="Roboto" panose="02000000000000000000" pitchFamily="2" charset="0"/>
-                <a:ea typeface="Roboto" panose="02000000000000000000" pitchFamily="2" charset="0"/>
-              </a:rPr>
-              <a:t>id</a:t>
-            </a:r>
-            <a:r>
-              <a:rPr lang="de-DE" sz="800" dirty="0">
-                <a:solidFill>
-                  <a:schemeClr val="tx1">
-                    <a:lumMod val="50000"/>
-                    <a:lumOff val="50000"/>
-                  </a:schemeClr>
-                </a:solidFill>
-                <a:latin typeface="Roboto" panose="02000000000000000000" pitchFamily="2" charset="0"/>
-                <a:ea typeface="Roboto" panose="02000000000000000000" pitchFamily="2" charset="0"/>
-              </a:rPr>
-              <a:t>)</a:t>
-            </a:r>
-            <a:endParaRPr lang="en-US" sz="800" dirty="0">
-              <a:solidFill>
-                <a:schemeClr val="tx1">
-                  <a:lumMod val="50000"/>
-                  <a:lumOff val="50000"/>
-                </a:schemeClr>
-              </a:solidFill>
-              <a:latin typeface="Roboto" panose="02000000000000000000" pitchFamily="2" charset="0"/>
-              <a:ea typeface="Roboto" panose="02000000000000000000" pitchFamily="2" charset="0"/>
-            </a:endParaRPr>
-          </a:p>
-          <a:p>
-            <a:r>
-              <a:rPr lang="en-US" sz="800" dirty="0">
-                <a:solidFill>
-                  <a:schemeClr val="tx1">
-                    <a:lumMod val="50000"/>
-                    <a:lumOff val="50000"/>
-                  </a:schemeClr>
-                </a:solidFill>
-                <a:latin typeface="Roboto" panose="02000000000000000000" pitchFamily="2" charset="0"/>
-                <a:ea typeface="Roboto" panose="02000000000000000000" pitchFamily="2" charset="0"/>
-              </a:rPr>
-              <a:t>backup()</a:t>
-            </a:r>
-          </a:p>
-          <a:p>
-            <a:r>
-              <a:rPr lang="en-US" sz="800" dirty="0" err="1">
-                <a:solidFill>
-                  <a:schemeClr val="tx1">
-                    <a:lumMod val="50000"/>
-                    <a:lumOff val="50000"/>
-                  </a:schemeClr>
-                </a:solidFill>
-                <a:latin typeface="Roboto" panose="02000000000000000000" pitchFamily="2" charset="0"/>
-                <a:ea typeface="Roboto" panose="02000000000000000000" pitchFamily="2" charset="0"/>
-              </a:rPr>
-              <a:t>load_backup</a:t>
-            </a:r>
-            <a:r>
-              <a:rPr lang="en-US" sz="800" dirty="0">
-                <a:solidFill>
-                  <a:schemeClr val="tx1">
-                    <a:lumMod val="50000"/>
-                    <a:lumOff val="50000"/>
-                  </a:schemeClr>
-                </a:solidFill>
-                <a:latin typeface="Roboto" panose="02000000000000000000" pitchFamily="2" charset="0"/>
-                <a:ea typeface="Roboto" panose="02000000000000000000" pitchFamily="2" charset="0"/>
-              </a:rPr>
-              <a:t>(backup)</a:t>
-            </a:r>
-          </a:p>
-        </p:txBody>
-      </p:sp>
-      <p:sp>
-        <p:nvSpPr>
-          <p:cNvPr id="42" name="Rechteck 41">
-            <a:extLst>
-              <a:ext uri="{FF2B5EF4-FFF2-40B4-BE49-F238E27FC236}">
-                <a16:creationId xmlns:a16="http://schemas.microsoft.com/office/drawing/2014/main" id="{260F3848-01B8-FF76-443E-08175FD0DAED}"/>
-              </a:ext>
-            </a:extLst>
-          </p:cNvPr>
-          <p:cNvSpPr/>
-          <p:nvPr/>
-        </p:nvSpPr>
-        <p:spPr>
-          <a:xfrm>
-            <a:off x="8137711" y="6545066"/>
-            <a:ext cx="1358153" cy="228600"/>
-          </a:xfrm>
-          <a:prstGeom prst="rect">
-            <a:avLst/>
-          </a:prstGeom>
-          <a:solidFill>
-            <a:srgbClr val="7030A0"/>
-          </a:solidFill>
-          <a:ln>
-            <a:noFill/>
-          </a:ln>
-        </p:spPr>
-        <p:style>
-          <a:lnRef idx="2">
-            <a:schemeClr val="accent1">
-              <a:shade val="15000"/>
-            </a:schemeClr>
-          </a:lnRef>
-          <a:fillRef idx="1">
-            <a:schemeClr val="accent1"/>
-          </a:fillRef>
-          <a:effectRef idx="0">
-            <a:schemeClr val="accent1"/>
-          </a:effectRef>
-          <a:fontRef idx="minor">
-            <a:schemeClr val="lt1"/>
-          </a:fontRef>
-        </p:style>
-        <p:txBody>
-          <a:bodyPr rtlCol="0" anchor="ctr"/>
-          <a:lstStyle/>
-          <a:p>
-            <a:pPr algn="ctr"/>
-            <a:r>
-              <a:rPr lang="de-DE" sz="1000" dirty="0">
-                <a:latin typeface="Roboto" panose="02000000000000000000" pitchFamily="2" charset="0"/>
-                <a:ea typeface="Roboto" panose="02000000000000000000" pitchFamily="2" charset="0"/>
-              </a:rPr>
-              <a:t>Web frontend</a:t>
-            </a:r>
-            <a:endParaRPr lang="en-US" sz="1000" dirty="0">
-              <a:latin typeface="Roboto" panose="02000000000000000000" pitchFamily="2" charset="0"/>
-              <a:ea typeface="Roboto" panose="02000000000000000000" pitchFamily="2" charset="0"/>
-            </a:endParaRPr>
-          </a:p>
-        </p:txBody>
-      </p:sp>
-      <p:pic>
-        <p:nvPicPr>
-          <p:cNvPr id="44" name="Grafik 43" descr="Zusammendrücken Vergrößern mit einfarbiger Füllung">
-            <a:extLst>
-              <a:ext uri="{FF2B5EF4-FFF2-40B4-BE49-F238E27FC236}">
-                <a16:creationId xmlns:a16="http://schemas.microsoft.com/office/drawing/2014/main" id="{E6F6B2CF-2426-4252-149C-D597D23C3789}"/>
-              </a:ext>
-            </a:extLst>
-          </p:cNvPr>
-          <p:cNvPicPr>
-            <a:picLocks noChangeAspect="1"/>
-          </p:cNvPicPr>
-          <p:nvPr/>
-        </p:nvPicPr>
-        <p:blipFill>
-          <a:blip r:embed="rId2">
-            <a:extLst>
-              <a:ext uri="{96DAC541-7B7A-43D3-8B79-37D633B846F1}">
-                <asvg:svgBlip xmlns:asvg="http://schemas.microsoft.com/office/drawing/2016/SVG/main" r:embed="rId3"/>
-              </a:ext>
-            </a:extLst>
-          </a:blip>
-          <a:stretch>
-            <a:fillRect/>
-          </a:stretch>
-        </p:blipFill>
-        <p:spPr>
-          <a:xfrm>
-            <a:off x="5228665" y="5033682"/>
-            <a:ext cx="593912" cy="593912"/>
-          </a:xfrm>
-          <a:prstGeom prst="rect">
-            <a:avLst/>
-          </a:prstGeom>
-        </p:spPr>
-      </p:pic>
       <p:pic>
         <p:nvPicPr>
           <p:cNvPr id="45" name="Grafik 44" descr="Zusammendrücken Vergrößern mit einfarbiger Füllung">
@@ -10752,10 +8454,10 @@
           <p:nvPr/>
         </p:nvPicPr>
         <p:blipFill>
-          <a:blip r:embed="rId2">
+          <a:blip>
             <a:extLst>
               <a:ext uri="{96DAC541-7B7A-43D3-8B79-37D633B846F1}">
-                <asvg:svgBlip xmlns:asvg="http://schemas.microsoft.com/office/drawing/2016/SVG/main" r:embed="rId3"/>
+                <asvg:svgBlip xmlns:asvg="http://schemas.microsoft.com/office/drawing/2016/SVG/main" r:embed="rId2"/>
               </a:ext>
             </a:extLst>
           </a:blip>
@@ -10788,10 +8490,10 @@
           <p:nvPr/>
         </p:nvPicPr>
         <p:blipFill>
-          <a:blip r:embed="rId2">
+          <a:blip>
             <a:extLst>
               <a:ext uri="{96DAC541-7B7A-43D3-8B79-37D633B846F1}">
-                <asvg:svgBlip xmlns:asvg="http://schemas.microsoft.com/office/drawing/2016/SVG/main" r:embed="rId3"/>
+                <asvg:svgBlip xmlns:asvg="http://schemas.microsoft.com/office/drawing/2016/SVG/main" r:embed="rId2"/>
               </a:ext>
             </a:extLst>
           </a:blip>
@@ -10823,8 +8525,8 @@
         </p:nvSpPr>
         <p:spPr>
           <a:xfrm>
-            <a:off x="4228679" y="1199693"/>
-            <a:ext cx="1448639" cy="554969"/>
+            <a:off x="4125794" y="1129552"/>
+            <a:ext cx="1654409" cy="766482"/>
           </a:xfrm>
           <a:prstGeom prst="ellipse">
             <a:avLst/>
@@ -10876,7 +8578,11 @@
             </a:r>
             <a:r>
               <a:rPr lang="de-DE" sz="1200" dirty="0"/>
-              <a:t> plan</a:t>
+              <a:t> plan: SQL and </a:t>
+            </a:r>
+            <a:r>
+              <a:rPr lang="de-DE" sz="1200" dirty="0" err="1"/>
+              <a:t>TypeScript</a:t>
             </a:r>
             <a:endParaRPr lang="en-US" sz="1200" dirty="0"/>
           </a:p>
@@ -10968,7 +8674,7 @@
         </p:nvSpPr>
         <p:spPr>
           <a:xfrm>
-            <a:off x="8219300" y="2648793"/>
+            <a:off x="6830684" y="3620354"/>
             <a:ext cx="1448639" cy="554969"/>
           </a:xfrm>
           <a:prstGeom prst="ellipse">
@@ -11008,196 +8714,46 @@
           <a:p>
             <a:pPr algn="ctr"/>
             <a:r>
+              <a:rPr lang="de-DE" sz="1200" dirty="0"/>
+              <a:t>Java-</a:t>
+            </a:r>
+            <a:r>
               <a:rPr lang="de-DE" sz="1200" dirty="0" err="1"/>
-              <a:t>tbd</a:t>
+              <a:t>based</a:t>
+            </a:r>
+            <a:r>
+              <a:rPr lang="de-DE" sz="1200" dirty="0"/>
+              <a:t> Android App</a:t>
             </a:r>
             <a:endParaRPr lang="en-US" sz="1200" dirty="0"/>
           </a:p>
         </p:txBody>
       </p:sp>
-    </p:spTree>
-    <p:extLst>
-      <p:ext uri="{BB962C8B-B14F-4D97-AF65-F5344CB8AC3E}">
-        <p14:creationId xmlns:p14="http://schemas.microsoft.com/office/powerpoint/2010/main" val="2270234790"/>
-      </p:ext>
-    </p:extLst>
-  </p:cSld>
-  <p:clrMapOvr>
-    <a:masterClrMapping/>
-  </p:clrMapOvr>
-</p:sld>
-</file>
-
-<file path=ppt/slides/slide5.xml><?xml version="1.0" encoding="utf-8"?>
-<p:sld xmlns:a="http://schemas.openxmlformats.org/drawingml/2006/main" xmlns:r="http://schemas.openxmlformats.org/officeDocument/2006/relationships" xmlns:p="http://schemas.openxmlformats.org/presentationml/2006/main">
-  <p:cSld>
-    <p:spTree>
-      <p:nvGrpSpPr>
-        <p:cNvPr id="1" name=""/>
-        <p:cNvGrpSpPr/>
-        <p:nvPr/>
-      </p:nvGrpSpPr>
-      <p:grpSpPr>
-        <a:xfrm>
-          <a:off x="0" y="0"/>
-          <a:ext cx="0" cy="0"/>
-          <a:chOff x="0" y="0"/>
-          <a:chExt cx="0" cy="0"/>
-        </a:xfrm>
-      </p:grpSpPr>
-      <p:sp>
-        <p:nvSpPr>
-          <p:cNvPr id="2" name="Titel 1">
+      <p:cxnSp>
+        <p:nvCxnSpPr>
+          <p:cNvPr id="16" name="Gerade Verbindung mit Pfeil 15">
             <a:extLst>
               <a:ext uri="{FF2B5EF4-FFF2-40B4-BE49-F238E27FC236}">
-                <a16:creationId xmlns:a16="http://schemas.microsoft.com/office/drawing/2014/main" id="{704ADB8F-D40B-8A0B-85C7-D97EB3FDE792}"/>
-              </a:ext>
-            </a:extLst>
-          </p:cNvPr>
-          <p:cNvSpPr>
-            <a:spLocks noGrp="1"/>
-          </p:cNvSpPr>
-          <p:nvPr>
-            <p:ph type="title"/>
-          </p:nvPr>
-        </p:nvSpPr>
-        <p:spPr/>
-        <p:txBody>
-          <a:bodyPr/>
-          <a:lstStyle/>
-          <a:p>
-            <a:r>
-              <a:rPr lang="de-DE" dirty="0" err="1"/>
-              <a:t>Local</a:t>
-            </a:r>
-            <a:r>
-              <a:rPr lang="de-DE" dirty="0"/>
-              <a:t> Kiln System</a:t>
-            </a:r>
-            <a:endParaRPr lang="en-US" dirty="0"/>
-          </a:p>
-        </p:txBody>
-      </p:sp>
-      <p:pic>
-        <p:nvPicPr>
-          <p:cNvPr id="4" name="Grafik 3">
-            <a:extLst>
-              <a:ext uri="{FF2B5EF4-FFF2-40B4-BE49-F238E27FC236}">
-                <a16:creationId xmlns:a16="http://schemas.microsoft.com/office/drawing/2014/main" id="{DFC4A6A4-567F-1F97-9E04-8DC97B5ED016}"/>
-              </a:ext>
-            </a:extLst>
-          </p:cNvPr>
-          <p:cNvPicPr>
-            <a:picLocks noChangeAspect="1"/>
-          </p:cNvPicPr>
-          <p:nvPr/>
-        </p:nvPicPr>
-        <p:blipFill>
-          <a:blip r:embed="rId2"/>
-          <a:stretch>
-            <a:fillRect/>
-          </a:stretch>
-        </p:blipFill>
-        <p:spPr>
-          <a:xfrm>
-            <a:off x="8315668" y="180170"/>
-            <a:ext cx="1386386" cy="1597404"/>
-          </a:xfrm>
-          <a:prstGeom prst="rect">
-            <a:avLst/>
-          </a:prstGeom>
-        </p:spPr>
-      </p:pic>
-      <p:sp>
-        <p:nvSpPr>
-          <p:cNvPr id="7" name="Zylinder 6">
-            <a:extLst>
-              <a:ext uri="{FF2B5EF4-FFF2-40B4-BE49-F238E27FC236}">
-                <a16:creationId xmlns:a16="http://schemas.microsoft.com/office/drawing/2014/main" id="{64F91DEF-C785-C3EF-CE17-11AE27D38B69}"/>
-              </a:ext>
-            </a:extLst>
-          </p:cNvPr>
-          <p:cNvSpPr/>
-          <p:nvPr/>
-        </p:nvSpPr>
-        <p:spPr>
-          <a:xfrm>
-            <a:off x="8212790" y="2158789"/>
-            <a:ext cx="1145243" cy="766483"/>
-          </a:xfrm>
-          <a:prstGeom prst="can">
-            <a:avLst/>
-          </a:prstGeom>
-          <a:solidFill>
-            <a:schemeClr val="accent5">
-              <a:lumMod val="40000"/>
-              <a:lumOff val="60000"/>
-            </a:schemeClr>
-          </a:solidFill>
-          <a:ln>
-            <a:noFill/>
-          </a:ln>
-        </p:spPr>
-        <p:style>
-          <a:lnRef idx="2">
-            <a:schemeClr val="accent1">
-              <a:shade val="15000"/>
-            </a:schemeClr>
-          </a:lnRef>
-          <a:fillRef idx="1">
-            <a:schemeClr val="accent1"/>
-          </a:fillRef>
-          <a:effectRef idx="0">
-            <a:schemeClr val="accent1"/>
-          </a:effectRef>
-          <a:fontRef idx="minor">
-            <a:schemeClr val="lt1"/>
-          </a:fontRef>
-        </p:style>
-        <p:txBody>
-          <a:bodyPr rtlCol="0" anchor="ctr"/>
-          <a:lstStyle/>
-          <a:p>
-            <a:pPr algn="ctr"/>
-            <a:r>
-              <a:rPr lang="de-DE" sz="1200" dirty="0">
-                <a:latin typeface="Roboto" panose="02000000000000000000" pitchFamily="2" charset="0"/>
-                <a:ea typeface="Roboto" panose="02000000000000000000" pitchFamily="2" charset="0"/>
-              </a:rPr>
-              <a:t>Web-Backend (AWS?)</a:t>
-            </a:r>
-            <a:endParaRPr lang="en-US" sz="1200" dirty="0">
-              <a:latin typeface="Roboto" panose="02000000000000000000" pitchFamily="2" charset="0"/>
-              <a:ea typeface="Roboto" panose="02000000000000000000" pitchFamily="2" charset="0"/>
-            </a:endParaRPr>
-          </a:p>
-        </p:txBody>
-      </p:sp>
-      <p:cxnSp>
-        <p:nvCxnSpPr>
-          <p:cNvPr id="8" name="Gerade Verbindung mit Pfeil 7">
-            <a:extLst>
-              <a:ext uri="{FF2B5EF4-FFF2-40B4-BE49-F238E27FC236}">
-                <a16:creationId xmlns:a16="http://schemas.microsoft.com/office/drawing/2014/main" id="{7C0CEC2C-B0D7-303F-5954-37B3DB799CBF}"/>
+                <a16:creationId xmlns:a16="http://schemas.microsoft.com/office/drawing/2014/main" id="{B0A9924C-FF19-0A50-E10D-5F793158E008}"/>
               </a:ext>
             </a:extLst>
           </p:cNvPr>
           <p:cNvCxnSpPr>
             <a:cxnSpLocks/>
+            <a:stCxn id="6" idx="0"/>
             <a:endCxn id="7" idx="2"/>
           </p:cNvCxnSpPr>
           <p:nvPr/>
         </p:nvCxnSpPr>
         <p:spPr>
           <a:xfrm flipV="1">
-            <a:off x="5916707" y="2542031"/>
+            <a:off x="2084295" y="2245659"/>
             <a:ext cx="2296083" cy="746312"/>
           </a:xfrm>
           <a:prstGeom prst="straightConnector1">
             <a:avLst/>
           </a:prstGeom>
           <a:ln>
-            <a:headEnd type="triangle"/>
             <a:tailEnd type="triangle"/>
           </a:ln>
         </p:spPr>
@@ -11216,231 +8772,96 @@
           </a:fontRef>
         </p:style>
       </p:cxnSp>
-      <p:sp>
-        <p:nvSpPr>
-          <p:cNvPr id="9" name="Textfeld 8">
+      <p:cxnSp>
+        <p:nvCxnSpPr>
+          <p:cNvPr id="20" name="Gerade Verbindung mit Pfeil 19">
             <a:extLst>
               <a:ext uri="{FF2B5EF4-FFF2-40B4-BE49-F238E27FC236}">
-                <a16:creationId xmlns:a16="http://schemas.microsoft.com/office/drawing/2014/main" id="{01A7B2AE-8177-DBEB-E925-77A263E855DA}"/>
+                <a16:creationId xmlns:a16="http://schemas.microsoft.com/office/drawing/2014/main" id="{E1AF0737-FA0B-D1D9-6AAE-42B23E00189A}"/>
               </a:ext>
             </a:extLst>
           </p:cNvPr>
-          <p:cNvSpPr txBox="1"/>
+          <p:cNvCxnSpPr>
+            <a:cxnSpLocks/>
+            <a:stCxn id="7" idx="4"/>
+            <a:endCxn id="15" idx="1"/>
+          </p:cNvCxnSpPr>
           <p:nvPr/>
-        </p:nvSpPr>
+        </p:nvCxnSpPr>
         <p:spPr>
           <a:xfrm>
-            <a:off x="6011547" y="1962531"/>
-            <a:ext cx="1907895" cy="707886"/>
-          </a:xfrm>
-          <a:prstGeom prst="rect">
+            <a:off x="5525621" y="2245659"/>
+            <a:ext cx="1354230" cy="2232213"/>
+          </a:xfrm>
+          <a:prstGeom prst="straightConnector1">
             <a:avLst/>
           </a:prstGeom>
-          <a:noFill/>
-        </p:spPr>
-        <p:txBody>
-          <a:bodyPr wrap="none" rtlCol="0">
-            <a:spAutoFit/>
-          </a:bodyPr>
-          <a:lstStyle/>
-          <a:p>
-            <a:r>
-              <a:rPr lang="de-DE" sz="800" dirty="0" err="1">
-                <a:solidFill>
-                  <a:schemeClr val="tx1">
-                    <a:lumMod val="50000"/>
-                    <a:lumOff val="50000"/>
-                  </a:schemeClr>
-                </a:solidFill>
-                <a:latin typeface="Roboto" panose="02000000000000000000" pitchFamily="2" charset="0"/>
-                <a:ea typeface="Roboto" panose="02000000000000000000" pitchFamily="2" charset="0"/>
-              </a:rPr>
-              <a:t>get_current_temperature</a:t>
-            </a:r>
-            <a:r>
-              <a:rPr lang="de-DE" sz="800" dirty="0">
-                <a:solidFill>
-                  <a:schemeClr val="tx1">
-                    <a:lumMod val="50000"/>
-                    <a:lumOff val="50000"/>
-                  </a:schemeClr>
-                </a:solidFill>
-                <a:latin typeface="Roboto" panose="02000000000000000000" pitchFamily="2" charset="0"/>
-                <a:ea typeface="Roboto" panose="02000000000000000000" pitchFamily="2" charset="0"/>
-              </a:rPr>
-              <a:t>()</a:t>
-            </a:r>
-          </a:p>
-          <a:p>
-            <a:r>
-              <a:rPr lang="de-DE" sz="800" dirty="0">
-                <a:solidFill>
-                  <a:schemeClr val="tx1">
-                    <a:lumMod val="50000"/>
-                    <a:lumOff val="50000"/>
-                  </a:schemeClr>
-                </a:solidFill>
-                <a:latin typeface="Roboto" panose="02000000000000000000" pitchFamily="2" charset="0"/>
-                <a:ea typeface="Roboto" panose="02000000000000000000" pitchFamily="2" charset="0"/>
-              </a:rPr>
-              <a:t>update()</a:t>
-            </a:r>
-            <a:endParaRPr lang="en-US" sz="800" dirty="0">
-              <a:solidFill>
-                <a:schemeClr val="tx1">
-                  <a:lumMod val="50000"/>
-                  <a:lumOff val="50000"/>
-                </a:schemeClr>
-              </a:solidFill>
-              <a:latin typeface="Roboto" panose="02000000000000000000" pitchFamily="2" charset="0"/>
-              <a:ea typeface="Roboto" panose="02000000000000000000" pitchFamily="2" charset="0"/>
-            </a:endParaRPr>
-          </a:p>
-          <a:p>
-            <a:r>
-              <a:rPr lang="en-US" sz="800" dirty="0" err="1">
-                <a:solidFill>
-                  <a:schemeClr val="tx1">
-                    <a:lumMod val="50000"/>
-                    <a:lumOff val="50000"/>
-                  </a:schemeClr>
-                </a:solidFill>
-                <a:latin typeface="Roboto" panose="02000000000000000000" pitchFamily="2" charset="0"/>
-                <a:ea typeface="Roboto" panose="02000000000000000000" pitchFamily="2" charset="0"/>
-              </a:rPr>
-              <a:t>get_temperature_history</a:t>
-            </a:r>
-            <a:r>
-              <a:rPr lang="en-US" sz="800" dirty="0">
-                <a:solidFill>
-                  <a:schemeClr val="tx1">
-                    <a:lumMod val="50000"/>
-                    <a:lumOff val="50000"/>
-                  </a:schemeClr>
-                </a:solidFill>
-                <a:latin typeface="Roboto" panose="02000000000000000000" pitchFamily="2" charset="0"/>
-                <a:ea typeface="Roboto" panose="02000000000000000000" pitchFamily="2" charset="0"/>
-              </a:rPr>
-              <a:t>(int seconds)</a:t>
-            </a:r>
-          </a:p>
-          <a:p>
-            <a:r>
-              <a:rPr lang="en-US" sz="800" dirty="0" err="1">
-                <a:solidFill>
-                  <a:schemeClr val="tx1">
-                    <a:lumMod val="50000"/>
-                    <a:lumOff val="50000"/>
-                  </a:schemeClr>
-                </a:solidFill>
-                <a:latin typeface="Roboto" panose="02000000000000000000" pitchFamily="2" charset="0"/>
-                <a:ea typeface="Roboto" panose="02000000000000000000" pitchFamily="2" charset="0"/>
-              </a:rPr>
-              <a:t>set_update_interval</a:t>
-            </a:r>
-            <a:r>
-              <a:rPr lang="en-US" sz="800" dirty="0">
-                <a:solidFill>
-                  <a:schemeClr val="tx1">
-                    <a:lumMod val="50000"/>
-                    <a:lumOff val="50000"/>
-                  </a:schemeClr>
-                </a:solidFill>
-                <a:latin typeface="Roboto" panose="02000000000000000000" pitchFamily="2" charset="0"/>
-                <a:ea typeface="Roboto" panose="02000000000000000000" pitchFamily="2" charset="0"/>
-              </a:rPr>
-              <a:t>(int seconds)</a:t>
-            </a:r>
-          </a:p>
-          <a:p>
-            <a:r>
-              <a:rPr lang="en-US" sz="800" dirty="0" err="1">
-                <a:solidFill>
-                  <a:schemeClr val="tx1">
-                    <a:lumMod val="50000"/>
-                    <a:lumOff val="50000"/>
-                  </a:schemeClr>
-                </a:solidFill>
-                <a:latin typeface="Roboto" panose="02000000000000000000" pitchFamily="2" charset="0"/>
-                <a:ea typeface="Roboto" panose="02000000000000000000" pitchFamily="2" charset="0"/>
-              </a:rPr>
-              <a:t>register_status</a:t>
-            </a:r>
-            <a:r>
-              <a:rPr lang="en-US" sz="800" dirty="0">
-                <a:solidFill>
-                  <a:schemeClr val="tx1">
-                    <a:lumMod val="50000"/>
-                    <a:lumOff val="50000"/>
-                  </a:schemeClr>
-                </a:solidFill>
-                <a:latin typeface="Roboto" panose="02000000000000000000" pitchFamily="2" charset="0"/>
-                <a:ea typeface="Roboto" panose="02000000000000000000" pitchFamily="2" charset="0"/>
-              </a:rPr>
-              <a:t>()</a:t>
-            </a:r>
-          </a:p>
-        </p:txBody>
-      </p:sp>
-      <p:sp>
-        <p:nvSpPr>
-          <p:cNvPr id="16" name="Flussdiagramm: Prozess 15">
+          <a:ln>
+            <a:tailEnd type="triangle"/>
+          </a:ln>
+        </p:spPr>
+        <p:style>
+          <a:lnRef idx="2">
+            <a:schemeClr val="accent1"/>
+          </a:lnRef>
+          <a:fillRef idx="0">
+            <a:schemeClr val="accent1"/>
+          </a:fillRef>
+          <a:effectRef idx="1">
+            <a:schemeClr val="accent1"/>
+          </a:effectRef>
+          <a:fontRef idx="minor">
+            <a:schemeClr val="tx1"/>
+          </a:fontRef>
+        </p:style>
+      </p:cxnSp>
+      <p:cxnSp>
+        <p:nvCxnSpPr>
+          <p:cNvPr id="25" name="Gerade Verbindung mit Pfeil 24">
             <a:extLst>
               <a:ext uri="{FF2B5EF4-FFF2-40B4-BE49-F238E27FC236}">
-                <a16:creationId xmlns:a16="http://schemas.microsoft.com/office/drawing/2014/main" id="{3B67F2D5-BB0F-B39E-DD9B-A514954CA515}"/>
+                <a16:creationId xmlns:a16="http://schemas.microsoft.com/office/drawing/2014/main" id="{34B8B321-9C2A-B1FD-BE87-427DD149690F}"/>
               </a:ext>
             </a:extLst>
           </p:cNvPr>
-          <p:cNvSpPr/>
+          <p:cNvCxnSpPr>
+            <a:cxnSpLocks/>
+            <a:stCxn id="7" idx="4"/>
+            <a:endCxn id="8" idx="1"/>
+          </p:cNvCxnSpPr>
           <p:nvPr/>
-        </p:nvSpPr>
+        </p:nvCxnSpPr>
         <p:spPr>
           <a:xfrm>
-            <a:off x="891988" y="2037229"/>
-            <a:ext cx="4061012" cy="3926541"/>
-          </a:xfrm>
-          <a:prstGeom prst="flowChartProcess">
+            <a:off x="5525621" y="2245659"/>
+            <a:ext cx="2029383" cy="1116107"/>
+          </a:xfrm>
+          <a:prstGeom prst="straightConnector1">
             <a:avLst/>
           </a:prstGeom>
+          <a:ln>
+            <a:tailEnd type="triangle"/>
+          </a:ln>
         </p:spPr>
         <p:style>
           <a:lnRef idx="2">
-            <a:schemeClr val="accent1">
-              <a:shade val="15000"/>
-            </a:schemeClr>
+            <a:schemeClr val="accent1"/>
           </a:lnRef>
-          <a:fillRef idx="1">
+          <a:fillRef idx="0">
             <a:schemeClr val="accent1"/>
           </a:fillRef>
-          <a:effectRef idx="0">
+          <a:effectRef idx="1">
             <a:schemeClr val="accent1"/>
           </a:effectRef>
           <a:fontRef idx="minor">
-            <a:schemeClr val="lt1"/>
+            <a:schemeClr val="tx1"/>
           </a:fontRef>
         </p:style>
-        <p:txBody>
-          <a:bodyPr rtlCol="0" anchor="t"/>
-          <a:lstStyle/>
-          <a:p>
-            <a:r>
-              <a:rPr lang="de-DE" sz="1200" i="1" dirty="0" err="1">
-                <a:latin typeface="Roboto" panose="02000000000000000000" pitchFamily="2" charset="0"/>
-                <a:ea typeface="Roboto" panose="02000000000000000000" pitchFamily="2" charset="0"/>
-              </a:rPr>
-              <a:t>kiln_temperature_observer</a:t>
-            </a:r>
-            <a:endParaRPr lang="en-US" sz="1200" i="1" dirty="0">
-              <a:latin typeface="Roboto" panose="02000000000000000000" pitchFamily="2" charset="0"/>
-              <a:ea typeface="Roboto" panose="02000000000000000000" pitchFamily="2" charset="0"/>
-            </a:endParaRPr>
-          </a:p>
-        </p:txBody>
-      </p:sp>
+      </p:cxnSp>
     </p:spTree>
     <p:extLst>
       <p:ext uri="{BB962C8B-B14F-4D97-AF65-F5344CB8AC3E}">
-        <p14:creationId xmlns:p14="http://schemas.microsoft.com/office/powerpoint/2010/main" val="651556126"/>
+        <p14:creationId xmlns:p14="http://schemas.microsoft.com/office/powerpoint/2010/main" val="2270234790"/>
       </p:ext>
     </p:extLst>
   </p:cSld>
